--- a/docs/EventRelay-pitch.pptx
+++ b/docs/EventRelay-pitch.pptx
@@ -2,20 +2,21 @@
 <file path=ppt/presentation.xml><?xml version="1.0" encoding="utf-8"?>
 <p:presentation xmlns:p="http://schemas.openxmlformats.org/presentationml/2006/main">
   <p:sldMasterIdLst>
-    <p:sldMasterId xmlns:r="http://schemas.openxmlformats.org/officeDocument/2006/relationships" id="2147483648" r:id="R9262d54b4c3c436b"/>
+    <p:sldMasterId xmlns:r="http://schemas.openxmlformats.org/officeDocument/2006/relationships" id="2147483648" r:id="Rf0ad703de2ce4367"/>
   </p:sldMasterIdLst>
   <p:notesMasterIdLst>
-    <p:notesMasterId xmlns:r="http://schemas.openxmlformats.org/officeDocument/2006/relationships" r:id="Rc3058bde5e6146db"/>
+    <p:notesMasterId xmlns:r="http://schemas.openxmlformats.org/officeDocument/2006/relationships" r:id="Ra80040c1325641d2"/>
   </p:notesMasterIdLst>
   <p:sldIdLst>
-    <p:sldId xmlns:r="http://schemas.openxmlformats.org/officeDocument/2006/relationships" id="256" r:id="R47d583d20819416d"/>
-    <p:sldId xmlns:r="http://schemas.openxmlformats.org/officeDocument/2006/relationships" id="257" r:id="R8ea4b05a344a4bc0"/>
-    <p:sldId xmlns:r="http://schemas.openxmlformats.org/officeDocument/2006/relationships" id="258" r:id="R8be36cb7ea3841b5"/>
-    <p:sldId xmlns:r="http://schemas.openxmlformats.org/officeDocument/2006/relationships" id="259" r:id="R0a1bfe57d40d4060"/>
-    <p:sldId xmlns:r="http://schemas.openxmlformats.org/officeDocument/2006/relationships" id="260" r:id="R2bfa22f3415c466b"/>
-    <p:sldId xmlns:r="http://schemas.openxmlformats.org/officeDocument/2006/relationships" id="261" r:id="R0a25a37159b94353"/>
-    <p:sldId xmlns:r="http://schemas.openxmlformats.org/officeDocument/2006/relationships" id="262" r:id="Rc9b184e133654045"/>
-    <p:sldId xmlns:r="http://schemas.openxmlformats.org/officeDocument/2006/relationships" id="263" r:id="R54021f681b8a4f73"/>
+    <p:sldId xmlns:r="http://schemas.openxmlformats.org/officeDocument/2006/relationships" id="256" r:id="Rb59d148dd1054da7"/>
+    <p:sldId xmlns:r="http://schemas.openxmlformats.org/officeDocument/2006/relationships" id="257" r:id="Re13dcbd966eb4277"/>
+    <p:sldId xmlns:r="http://schemas.openxmlformats.org/officeDocument/2006/relationships" id="258" r:id="R5790158bf0234a20"/>
+    <p:sldId xmlns:r="http://schemas.openxmlformats.org/officeDocument/2006/relationships" id="259" r:id="R1597f51192b34ede"/>
+    <p:sldId xmlns:r="http://schemas.openxmlformats.org/officeDocument/2006/relationships" id="260" r:id="R60b0f116564d46d8"/>
+    <p:sldId xmlns:r="http://schemas.openxmlformats.org/officeDocument/2006/relationships" id="261" r:id="R2325bf7f10f54325"/>
+    <p:sldId xmlns:r="http://schemas.openxmlformats.org/officeDocument/2006/relationships" id="262" r:id="Rad723e91e3ed4317"/>
+    <p:sldId xmlns:r="http://schemas.openxmlformats.org/officeDocument/2006/relationships" id="263" r:id="Rbdc6e1ab08cb4e81"/>
+    <p:sldId xmlns:r="http://schemas.openxmlformats.org/officeDocument/2006/relationships" id="264" r:id="R9a0d3e608a1a4245"/>
   </p:sldIdLst>
   <p:sldSz cx="12192000" cy="6858000"/>
   <p:notesSz cx="6858000" cy="9144000"/>
@@ -889,6 +890,76 @@
           <a:lstStyle xmlns:a="http://schemas.openxmlformats.org/drawingml/2006/main"/>
           <a:p xmlns:a="http://schemas.openxmlformats.org/drawingml/2006/main">
             <a:r>
+              <a:t>User-supplied EventRelay workflow diagram, included in full without redrawing, cropping or changing the image. Detailed conceptual workflow accompanies the implementation and verified demonstration described in the preceding slides.</a:t>
+            </a:r>
+          </a:p>
+        </p:txBody>
+      </p:sp>
+      <p:sp>
+        <p:nvSpPr>
+          <p:cNvPr id="4" name="Slide Number Placeholder 3"/>
+          <p:cNvSpPr>
+            <a:spLocks xmlns:a="http://schemas.openxmlformats.org/drawingml/2006/main" noGrp="1"/>
+          </p:cNvSpPr>
+          <p:nvPr>
+            <p:ph type="sldNum" idx="5"/>
+          </p:nvPr>
+        </p:nvSpPr>
+        <p:spPr/>
+        <p:txBody>
+          <a:bodyPr xmlns:a="http://schemas.openxmlformats.org/drawingml/2006/main"/>
+          <a:lstStyle xmlns:a="http://schemas.openxmlformats.org/drawingml/2006/main"/>
+          <a:p xmlns:a="http://schemas.openxmlformats.org/drawingml/2006/main"/>
+        </p:txBody>
+      </p:sp>
+    </p:spTree>
+  </p:cSld>
+  <p:clrMapOvr>
+    <a:masterClrMapping xmlns:a="http://schemas.openxmlformats.org/drawingml/2006/main"/>
+  </p:clrMapOvr>
+</p:notes>
+</file>
+
+<file path=ppt/notesSlides/notesSlide8.xml><?xml version="1.0" encoding="utf-8"?>
+<p:notes xmlns:p="http://schemas.openxmlformats.org/presentationml/2006/main">
+  <p:cSld>
+    <p:spTree>
+      <p:nvGrpSpPr>
+        <p:cNvPr id="1" name=""/>
+        <p:cNvGrpSpPr/>
+        <p:nvPr/>
+      </p:nvGrpSpPr>
+      <p:grpSpPr>
+        <a:xfrm xmlns:a="http://schemas.openxmlformats.org/drawingml/2006/main"/>
+      </p:grpSpPr>
+      <p:sp>
+        <p:nvSpPr>
+          <p:cNvPr id="2" name="Slide Image Placeholder 1"/>
+          <p:cNvSpPr>
+            <a:spLocks xmlns:a="http://schemas.openxmlformats.org/drawingml/2006/main" noGrp="1"/>
+          </p:cNvSpPr>
+          <p:nvPr>
+            <p:ph type="sldImg" idx="0"/>
+          </p:nvPr>
+        </p:nvSpPr>
+        <p:spPr/>
+      </p:sp>
+      <p:sp>
+        <p:nvSpPr>
+          <p:cNvPr id="3" name="Notes Placeholder 2"/>
+          <p:cNvSpPr>
+            <a:spLocks xmlns:a="http://schemas.openxmlformats.org/drawingml/2006/main" noGrp="1"/>
+          </p:cNvSpPr>
+          <p:nvPr>
+            <p:ph type="body" idx="1"/>
+          </p:nvPr>
+        </p:nvSpPr>
+        <p:spPr/>
+        <p:txBody>
+          <a:bodyPr xmlns:a="http://schemas.openxmlformats.org/drawingml/2006/main"/>
+          <a:lstStyle xmlns:a="http://schemas.openxmlformats.org/drawingml/2006/main"/>
+          <a:p xmlns:a="http://schemas.openxmlformats.org/drawingml/2006/main">
+            <a:r>
               <a:t>Everything on this slide is proposed, not a claim of implemented integrations or adoption. Current prototype has trusted sender allowlists, but production crew onboarding needs a real pilot. Router currently uses one demonstration event. WhatsApp/voice and multi-event features are future integrations only. Business model is an unvalidated paid-pilot and later agency-subscription hypothesis. Source: https://github.com/sibiselvam2027-cpu/eventrelay-fetchathon/blob/main/docs/BUSINESS_MODEL.md</a:t>
             </a:r>
           </a:p>
@@ -919,7 +990,7 @@
 </p:notes>
 </file>
 
-<file path=ppt/notesSlides/notesSlide8.xml><?xml version="1.0" encoding="utf-8"?>
+<file path=ppt/notesSlides/notesSlide9.xml><?xml version="1.0" encoding="utf-8"?>
 <p:notes xmlns:p="http://schemas.openxmlformats.org/presentationml/2006/main">
   <p:cSld>
     <p:spTree>
@@ -3412,12 +3483,12 @@
   </p:cSld>
   <p:clrMap bg1="lt1" tx1="dk1" bg2="lt2" tx2="dk2" accent1="accent1" accent2="accent2" accent3="accent3" accent4="accent4" accent5="accent5" accent6="accent6" hlink="hlink" folHlink="folHlink"/>
   <p:sldLayoutIdLst>
-    <p:sldLayoutId xmlns:r="http://schemas.openxmlformats.org/officeDocument/2006/relationships" id="2147483649" r:id="R4035194344504eb6"/>
-    <p:sldLayoutId xmlns:r="http://schemas.openxmlformats.org/officeDocument/2006/relationships" id="2147483650" r:id="R32094e8ddbca4e8f"/>
-    <p:sldLayoutId xmlns:r="http://schemas.openxmlformats.org/officeDocument/2006/relationships" id="2147483651" r:id="R29d60d1852724279"/>
-    <p:sldLayoutId xmlns:r="http://schemas.openxmlformats.org/officeDocument/2006/relationships" id="2147483652" r:id="R32eb8959c4a449a0"/>
-    <p:sldLayoutId xmlns:r="http://schemas.openxmlformats.org/officeDocument/2006/relationships" id="2147483653" r:id="Rac234ef83d0a4a82"/>
-    <p:sldLayoutId xmlns:r="http://schemas.openxmlformats.org/officeDocument/2006/relationships" id="2147483654" r:id="Rbcbbcb09e81d4fa5"/>
+    <p:sldLayoutId xmlns:r="http://schemas.openxmlformats.org/officeDocument/2006/relationships" id="2147483649" r:id="R45e00c971b51414f"/>
+    <p:sldLayoutId xmlns:r="http://schemas.openxmlformats.org/officeDocument/2006/relationships" id="2147483650" r:id="R01240cec64b14802"/>
+    <p:sldLayoutId xmlns:r="http://schemas.openxmlformats.org/officeDocument/2006/relationships" id="2147483651" r:id="Rb67f1a94a5a94755"/>
+    <p:sldLayoutId xmlns:r="http://schemas.openxmlformats.org/officeDocument/2006/relationships" id="2147483652" r:id="R8af608a41a194b8f"/>
+    <p:sldLayoutId xmlns:r="http://schemas.openxmlformats.org/officeDocument/2006/relationships" id="2147483653" r:id="Rc594f0340e304f47"/>
+    <p:sldLayoutId xmlns:r="http://schemas.openxmlformats.org/officeDocument/2006/relationships" id="2147483654" r:id="R849a8387484b41ba"/>
   </p:sldLayoutIdLst>
   <p:txStyles>
     <p:titleStyle>
@@ -4006,6 +4077,7 @@
               </a:defRPr>
             </a:defPPr>
             <a:lvl1pPr algn="l">
+              <a:buNone/>
               <a:defRPr sz="7050" b="1">
                 <a:solidFill>
                   <a:srgbClr val="F4F7FC"/>
@@ -4016,6 +4088,7 @@
               </a:defRPr>
             </a:lvl1pPr>
             <a:lvl2pPr algn="l">
+              <a:buNone/>
               <a:defRPr sz="7050" b="1">
                 <a:solidFill>
                   <a:srgbClr val="F4F7FC"/>
@@ -4026,6 +4099,7 @@
               </a:defRPr>
             </a:lvl2pPr>
             <a:lvl3pPr algn="l">
+              <a:buNone/>
               <a:defRPr sz="7050" b="1">
                 <a:solidFill>
                   <a:srgbClr val="F4F7FC"/>
@@ -4036,6 +4110,7 @@
               </a:defRPr>
             </a:lvl3pPr>
             <a:lvl4pPr algn="l">
+              <a:buNone/>
               <a:defRPr sz="7050" b="1">
                 <a:solidFill>
                   <a:srgbClr val="F4F7FC"/>
@@ -4046,6 +4121,7 @@
               </a:defRPr>
             </a:lvl4pPr>
             <a:lvl5pPr algn="l">
+              <a:buNone/>
               <a:defRPr sz="7050" b="1">
                 <a:solidFill>
                   <a:srgbClr val="F4F7FC"/>
@@ -4056,6 +4132,7 @@
               </a:defRPr>
             </a:lvl5pPr>
             <a:lvl6pPr algn="l">
+              <a:buNone/>
               <a:defRPr sz="7050" b="1">
                 <a:solidFill>
                   <a:srgbClr val="F4F7FC"/>
@@ -4066,6 +4143,7 @@
               </a:defRPr>
             </a:lvl6pPr>
             <a:lvl7pPr algn="l">
+              <a:buNone/>
               <a:defRPr sz="7050" b="1">
                 <a:solidFill>
                   <a:srgbClr val="F4F7FC"/>
@@ -4076,6 +4154,7 @@
               </a:defRPr>
             </a:lvl7pPr>
             <a:lvl8pPr algn="l">
+              <a:buNone/>
               <a:defRPr sz="7050" b="1">
                 <a:solidFill>
                   <a:srgbClr val="F4F7FC"/>
@@ -4086,6 +4165,7 @@
               </a:defRPr>
             </a:lvl8pPr>
             <a:lvl9pPr algn="l">
+              <a:buNone/>
               <a:defRPr sz="7050" b="1">
                 <a:solidFill>
                   <a:srgbClr val="F4F7FC"/>
@@ -4098,6 +4178,7 @@
           </a:lstStyle>
           <a:p xmlns:a="http://schemas.openxmlformats.org/drawingml/2006/main">
             <a:pPr algn="l">
+              <a:buNone/>
               <a:defRPr sz="7050" b="1">
                 <a:solidFill>
                   <a:srgbClr val="F4F7FC"/>
@@ -4164,6 +4245,7 @@
               </a:defRPr>
             </a:defPPr>
             <a:lvl1pPr algn="l">
+              <a:buNone/>
               <a:defRPr sz="3450" b="0">
                 <a:solidFill>
                   <a:srgbClr val="F4F7FC"/>
@@ -4174,6 +4256,7 @@
               </a:defRPr>
             </a:lvl1pPr>
             <a:lvl2pPr algn="l">
+              <a:buNone/>
               <a:defRPr sz="3450" b="0">
                 <a:solidFill>
                   <a:srgbClr val="F4F7FC"/>
@@ -4184,6 +4267,7 @@
               </a:defRPr>
             </a:lvl2pPr>
             <a:lvl3pPr algn="l">
+              <a:buNone/>
               <a:defRPr sz="3450" b="0">
                 <a:solidFill>
                   <a:srgbClr val="F4F7FC"/>
@@ -4194,6 +4278,7 @@
               </a:defRPr>
             </a:lvl3pPr>
             <a:lvl4pPr algn="l">
+              <a:buNone/>
               <a:defRPr sz="3450" b="0">
                 <a:solidFill>
                   <a:srgbClr val="F4F7FC"/>
@@ -4204,6 +4289,7 @@
               </a:defRPr>
             </a:lvl4pPr>
             <a:lvl5pPr algn="l">
+              <a:buNone/>
               <a:defRPr sz="3450" b="0">
                 <a:solidFill>
                   <a:srgbClr val="F4F7FC"/>
@@ -4214,6 +4300,7 @@
               </a:defRPr>
             </a:lvl5pPr>
             <a:lvl6pPr algn="l">
+              <a:buNone/>
               <a:defRPr sz="3450" b="0">
                 <a:solidFill>
                   <a:srgbClr val="F4F7FC"/>
@@ -4224,6 +4311,7 @@
               </a:defRPr>
             </a:lvl6pPr>
             <a:lvl7pPr algn="l">
+              <a:buNone/>
               <a:defRPr sz="3450" b="0">
                 <a:solidFill>
                   <a:srgbClr val="F4F7FC"/>
@@ -4234,6 +4322,7 @@
               </a:defRPr>
             </a:lvl7pPr>
             <a:lvl8pPr algn="l">
+              <a:buNone/>
               <a:defRPr sz="3450" b="0">
                 <a:solidFill>
                   <a:srgbClr val="F4F7FC"/>
@@ -4244,6 +4333,7 @@
               </a:defRPr>
             </a:lvl8pPr>
             <a:lvl9pPr algn="l">
+              <a:buNone/>
               <a:defRPr sz="3450" b="0">
                 <a:solidFill>
                   <a:srgbClr val="F4F7FC"/>
@@ -4256,6 +4346,7 @@
           </a:lstStyle>
           <a:p xmlns:a="http://schemas.openxmlformats.org/drawingml/2006/main">
             <a:pPr algn="l">
+              <a:buNone/>
               <a:defRPr sz="3450" b="0">
                 <a:solidFill>
                   <a:srgbClr val="F4F7FC"/>
@@ -4279,6 +4370,7 @@
           </a:p>
           <a:p xmlns:a="http://schemas.openxmlformats.org/drawingml/2006/main">
             <a:pPr algn="l">
+              <a:buNone/>
               <a:defRPr sz="3450" b="0">
                 <a:solidFill>
                   <a:srgbClr val="F4F7FC"/>
@@ -4345,6 +4437,7 @@
               </a:defRPr>
             </a:defPPr>
             <a:lvl1pPr algn="l">
+              <a:buNone/>
               <a:defRPr sz="2100" b="0">
                 <a:solidFill>
                   <a:srgbClr val="B3C5DD"/>
@@ -4355,6 +4448,7 @@
               </a:defRPr>
             </a:lvl1pPr>
             <a:lvl2pPr algn="l">
+              <a:buNone/>
               <a:defRPr sz="2100" b="0">
                 <a:solidFill>
                   <a:srgbClr val="B3C5DD"/>
@@ -4365,6 +4459,7 @@
               </a:defRPr>
             </a:lvl2pPr>
             <a:lvl3pPr algn="l">
+              <a:buNone/>
               <a:defRPr sz="2100" b="0">
                 <a:solidFill>
                   <a:srgbClr val="B3C5DD"/>
@@ -4375,6 +4470,7 @@
               </a:defRPr>
             </a:lvl3pPr>
             <a:lvl4pPr algn="l">
+              <a:buNone/>
               <a:defRPr sz="2100" b="0">
                 <a:solidFill>
                   <a:srgbClr val="B3C5DD"/>
@@ -4385,6 +4481,7 @@
               </a:defRPr>
             </a:lvl4pPr>
             <a:lvl5pPr algn="l">
+              <a:buNone/>
               <a:defRPr sz="2100" b="0">
                 <a:solidFill>
                   <a:srgbClr val="B3C5DD"/>
@@ -4395,6 +4492,7 @@
               </a:defRPr>
             </a:lvl5pPr>
             <a:lvl6pPr algn="l">
+              <a:buNone/>
               <a:defRPr sz="2100" b="0">
                 <a:solidFill>
                   <a:srgbClr val="B3C5DD"/>
@@ -4405,6 +4503,7 @@
               </a:defRPr>
             </a:lvl6pPr>
             <a:lvl7pPr algn="l">
+              <a:buNone/>
               <a:defRPr sz="2100" b="0">
                 <a:solidFill>
                   <a:srgbClr val="B3C5DD"/>
@@ -4415,6 +4514,7 @@
               </a:defRPr>
             </a:lvl7pPr>
             <a:lvl8pPr algn="l">
+              <a:buNone/>
               <a:defRPr sz="2100" b="0">
                 <a:solidFill>
                   <a:srgbClr val="B3C5DD"/>
@@ -4425,6 +4525,7 @@
               </a:defRPr>
             </a:lvl8pPr>
             <a:lvl9pPr algn="l">
+              <a:buNone/>
               <a:defRPr sz="2100" b="0">
                 <a:solidFill>
                   <a:srgbClr val="B3C5DD"/>
@@ -4437,6 +4538,7 @@
           </a:lstStyle>
           <a:p xmlns:a="http://schemas.openxmlformats.org/drawingml/2006/main">
             <a:pPr algn="l">
+              <a:buNone/>
               <a:defRPr sz="2100" b="0">
                 <a:solidFill>
                   <a:srgbClr val="B3C5DD"/>
@@ -4460,6 +4562,7 @@
           </a:p>
           <a:p xmlns:a="http://schemas.openxmlformats.org/drawingml/2006/main">
             <a:pPr algn="l">
+              <a:buNone/>
               <a:defRPr sz="2100" b="0">
                 <a:solidFill>
                   <a:srgbClr val="B3C5DD"/>
@@ -4483,6 +4586,7 @@
           </a:p>
           <a:p xmlns:a="http://schemas.openxmlformats.org/drawingml/2006/main">
             <a:pPr algn="l">
+              <a:buNone/>
               <a:defRPr sz="2100" b="0">
                 <a:solidFill>
                   <a:srgbClr val="B3C5DD"/>
@@ -4549,6 +4653,7 @@
               </a:defRPr>
             </a:defPPr>
             <a:lvl1pPr algn="l">
+              <a:buNone/>
               <a:defRPr sz="1500" b="0">
                 <a:solidFill>
                   <a:srgbClr val="B3C5DD"/>
@@ -4559,6 +4664,7 @@
               </a:defRPr>
             </a:lvl1pPr>
             <a:lvl2pPr algn="l">
+              <a:buNone/>
               <a:defRPr sz="1500" b="0">
                 <a:solidFill>
                   <a:srgbClr val="B3C5DD"/>
@@ -4569,6 +4675,7 @@
               </a:defRPr>
             </a:lvl2pPr>
             <a:lvl3pPr algn="l">
+              <a:buNone/>
               <a:defRPr sz="1500" b="0">
                 <a:solidFill>
                   <a:srgbClr val="B3C5DD"/>
@@ -4579,6 +4686,7 @@
               </a:defRPr>
             </a:lvl3pPr>
             <a:lvl4pPr algn="l">
+              <a:buNone/>
               <a:defRPr sz="1500" b="0">
                 <a:solidFill>
                   <a:srgbClr val="B3C5DD"/>
@@ -4589,6 +4697,7 @@
               </a:defRPr>
             </a:lvl4pPr>
             <a:lvl5pPr algn="l">
+              <a:buNone/>
               <a:defRPr sz="1500" b="0">
                 <a:solidFill>
                   <a:srgbClr val="B3C5DD"/>
@@ -4599,6 +4708,7 @@
               </a:defRPr>
             </a:lvl5pPr>
             <a:lvl6pPr algn="l">
+              <a:buNone/>
               <a:defRPr sz="1500" b="0">
                 <a:solidFill>
                   <a:srgbClr val="B3C5DD"/>
@@ -4609,6 +4719,7 @@
               </a:defRPr>
             </a:lvl6pPr>
             <a:lvl7pPr algn="l">
+              <a:buNone/>
               <a:defRPr sz="1500" b="0">
                 <a:solidFill>
                   <a:srgbClr val="B3C5DD"/>
@@ -4619,6 +4730,7 @@
               </a:defRPr>
             </a:lvl7pPr>
             <a:lvl8pPr algn="l">
+              <a:buNone/>
               <a:defRPr sz="1500" b="0">
                 <a:solidFill>
                   <a:srgbClr val="B3C5DD"/>
@@ -4629,6 +4741,7 @@
               </a:defRPr>
             </a:lvl8pPr>
             <a:lvl9pPr algn="l">
+              <a:buNone/>
               <a:defRPr sz="1500" b="0">
                 <a:solidFill>
                   <a:srgbClr val="B3C5DD"/>
@@ -4641,6 +4754,7 @@
           </a:lstStyle>
           <a:p xmlns:a="http://schemas.openxmlformats.org/drawingml/2006/main">
             <a:pPr algn="l">
+              <a:buNone/>
               <a:defRPr sz="1500" b="0">
                 <a:solidFill>
                   <a:srgbClr val="B3C5DD"/>
@@ -4736,6 +4850,7 @@
               </a:defRPr>
             </a:defPPr>
             <a:lvl1pPr algn="l">
+              <a:buNone/>
               <a:defRPr sz="3300" b="1">
                 <a:solidFill>
                   <a:srgbClr val="F4F7FC"/>
@@ -4746,6 +4861,7 @@
               </a:defRPr>
             </a:lvl1pPr>
             <a:lvl2pPr algn="l">
+              <a:buNone/>
               <a:defRPr sz="3300" b="1">
                 <a:solidFill>
                   <a:srgbClr val="F4F7FC"/>
@@ -4756,6 +4872,7 @@
               </a:defRPr>
             </a:lvl2pPr>
             <a:lvl3pPr algn="l">
+              <a:buNone/>
               <a:defRPr sz="3300" b="1">
                 <a:solidFill>
                   <a:srgbClr val="F4F7FC"/>
@@ -4766,6 +4883,7 @@
               </a:defRPr>
             </a:lvl3pPr>
             <a:lvl4pPr algn="l">
+              <a:buNone/>
               <a:defRPr sz="3300" b="1">
                 <a:solidFill>
                   <a:srgbClr val="F4F7FC"/>
@@ -4776,6 +4894,7 @@
               </a:defRPr>
             </a:lvl4pPr>
             <a:lvl5pPr algn="l">
+              <a:buNone/>
               <a:defRPr sz="3300" b="1">
                 <a:solidFill>
                   <a:srgbClr val="F4F7FC"/>
@@ -4786,6 +4905,7 @@
               </a:defRPr>
             </a:lvl5pPr>
             <a:lvl6pPr algn="l">
+              <a:buNone/>
               <a:defRPr sz="3300" b="1">
                 <a:solidFill>
                   <a:srgbClr val="F4F7FC"/>
@@ -4796,6 +4916,7 @@
               </a:defRPr>
             </a:lvl6pPr>
             <a:lvl7pPr algn="l">
+              <a:buNone/>
               <a:defRPr sz="3300" b="1">
                 <a:solidFill>
                   <a:srgbClr val="F4F7FC"/>
@@ -4806,6 +4927,7 @@
               </a:defRPr>
             </a:lvl7pPr>
             <a:lvl8pPr algn="l">
+              <a:buNone/>
               <a:defRPr sz="3300" b="1">
                 <a:solidFill>
                   <a:srgbClr val="F4F7FC"/>
@@ -4816,6 +4938,7 @@
               </a:defRPr>
             </a:lvl8pPr>
             <a:lvl9pPr algn="l">
+              <a:buNone/>
               <a:defRPr sz="3300" b="1">
                 <a:solidFill>
                   <a:srgbClr val="F4F7FC"/>
@@ -4828,6 +4951,7 @@
           </a:lstStyle>
           <a:p xmlns:a="http://schemas.openxmlformats.org/drawingml/2006/main">
             <a:pPr algn="l">
+              <a:buNone/>
               <a:defRPr sz="3300" b="1">
                 <a:solidFill>
                   <a:srgbClr val="F4F7FC"/>
@@ -4894,6 +5018,7 @@
               </a:defRPr>
             </a:defPPr>
             <a:lvl1pPr algn="l">
+              <a:buNone/>
               <a:defRPr sz="1875" b="1">
                 <a:solidFill>
                   <a:srgbClr val="59E2BD"/>
@@ -4904,6 +5029,7 @@
               </a:defRPr>
             </a:lvl1pPr>
             <a:lvl2pPr algn="l">
+              <a:buNone/>
               <a:defRPr sz="1875" b="1">
                 <a:solidFill>
                   <a:srgbClr val="59E2BD"/>
@@ -4914,6 +5040,7 @@
               </a:defRPr>
             </a:lvl2pPr>
             <a:lvl3pPr algn="l">
+              <a:buNone/>
               <a:defRPr sz="1875" b="1">
                 <a:solidFill>
                   <a:srgbClr val="59E2BD"/>
@@ -4924,6 +5051,7 @@
               </a:defRPr>
             </a:lvl3pPr>
             <a:lvl4pPr algn="l">
+              <a:buNone/>
               <a:defRPr sz="1875" b="1">
                 <a:solidFill>
                   <a:srgbClr val="59E2BD"/>
@@ -4934,6 +5062,7 @@
               </a:defRPr>
             </a:lvl4pPr>
             <a:lvl5pPr algn="l">
+              <a:buNone/>
               <a:defRPr sz="1875" b="1">
                 <a:solidFill>
                   <a:srgbClr val="59E2BD"/>
@@ -4944,6 +5073,7 @@
               </a:defRPr>
             </a:lvl5pPr>
             <a:lvl6pPr algn="l">
+              <a:buNone/>
               <a:defRPr sz="1875" b="1">
                 <a:solidFill>
                   <a:srgbClr val="59E2BD"/>
@@ -4954,6 +5084,7 @@
               </a:defRPr>
             </a:lvl6pPr>
             <a:lvl7pPr algn="l">
+              <a:buNone/>
               <a:defRPr sz="1875" b="1">
                 <a:solidFill>
                   <a:srgbClr val="59E2BD"/>
@@ -4964,6 +5095,7 @@
               </a:defRPr>
             </a:lvl7pPr>
             <a:lvl8pPr algn="l">
+              <a:buNone/>
               <a:defRPr sz="1875" b="1">
                 <a:solidFill>
                   <a:srgbClr val="59E2BD"/>
@@ -4974,6 +5106,7 @@
               </a:defRPr>
             </a:lvl8pPr>
             <a:lvl9pPr algn="l">
+              <a:buNone/>
               <a:defRPr sz="1875" b="1">
                 <a:solidFill>
                   <a:srgbClr val="59E2BD"/>
@@ -4986,6 +5119,7 @@
           </a:lstStyle>
           <a:p xmlns:a="http://schemas.openxmlformats.org/drawingml/2006/main">
             <a:pPr algn="l">
+              <a:buNone/>
               <a:defRPr sz="1875" b="1">
                 <a:solidFill>
                   <a:srgbClr val="59E2BD"/>
@@ -5052,6 +5186,7 @@
               </a:defRPr>
             </a:defPPr>
             <a:lvl1pPr algn="l">
+              <a:buNone/>
               <a:defRPr sz="2025" b="1">
                 <a:solidFill>
                   <a:srgbClr val="59E2BD"/>
@@ -5062,6 +5197,7 @@
               </a:defRPr>
             </a:lvl1pPr>
             <a:lvl2pPr algn="l">
+              <a:buNone/>
               <a:defRPr sz="2025" b="1">
                 <a:solidFill>
                   <a:srgbClr val="59E2BD"/>
@@ -5072,6 +5208,7 @@
               </a:defRPr>
             </a:lvl2pPr>
             <a:lvl3pPr algn="l">
+              <a:buNone/>
               <a:defRPr sz="2025" b="1">
                 <a:solidFill>
                   <a:srgbClr val="59E2BD"/>
@@ -5082,6 +5219,7 @@
               </a:defRPr>
             </a:lvl3pPr>
             <a:lvl4pPr algn="l">
+              <a:buNone/>
               <a:defRPr sz="2025" b="1">
                 <a:solidFill>
                   <a:srgbClr val="59E2BD"/>
@@ -5092,6 +5230,7 @@
               </a:defRPr>
             </a:lvl4pPr>
             <a:lvl5pPr algn="l">
+              <a:buNone/>
               <a:defRPr sz="2025" b="1">
                 <a:solidFill>
                   <a:srgbClr val="59E2BD"/>
@@ -5102,6 +5241,7 @@
               </a:defRPr>
             </a:lvl5pPr>
             <a:lvl6pPr algn="l">
+              <a:buNone/>
               <a:defRPr sz="2025" b="1">
                 <a:solidFill>
                   <a:srgbClr val="59E2BD"/>
@@ -5112,6 +5252,7 @@
               </a:defRPr>
             </a:lvl6pPr>
             <a:lvl7pPr algn="l">
+              <a:buNone/>
               <a:defRPr sz="2025" b="1">
                 <a:solidFill>
                   <a:srgbClr val="59E2BD"/>
@@ -5122,6 +5263,7 @@
               </a:defRPr>
             </a:lvl7pPr>
             <a:lvl8pPr algn="l">
+              <a:buNone/>
               <a:defRPr sz="2025" b="1">
                 <a:solidFill>
                   <a:srgbClr val="59E2BD"/>
@@ -5132,6 +5274,7 @@
               </a:defRPr>
             </a:lvl8pPr>
             <a:lvl9pPr algn="l">
+              <a:buNone/>
               <a:defRPr sz="2025" b="1">
                 <a:solidFill>
                   <a:srgbClr val="59E2BD"/>
@@ -5144,6 +5287,7 @@
           </a:lstStyle>
           <a:p xmlns:a="http://schemas.openxmlformats.org/drawingml/2006/main">
             <a:pPr algn="l">
+              <a:buNone/>
               <a:defRPr sz="2025" b="1">
                 <a:solidFill>
                   <a:srgbClr val="59E2BD"/>
@@ -5210,6 +5354,7 @@
               </a:defRPr>
             </a:defPPr>
             <a:lvl1pPr algn="l">
+              <a:buNone/>
               <a:defRPr sz="2400" b="0">
                 <a:solidFill>
                   <a:srgbClr val="F4F7FC"/>
@@ -5220,6 +5365,7 @@
               </a:defRPr>
             </a:lvl1pPr>
             <a:lvl2pPr algn="l">
+              <a:buNone/>
               <a:defRPr sz="2400" b="0">
                 <a:solidFill>
                   <a:srgbClr val="F4F7FC"/>
@@ -5230,6 +5376,7 @@
               </a:defRPr>
             </a:lvl2pPr>
             <a:lvl3pPr algn="l">
+              <a:buNone/>
               <a:defRPr sz="2400" b="0">
                 <a:solidFill>
                   <a:srgbClr val="F4F7FC"/>
@@ -5240,6 +5387,7 @@
               </a:defRPr>
             </a:lvl3pPr>
             <a:lvl4pPr algn="l">
+              <a:buNone/>
               <a:defRPr sz="2400" b="0">
                 <a:solidFill>
                   <a:srgbClr val="F4F7FC"/>
@@ -5250,6 +5398,7 @@
               </a:defRPr>
             </a:lvl4pPr>
             <a:lvl5pPr algn="l">
+              <a:buNone/>
               <a:defRPr sz="2400" b="0">
                 <a:solidFill>
                   <a:srgbClr val="F4F7FC"/>
@@ -5260,6 +5409,7 @@
               </a:defRPr>
             </a:lvl5pPr>
             <a:lvl6pPr algn="l">
+              <a:buNone/>
               <a:defRPr sz="2400" b="0">
                 <a:solidFill>
                   <a:srgbClr val="F4F7FC"/>
@@ -5270,6 +5420,7 @@
               </a:defRPr>
             </a:lvl6pPr>
             <a:lvl7pPr algn="l">
+              <a:buNone/>
               <a:defRPr sz="2400" b="0">
                 <a:solidFill>
                   <a:srgbClr val="F4F7FC"/>
@@ -5280,6 +5431,7 @@
               </a:defRPr>
             </a:lvl7pPr>
             <a:lvl8pPr algn="l">
+              <a:buNone/>
               <a:defRPr sz="2400" b="0">
                 <a:solidFill>
                   <a:srgbClr val="F4F7FC"/>
@@ -5290,6 +5442,7 @@
               </a:defRPr>
             </a:lvl8pPr>
             <a:lvl9pPr algn="l">
+              <a:buNone/>
               <a:defRPr sz="2400" b="0">
                 <a:solidFill>
                   <a:srgbClr val="F4F7FC"/>
@@ -5302,6 +5455,7 @@
           </a:lstStyle>
           <a:p xmlns:a="http://schemas.openxmlformats.org/drawingml/2006/main">
             <a:pPr algn="l">
+              <a:buNone/>
               <a:defRPr sz="2400" b="0">
                 <a:solidFill>
                   <a:srgbClr val="F4F7FC"/>
@@ -5368,6 +5522,7 @@
               </a:defRPr>
             </a:defPPr>
             <a:lvl1pPr algn="l">
+              <a:buNone/>
               <a:defRPr sz="2025" b="1">
                 <a:solidFill>
                   <a:srgbClr val="59E2BD"/>
@@ -5378,6 +5533,7 @@
               </a:defRPr>
             </a:lvl1pPr>
             <a:lvl2pPr algn="l">
+              <a:buNone/>
               <a:defRPr sz="2025" b="1">
                 <a:solidFill>
                   <a:srgbClr val="59E2BD"/>
@@ -5388,6 +5544,7 @@
               </a:defRPr>
             </a:lvl2pPr>
             <a:lvl3pPr algn="l">
+              <a:buNone/>
               <a:defRPr sz="2025" b="1">
                 <a:solidFill>
                   <a:srgbClr val="59E2BD"/>
@@ -5398,6 +5555,7 @@
               </a:defRPr>
             </a:lvl3pPr>
             <a:lvl4pPr algn="l">
+              <a:buNone/>
               <a:defRPr sz="2025" b="1">
                 <a:solidFill>
                   <a:srgbClr val="59E2BD"/>
@@ -5408,6 +5566,7 @@
               </a:defRPr>
             </a:lvl4pPr>
             <a:lvl5pPr algn="l">
+              <a:buNone/>
               <a:defRPr sz="2025" b="1">
                 <a:solidFill>
                   <a:srgbClr val="59E2BD"/>
@@ -5418,6 +5577,7 @@
               </a:defRPr>
             </a:lvl5pPr>
             <a:lvl6pPr algn="l">
+              <a:buNone/>
               <a:defRPr sz="2025" b="1">
                 <a:solidFill>
                   <a:srgbClr val="59E2BD"/>
@@ -5428,6 +5588,7 @@
               </a:defRPr>
             </a:lvl6pPr>
             <a:lvl7pPr algn="l">
+              <a:buNone/>
               <a:defRPr sz="2025" b="1">
                 <a:solidFill>
                   <a:srgbClr val="59E2BD"/>
@@ -5438,6 +5599,7 @@
               </a:defRPr>
             </a:lvl7pPr>
             <a:lvl8pPr algn="l">
+              <a:buNone/>
               <a:defRPr sz="2025" b="1">
                 <a:solidFill>
                   <a:srgbClr val="59E2BD"/>
@@ -5448,6 +5610,7 @@
               </a:defRPr>
             </a:lvl8pPr>
             <a:lvl9pPr algn="l">
+              <a:buNone/>
               <a:defRPr sz="2025" b="1">
                 <a:solidFill>
                   <a:srgbClr val="59E2BD"/>
@@ -5460,6 +5623,7 @@
           </a:lstStyle>
           <a:p xmlns:a="http://schemas.openxmlformats.org/drawingml/2006/main">
             <a:pPr algn="l">
+              <a:buNone/>
               <a:defRPr sz="2025" b="1">
                 <a:solidFill>
                   <a:srgbClr val="59E2BD"/>
@@ -5526,6 +5690,7 @@
               </a:defRPr>
             </a:defPPr>
             <a:lvl1pPr algn="l">
+              <a:buNone/>
               <a:defRPr sz="2400" b="0">
                 <a:solidFill>
                   <a:srgbClr val="F4F7FC"/>
@@ -5536,6 +5701,7 @@
               </a:defRPr>
             </a:lvl1pPr>
             <a:lvl2pPr algn="l">
+              <a:buNone/>
               <a:defRPr sz="2400" b="0">
                 <a:solidFill>
                   <a:srgbClr val="F4F7FC"/>
@@ -5546,6 +5712,7 @@
               </a:defRPr>
             </a:lvl2pPr>
             <a:lvl3pPr algn="l">
+              <a:buNone/>
               <a:defRPr sz="2400" b="0">
                 <a:solidFill>
                   <a:srgbClr val="F4F7FC"/>
@@ -5556,6 +5723,7 @@
               </a:defRPr>
             </a:lvl3pPr>
             <a:lvl4pPr algn="l">
+              <a:buNone/>
               <a:defRPr sz="2400" b="0">
                 <a:solidFill>
                   <a:srgbClr val="F4F7FC"/>
@@ -5566,6 +5734,7 @@
               </a:defRPr>
             </a:lvl4pPr>
             <a:lvl5pPr algn="l">
+              <a:buNone/>
               <a:defRPr sz="2400" b="0">
                 <a:solidFill>
                   <a:srgbClr val="F4F7FC"/>
@@ -5576,6 +5745,7 @@
               </a:defRPr>
             </a:lvl5pPr>
             <a:lvl6pPr algn="l">
+              <a:buNone/>
               <a:defRPr sz="2400" b="0">
                 <a:solidFill>
                   <a:srgbClr val="F4F7FC"/>
@@ -5586,6 +5756,7 @@
               </a:defRPr>
             </a:lvl6pPr>
             <a:lvl7pPr algn="l">
+              <a:buNone/>
               <a:defRPr sz="2400" b="0">
                 <a:solidFill>
                   <a:srgbClr val="F4F7FC"/>
@@ -5596,6 +5767,7 @@
               </a:defRPr>
             </a:lvl7pPr>
             <a:lvl8pPr algn="l">
+              <a:buNone/>
               <a:defRPr sz="2400" b="0">
                 <a:solidFill>
                   <a:srgbClr val="F4F7FC"/>
@@ -5606,6 +5778,7 @@
               </a:defRPr>
             </a:lvl8pPr>
             <a:lvl9pPr algn="l">
+              <a:buNone/>
               <a:defRPr sz="2400" b="0">
                 <a:solidFill>
                   <a:srgbClr val="F4F7FC"/>
@@ -5618,6 +5791,7 @@
           </a:lstStyle>
           <a:p xmlns:a="http://schemas.openxmlformats.org/drawingml/2006/main">
             <a:pPr algn="l">
+              <a:buNone/>
               <a:defRPr sz="2400" b="0">
                 <a:solidFill>
                   <a:srgbClr val="F4F7FC"/>
@@ -5684,6 +5858,7 @@
               </a:defRPr>
             </a:defPPr>
             <a:lvl1pPr algn="l">
+              <a:buNone/>
               <a:defRPr sz="2025" b="1">
                 <a:solidFill>
                   <a:srgbClr val="59E2BD"/>
@@ -5694,6 +5869,7 @@
               </a:defRPr>
             </a:lvl1pPr>
             <a:lvl2pPr algn="l">
+              <a:buNone/>
               <a:defRPr sz="2025" b="1">
                 <a:solidFill>
                   <a:srgbClr val="59E2BD"/>
@@ -5704,6 +5880,7 @@
               </a:defRPr>
             </a:lvl2pPr>
             <a:lvl3pPr algn="l">
+              <a:buNone/>
               <a:defRPr sz="2025" b="1">
                 <a:solidFill>
                   <a:srgbClr val="59E2BD"/>
@@ -5714,6 +5891,7 @@
               </a:defRPr>
             </a:lvl3pPr>
             <a:lvl4pPr algn="l">
+              <a:buNone/>
               <a:defRPr sz="2025" b="1">
                 <a:solidFill>
                   <a:srgbClr val="59E2BD"/>
@@ -5724,6 +5902,7 @@
               </a:defRPr>
             </a:lvl4pPr>
             <a:lvl5pPr algn="l">
+              <a:buNone/>
               <a:defRPr sz="2025" b="1">
                 <a:solidFill>
                   <a:srgbClr val="59E2BD"/>
@@ -5734,6 +5913,7 @@
               </a:defRPr>
             </a:lvl5pPr>
             <a:lvl6pPr algn="l">
+              <a:buNone/>
               <a:defRPr sz="2025" b="1">
                 <a:solidFill>
                   <a:srgbClr val="59E2BD"/>
@@ -5744,6 +5924,7 @@
               </a:defRPr>
             </a:lvl6pPr>
             <a:lvl7pPr algn="l">
+              <a:buNone/>
               <a:defRPr sz="2025" b="1">
                 <a:solidFill>
                   <a:srgbClr val="59E2BD"/>
@@ -5754,6 +5935,7 @@
               </a:defRPr>
             </a:lvl7pPr>
             <a:lvl8pPr algn="l">
+              <a:buNone/>
               <a:defRPr sz="2025" b="1">
                 <a:solidFill>
                   <a:srgbClr val="59E2BD"/>
@@ -5764,6 +5946,7 @@
               </a:defRPr>
             </a:lvl8pPr>
             <a:lvl9pPr algn="l">
+              <a:buNone/>
               <a:defRPr sz="2025" b="1">
                 <a:solidFill>
                   <a:srgbClr val="59E2BD"/>
@@ -5776,6 +5959,7 @@
           </a:lstStyle>
           <a:p xmlns:a="http://schemas.openxmlformats.org/drawingml/2006/main">
             <a:pPr algn="l">
+              <a:buNone/>
               <a:defRPr sz="2025" b="1">
                 <a:solidFill>
                   <a:srgbClr val="59E2BD"/>
@@ -5842,6 +6026,7 @@
               </a:defRPr>
             </a:defPPr>
             <a:lvl1pPr algn="l">
+              <a:buNone/>
               <a:defRPr sz="2400" b="0">
                 <a:solidFill>
                   <a:srgbClr val="F4F7FC"/>
@@ -5852,6 +6037,7 @@
               </a:defRPr>
             </a:lvl1pPr>
             <a:lvl2pPr algn="l">
+              <a:buNone/>
               <a:defRPr sz="2400" b="0">
                 <a:solidFill>
                   <a:srgbClr val="F4F7FC"/>
@@ -5862,6 +6048,7 @@
               </a:defRPr>
             </a:lvl2pPr>
             <a:lvl3pPr algn="l">
+              <a:buNone/>
               <a:defRPr sz="2400" b="0">
                 <a:solidFill>
                   <a:srgbClr val="F4F7FC"/>
@@ -5872,6 +6059,7 @@
               </a:defRPr>
             </a:lvl3pPr>
             <a:lvl4pPr algn="l">
+              <a:buNone/>
               <a:defRPr sz="2400" b="0">
                 <a:solidFill>
                   <a:srgbClr val="F4F7FC"/>
@@ -5882,6 +6070,7 @@
               </a:defRPr>
             </a:lvl4pPr>
             <a:lvl5pPr algn="l">
+              <a:buNone/>
               <a:defRPr sz="2400" b="0">
                 <a:solidFill>
                   <a:srgbClr val="F4F7FC"/>
@@ -5892,6 +6081,7 @@
               </a:defRPr>
             </a:lvl5pPr>
             <a:lvl6pPr algn="l">
+              <a:buNone/>
               <a:defRPr sz="2400" b="0">
                 <a:solidFill>
                   <a:srgbClr val="F4F7FC"/>
@@ -5902,6 +6092,7 @@
               </a:defRPr>
             </a:lvl6pPr>
             <a:lvl7pPr algn="l">
+              <a:buNone/>
               <a:defRPr sz="2400" b="0">
                 <a:solidFill>
                   <a:srgbClr val="F4F7FC"/>
@@ -5912,6 +6103,7 @@
               </a:defRPr>
             </a:lvl7pPr>
             <a:lvl8pPr algn="l">
+              <a:buNone/>
               <a:defRPr sz="2400" b="0">
                 <a:solidFill>
                   <a:srgbClr val="F4F7FC"/>
@@ -5922,6 +6114,7 @@
               </a:defRPr>
             </a:lvl8pPr>
             <a:lvl9pPr algn="l">
+              <a:buNone/>
               <a:defRPr sz="2400" b="0">
                 <a:solidFill>
                   <a:srgbClr val="F4F7FC"/>
@@ -5934,6 +6127,7 @@
           </a:lstStyle>
           <a:p xmlns:a="http://schemas.openxmlformats.org/drawingml/2006/main">
             <a:pPr algn="l">
+              <a:buNone/>
               <a:defRPr sz="2400" b="0">
                 <a:solidFill>
                   <a:srgbClr val="F4F7FC"/>
@@ -6000,6 +6194,7 @@
               </a:defRPr>
             </a:defPPr>
             <a:lvl1pPr algn="l">
+              <a:buNone/>
               <a:defRPr sz="2025" b="1">
                 <a:solidFill>
                   <a:srgbClr val="59E2BD"/>
@@ -6010,6 +6205,7 @@
               </a:defRPr>
             </a:lvl1pPr>
             <a:lvl2pPr algn="l">
+              <a:buNone/>
               <a:defRPr sz="2025" b="1">
                 <a:solidFill>
                   <a:srgbClr val="59E2BD"/>
@@ -6020,6 +6216,7 @@
               </a:defRPr>
             </a:lvl2pPr>
             <a:lvl3pPr algn="l">
+              <a:buNone/>
               <a:defRPr sz="2025" b="1">
                 <a:solidFill>
                   <a:srgbClr val="59E2BD"/>
@@ -6030,6 +6227,7 @@
               </a:defRPr>
             </a:lvl3pPr>
             <a:lvl4pPr algn="l">
+              <a:buNone/>
               <a:defRPr sz="2025" b="1">
                 <a:solidFill>
                   <a:srgbClr val="59E2BD"/>
@@ -6040,6 +6238,7 @@
               </a:defRPr>
             </a:lvl4pPr>
             <a:lvl5pPr algn="l">
+              <a:buNone/>
               <a:defRPr sz="2025" b="1">
                 <a:solidFill>
                   <a:srgbClr val="59E2BD"/>
@@ -6050,6 +6249,7 @@
               </a:defRPr>
             </a:lvl5pPr>
             <a:lvl6pPr algn="l">
+              <a:buNone/>
               <a:defRPr sz="2025" b="1">
                 <a:solidFill>
                   <a:srgbClr val="59E2BD"/>
@@ -6060,6 +6260,7 @@
               </a:defRPr>
             </a:lvl6pPr>
             <a:lvl7pPr algn="l">
+              <a:buNone/>
               <a:defRPr sz="2025" b="1">
                 <a:solidFill>
                   <a:srgbClr val="59E2BD"/>
@@ -6070,6 +6271,7 @@
               </a:defRPr>
             </a:lvl7pPr>
             <a:lvl8pPr algn="l">
+              <a:buNone/>
               <a:defRPr sz="2025" b="1">
                 <a:solidFill>
                   <a:srgbClr val="59E2BD"/>
@@ -6080,6 +6282,7 @@
               </a:defRPr>
             </a:lvl8pPr>
             <a:lvl9pPr algn="l">
+              <a:buNone/>
               <a:defRPr sz="2025" b="1">
                 <a:solidFill>
                   <a:srgbClr val="59E2BD"/>
@@ -6092,6 +6295,7 @@
           </a:lstStyle>
           <a:p xmlns:a="http://schemas.openxmlformats.org/drawingml/2006/main">
             <a:pPr algn="l">
+              <a:buNone/>
               <a:defRPr sz="2025" b="1">
                 <a:solidFill>
                   <a:srgbClr val="59E2BD"/>
@@ -6158,6 +6362,7 @@
               </a:defRPr>
             </a:defPPr>
             <a:lvl1pPr algn="l">
+              <a:buNone/>
               <a:defRPr sz="2400" b="0">
                 <a:solidFill>
                   <a:srgbClr val="F4F7FC"/>
@@ -6168,6 +6373,7 @@
               </a:defRPr>
             </a:lvl1pPr>
             <a:lvl2pPr algn="l">
+              <a:buNone/>
               <a:defRPr sz="2400" b="0">
                 <a:solidFill>
                   <a:srgbClr val="F4F7FC"/>
@@ -6178,6 +6384,7 @@
               </a:defRPr>
             </a:lvl2pPr>
             <a:lvl3pPr algn="l">
+              <a:buNone/>
               <a:defRPr sz="2400" b="0">
                 <a:solidFill>
                   <a:srgbClr val="F4F7FC"/>
@@ -6188,6 +6395,7 @@
               </a:defRPr>
             </a:lvl3pPr>
             <a:lvl4pPr algn="l">
+              <a:buNone/>
               <a:defRPr sz="2400" b="0">
                 <a:solidFill>
                   <a:srgbClr val="F4F7FC"/>
@@ -6198,6 +6406,7 @@
               </a:defRPr>
             </a:lvl4pPr>
             <a:lvl5pPr algn="l">
+              <a:buNone/>
               <a:defRPr sz="2400" b="0">
                 <a:solidFill>
                   <a:srgbClr val="F4F7FC"/>
@@ -6208,6 +6417,7 @@
               </a:defRPr>
             </a:lvl5pPr>
             <a:lvl6pPr algn="l">
+              <a:buNone/>
               <a:defRPr sz="2400" b="0">
                 <a:solidFill>
                   <a:srgbClr val="F4F7FC"/>
@@ -6218,6 +6428,7 @@
               </a:defRPr>
             </a:lvl6pPr>
             <a:lvl7pPr algn="l">
+              <a:buNone/>
               <a:defRPr sz="2400" b="0">
                 <a:solidFill>
                   <a:srgbClr val="F4F7FC"/>
@@ -6228,6 +6439,7 @@
               </a:defRPr>
             </a:lvl7pPr>
             <a:lvl8pPr algn="l">
+              <a:buNone/>
               <a:defRPr sz="2400" b="0">
                 <a:solidFill>
                   <a:srgbClr val="F4F7FC"/>
@@ -6238,6 +6450,7 @@
               </a:defRPr>
             </a:lvl8pPr>
             <a:lvl9pPr algn="l">
+              <a:buNone/>
               <a:defRPr sz="2400" b="0">
                 <a:solidFill>
                   <a:srgbClr val="F4F7FC"/>
@@ -6250,6 +6463,7 @@
           </a:lstStyle>
           <a:p xmlns:a="http://schemas.openxmlformats.org/drawingml/2006/main">
             <a:pPr algn="l">
+              <a:buNone/>
               <a:defRPr sz="2400" b="0">
                 <a:solidFill>
                   <a:srgbClr val="F4F7FC"/>
@@ -6316,6 +6530,7 @@
               </a:defRPr>
             </a:defPPr>
             <a:lvl1pPr algn="l">
+              <a:buNone/>
               <a:defRPr sz="2250" b="1">
                 <a:solidFill>
                   <a:srgbClr val="F4F7FC"/>
@@ -6326,6 +6541,7 @@
               </a:defRPr>
             </a:lvl1pPr>
             <a:lvl2pPr algn="l">
+              <a:buNone/>
               <a:defRPr sz="2250" b="1">
                 <a:solidFill>
                   <a:srgbClr val="F4F7FC"/>
@@ -6336,6 +6552,7 @@
               </a:defRPr>
             </a:lvl2pPr>
             <a:lvl3pPr algn="l">
+              <a:buNone/>
               <a:defRPr sz="2250" b="1">
                 <a:solidFill>
                   <a:srgbClr val="F4F7FC"/>
@@ -6346,6 +6563,7 @@
               </a:defRPr>
             </a:lvl3pPr>
             <a:lvl4pPr algn="l">
+              <a:buNone/>
               <a:defRPr sz="2250" b="1">
                 <a:solidFill>
                   <a:srgbClr val="F4F7FC"/>
@@ -6356,6 +6574,7 @@
               </a:defRPr>
             </a:lvl4pPr>
             <a:lvl5pPr algn="l">
+              <a:buNone/>
               <a:defRPr sz="2250" b="1">
                 <a:solidFill>
                   <a:srgbClr val="F4F7FC"/>
@@ -6366,6 +6585,7 @@
               </a:defRPr>
             </a:lvl5pPr>
             <a:lvl6pPr algn="l">
+              <a:buNone/>
               <a:defRPr sz="2250" b="1">
                 <a:solidFill>
                   <a:srgbClr val="F4F7FC"/>
@@ -6376,6 +6596,7 @@
               </a:defRPr>
             </a:lvl6pPr>
             <a:lvl7pPr algn="l">
+              <a:buNone/>
               <a:defRPr sz="2250" b="1">
                 <a:solidFill>
                   <a:srgbClr val="F4F7FC"/>
@@ -6386,6 +6607,7 @@
               </a:defRPr>
             </a:lvl7pPr>
             <a:lvl8pPr algn="l">
+              <a:buNone/>
               <a:defRPr sz="2250" b="1">
                 <a:solidFill>
                   <a:srgbClr val="F4F7FC"/>
@@ -6396,6 +6618,7 @@
               </a:defRPr>
             </a:lvl8pPr>
             <a:lvl9pPr algn="l">
+              <a:buNone/>
               <a:defRPr sz="2250" b="1">
                 <a:solidFill>
                   <a:srgbClr val="F4F7FC"/>
@@ -6408,6 +6631,7 @@
           </a:lstStyle>
           <a:p xmlns:a="http://schemas.openxmlformats.org/drawingml/2006/main">
             <a:pPr algn="l">
+              <a:buNone/>
               <a:defRPr sz="2250" b="1">
                 <a:solidFill>
                   <a:srgbClr val="F4F7FC"/>
@@ -6431,6 +6655,7 @@
           </a:p>
           <a:p xmlns:a="http://schemas.openxmlformats.org/drawingml/2006/main">
             <a:pPr algn="l">
+              <a:buNone/>
               <a:defRPr sz="2250" b="1">
                 <a:solidFill>
                   <a:srgbClr val="F4F7FC"/>
@@ -6526,6 +6751,7 @@
               </a:defRPr>
             </a:defPPr>
             <a:lvl1pPr algn="l">
+              <a:buNone/>
               <a:defRPr sz="3300" b="1">
                 <a:solidFill>
                   <a:srgbClr val="F4F7FC"/>
@@ -6536,6 +6762,7 @@
               </a:defRPr>
             </a:lvl1pPr>
             <a:lvl2pPr algn="l">
+              <a:buNone/>
               <a:defRPr sz="3300" b="1">
                 <a:solidFill>
                   <a:srgbClr val="F4F7FC"/>
@@ -6546,6 +6773,7 @@
               </a:defRPr>
             </a:lvl2pPr>
             <a:lvl3pPr algn="l">
+              <a:buNone/>
               <a:defRPr sz="3300" b="1">
                 <a:solidFill>
                   <a:srgbClr val="F4F7FC"/>
@@ -6556,6 +6784,7 @@
               </a:defRPr>
             </a:lvl3pPr>
             <a:lvl4pPr algn="l">
+              <a:buNone/>
               <a:defRPr sz="3300" b="1">
                 <a:solidFill>
                   <a:srgbClr val="F4F7FC"/>
@@ -6566,6 +6795,7 @@
               </a:defRPr>
             </a:lvl4pPr>
             <a:lvl5pPr algn="l">
+              <a:buNone/>
               <a:defRPr sz="3300" b="1">
                 <a:solidFill>
                   <a:srgbClr val="F4F7FC"/>
@@ -6576,6 +6806,7 @@
               </a:defRPr>
             </a:lvl5pPr>
             <a:lvl6pPr algn="l">
+              <a:buNone/>
               <a:defRPr sz="3300" b="1">
                 <a:solidFill>
                   <a:srgbClr val="F4F7FC"/>
@@ -6586,6 +6817,7 @@
               </a:defRPr>
             </a:lvl6pPr>
             <a:lvl7pPr algn="l">
+              <a:buNone/>
               <a:defRPr sz="3300" b="1">
                 <a:solidFill>
                   <a:srgbClr val="F4F7FC"/>
@@ -6596,6 +6828,7 @@
               </a:defRPr>
             </a:lvl7pPr>
             <a:lvl8pPr algn="l">
+              <a:buNone/>
               <a:defRPr sz="3300" b="1">
                 <a:solidFill>
                   <a:srgbClr val="F4F7FC"/>
@@ -6606,6 +6839,7 @@
               </a:defRPr>
             </a:lvl8pPr>
             <a:lvl9pPr algn="l">
+              <a:buNone/>
               <a:defRPr sz="3300" b="1">
                 <a:solidFill>
                   <a:srgbClr val="F4F7FC"/>
@@ -6618,6 +6852,7 @@
           </a:lstStyle>
           <a:p xmlns:a="http://schemas.openxmlformats.org/drawingml/2006/main">
             <a:pPr algn="l">
+              <a:buNone/>
               <a:defRPr sz="3300" b="1">
                 <a:solidFill>
                   <a:srgbClr val="F4F7FC"/>
@@ -6646,7 +6881,7 @@
           <p:cNvPr id="2" name="">
             <a:extLst xmlns:a="http://schemas.openxmlformats.org/drawingml/2006/main">
               <a:ext uri="{FF2B5EF4-FFF2-40B4-BE49-F238E27FC236}">
-                <a16:creationId xmlns:a16="http://schemas.microsoft.com/office/drawing/2014/main" id="{4E199157-C75B-4B22-85E0-B9CA83FB9B09}"/>
+                <a16:creationId xmlns:a16="http://schemas.microsoft.com/office/drawing/2014/main" id="{D83F53A6-DB76-4F1C-BEB6-10C8641A00CA}"/>
               </a:ext>
             </a:extLst>
           </p:cNvPr>
@@ -7492,6 +7727,7 @@
               </a:defRPr>
             </a:defPPr>
             <a:lvl1pPr algn="l">
+              <a:buNone/>
               <a:defRPr sz="1725" b="0">
                 <a:solidFill>
                   <a:srgbClr val="B3C5DD"/>
@@ -7502,6 +7738,7 @@
               </a:defRPr>
             </a:lvl1pPr>
             <a:lvl2pPr algn="l">
+              <a:buNone/>
               <a:defRPr sz="1725" b="0">
                 <a:solidFill>
                   <a:srgbClr val="B3C5DD"/>
@@ -7512,6 +7749,7 @@
               </a:defRPr>
             </a:lvl2pPr>
             <a:lvl3pPr algn="l">
+              <a:buNone/>
               <a:defRPr sz="1725" b="0">
                 <a:solidFill>
                   <a:srgbClr val="B3C5DD"/>
@@ -7522,6 +7760,7 @@
               </a:defRPr>
             </a:lvl3pPr>
             <a:lvl4pPr algn="l">
+              <a:buNone/>
               <a:defRPr sz="1725" b="0">
                 <a:solidFill>
                   <a:srgbClr val="B3C5DD"/>
@@ -7532,6 +7771,7 @@
               </a:defRPr>
             </a:lvl4pPr>
             <a:lvl5pPr algn="l">
+              <a:buNone/>
               <a:defRPr sz="1725" b="0">
                 <a:solidFill>
                   <a:srgbClr val="B3C5DD"/>
@@ -7542,6 +7782,7 @@
               </a:defRPr>
             </a:lvl5pPr>
             <a:lvl6pPr algn="l">
+              <a:buNone/>
               <a:defRPr sz="1725" b="0">
                 <a:solidFill>
                   <a:srgbClr val="B3C5DD"/>
@@ -7552,6 +7793,7 @@
               </a:defRPr>
             </a:lvl6pPr>
             <a:lvl7pPr algn="l">
+              <a:buNone/>
               <a:defRPr sz="1725" b="0">
                 <a:solidFill>
                   <a:srgbClr val="B3C5DD"/>
@@ -7562,6 +7804,7 @@
               </a:defRPr>
             </a:lvl7pPr>
             <a:lvl8pPr algn="l">
+              <a:buNone/>
               <a:defRPr sz="1725" b="0">
                 <a:solidFill>
                   <a:srgbClr val="B3C5DD"/>
@@ -7572,6 +7815,7 @@
               </a:defRPr>
             </a:lvl8pPr>
             <a:lvl9pPr algn="l">
+              <a:buNone/>
               <a:defRPr sz="1725" b="0">
                 <a:solidFill>
                   <a:srgbClr val="B3C5DD"/>
@@ -7584,6 +7828,7 @@
           </a:lstStyle>
           <a:p xmlns:a="http://schemas.openxmlformats.org/drawingml/2006/main">
             <a:pPr algn="l">
+              <a:buNone/>
               <a:defRPr sz="1725" b="0">
                 <a:solidFill>
                   <a:srgbClr val="B3C5DD"/>
@@ -7641,7 +7886,7 @@
           <p:cNvPr id="14" name="">
             <a:extLst xmlns:a="http://schemas.openxmlformats.org/drawingml/2006/main">
               <a:ext uri="{FF2B5EF4-FFF2-40B4-BE49-F238E27FC236}">
-                <a16:creationId xmlns:a16="http://schemas.microsoft.com/office/drawing/2014/main" id="{FA1FBA8E-E517-4C7B-B0D9-282AF6A16EF6}"/>
+                <a16:creationId xmlns:a16="http://schemas.microsoft.com/office/drawing/2014/main" id="{2DE39F50-3F32-4D0A-957B-56BC22C81DBE}"/>
               </a:ext>
             </a:extLst>
           </p:cNvPr>
@@ -7677,7 +7922,7 @@
           <p:cNvPr id="12" name="">
             <a:extLst xmlns:a="http://schemas.openxmlformats.org/drawingml/2006/main">
               <a:ext uri="{FF2B5EF4-FFF2-40B4-BE49-F238E27FC236}">
-                <a16:creationId xmlns:a16="http://schemas.microsoft.com/office/drawing/2014/main" id="{BB541C2B-5C56-47C5-86FB-A8962AB22C56}"/>
+                <a16:creationId xmlns:a16="http://schemas.microsoft.com/office/drawing/2014/main" id="{6AD31C3F-78DE-4D7D-984F-9C40A940EDB0}"/>
               </a:ext>
             </a:extLst>
           </p:cNvPr>
@@ -7713,7 +7958,7 @@
           <p:cNvPr id="10" name="">
             <a:extLst xmlns:a="http://schemas.openxmlformats.org/drawingml/2006/main">
               <a:ext uri="{FF2B5EF4-FFF2-40B4-BE49-F238E27FC236}">
-                <a16:creationId xmlns:a16="http://schemas.microsoft.com/office/drawing/2014/main" id="{A7CD9703-CFF8-436C-AE61-7C28D9DD376F}"/>
+                <a16:creationId xmlns:a16="http://schemas.microsoft.com/office/drawing/2014/main" id="{CC1AAE60-FE45-45B7-B37D-AEBF644EE06D}"/>
               </a:ext>
             </a:extLst>
           </p:cNvPr>
@@ -7749,7 +7994,7 @@
           <p:cNvPr id="8" name="">
             <a:extLst xmlns:a="http://schemas.openxmlformats.org/drawingml/2006/main">
               <a:ext uri="{FF2B5EF4-FFF2-40B4-BE49-F238E27FC236}">
-                <a16:creationId xmlns:a16="http://schemas.microsoft.com/office/drawing/2014/main" id="{F45C3F9E-6081-45DD-A516-B7A3DD09F95B}"/>
+                <a16:creationId xmlns:a16="http://schemas.microsoft.com/office/drawing/2014/main" id="{B2E5C48A-35BA-4663-B1CC-F960E5731376}"/>
               </a:ext>
             </a:extLst>
           </p:cNvPr>
@@ -7785,7 +8030,7 @@
           <p:cNvPr id="6" name="">
             <a:extLst xmlns:a="http://schemas.openxmlformats.org/drawingml/2006/main">
               <a:ext uri="{FF2B5EF4-FFF2-40B4-BE49-F238E27FC236}">
-                <a16:creationId xmlns:a16="http://schemas.microsoft.com/office/drawing/2014/main" id="{1312997E-0187-4CDB-A587-93BB2E7A1C1F}"/>
+                <a16:creationId xmlns:a16="http://schemas.microsoft.com/office/drawing/2014/main" id="{A8AD8D29-E958-4E75-816F-95866275802A}"/>
               </a:ext>
             </a:extLst>
           </p:cNvPr>
@@ -7817,7 +8062,7 @@
           <p:cNvPr id="5" name="">
             <a:extLst xmlns:a="http://schemas.openxmlformats.org/drawingml/2006/main">
               <a:ext uri="{FF2B5EF4-FFF2-40B4-BE49-F238E27FC236}">
-                <a16:creationId xmlns:a16="http://schemas.microsoft.com/office/drawing/2014/main" id="{B782FF01-DB19-4B51-9281-91C59CD73452}"/>
+                <a16:creationId xmlns:a16="http://schemas.microsoft.com/office/drawing/2014/main" id="{981C587F-0471-4BBC-8A4E-BB6549E212AE}"/>
               </a:ext>
             </a:extLst>
           </p:cNvPr>
@@ -7887,6 +8132,7 @@
               </a:defRPr>
             </a:defPPr>
             <a:lvl1pPr algn="l">
+              <a:buNone/>
               <a:defRPr sz="3300" b="1">
                 <a:solidFill>
                   <a:srgbClr val="F4F7FC"/>
@@ -7897,6 +8143,7 @@
               </a:defRPr>
             </a:lvl1pPr>
             <a:lvl2pPr algn="l">
+              <a:buNone/>
               <a:defRPr sz="3300" b="1">
                 <a:solidFill>
                   <a:srgbClr val="F4F7FC"/>
@@ -7907,6 +8154,7 @@
               </a:defRPr>
             </a:lvl2pPr>
             <a:lvl3pPr algn="l">
+              <a:buNone/>
               <a:defRPr sz="3300" b="1">
                 <a:solidFill>
                   <a:srgbClr val="F4F7FC"/>
@@ -7917,6 +8165,7 @@
               </a:defRPr>
             </a:lvl3pPr>
             <a:lvl4pPr algn="l">
+              <a:buNone/>
               <a:defRPr sz="3300" b="1">
                 <a:solidFill>
                   <a:srgbClr val="F4F7FC"/>
@@ -7927,6 +8176,7 @@
               </a:defRPr>
             </a:lvl4pPr>
             <a:lvl5pPr algn="l">
+              <a:buNone/>
               <a:defRPr sz="3300" b="1">
                 <a:solidFill>
                   <a:srgbClr val="F4F7FC"/>
@@ -7937,6 +8187,7 @@
               </a:defRPr>
             </a:lvl5pPr>
             <a:lvl6pPr algn="l">
+              <a:buNone/>
               <a:defRPr sz="3300" b="1">
                 <a:solidFill>
                   <a:srgbClr val="F4F7FC"/>
@@ -7947,6 +8198,7 @@
               </a:defRPr>
             </a:lvl6pPr>
             <a:lvl7pPr algn="l">
+              <a:buNone/>
               <a:defRPr sz="3300" b="1">
                 <a:solidFill>
                   <a:srgbClr val="F4F7FC"/>
@@ -7957,6 +8209,7 @@
               </a:defRPr>
             </a:lvl7pPr>
             <a:lvl8pPr algn="l">
+              <a:buNone/>
               <a:defRPr sz="3300" b="1">
                 <a:solidFill>
                   <a:srgbClr val="F4F7FC"/>
@@ -7967,6 +8220,7 @@
               </a:defRPr>
             </a:lvl8pPr>
             <a:lvl9pPr algn="l">
+              <a:buNone/>
               <a:defRPr sz="3300" b="1">
                 <a:solidFill>
                   <a:srgbClr val="F4F7FC"/>
@@ -7979,6 +8233,7 @@
           </a:lstStyle>
           <a:p xmlns:a="http://schemas.openxmlformats.org/drawingml/2006/main">
             <a:pPr algn="l">
+              <a:buNone/>
               <a:defRPr sz="3300" b="1">
                 <a:solidFill>
                   <a:srgbClr val="F4F7FC"/>
@@ -8048,6 +8303,7 @@
               </a:defRPr>
             </a:defPPr>
             <a:lvl1pPr algn="ctr">
+              <a:buNone/>
               <a:defRPr sz="2025" b="1">
                 <a:solidFill>
                   <a:srgbClr val="59E2BD"/>
@@ -8058,6 +8314,7 @@
               </a:defRPr>
             </a:lvl1pPr>
             <a:lvl2pPr algn="ctr">
+              <a:buNone/>
               <a:defRPr sz="2025" b="1">
                 <a:solidFill>
                   <a:srgbClr val="59E2BD"/>
@@ -8068,6 +8325,7 @@
               </a:defRPr>
             </a:lvl2pPr>
             <a:lvl3pPr algn="ctr">
+              <a:buNone/>
               <a:defRPr sz="2025" b="1">
                 <a:solidFill>
                   <a:srgbClr val="59E2BD"/>
@@ -8078,6 +8336,7 @@
               </a:defRPr>
             </a:lvl3pPr>
             <a:lvl4pPr algn="ctr">
+              <a:buNone/>
               <a:defRPr sz="2025" b="1">
                 <a:solidFill>
                   <a:srgbClr val="59E2BD"/>
@@ -8088,6 +8347,7 @@
               </a:defRPr>
             </a:lvl4pPr>
             <a:lvl5pPr algn="ctr">
+              <a:buNone/>
               <a:defRPr sz="2025" b="1">
                 <a:solidFill>
                   <a:srgbClr val="59E2BD"/>
@@ -8098,6 +8358,7 @@
               </a:defRPr>
             </a:lvl5pPr>
             <a:lvl6pPr algn="ctr">
+              <a:buNone/>
               <a:defRPr sz="2025" b="1">
                 <a:solidFill>
                   <a:srgbClr val="59E2BD"/>
@@ -8108,6 +8369,7 @@
               </a:defRPr>
             </a:lvl6pPr>
             <a:lvl7pPr algn="ctr">
+              <a:buNone/>
               <a:defRPr sz="2025" b="1">
                 <a:solidFill>
                   <a:srgbClr val="59E2BD"/>
@@ -8118,6 +8380,7 @@
               </a:defRPr>
             </a:lvl7pPr>
             <a:lvl8pPr algn="ctr">
+              <a:buNone/>
               <a:defRPr sz="2025" b="1">
                 <a:solidFill>
                   <a:srgbClr val="59E2BD"/>
@@ -8128,6 +8391,7 @@
               </a:defRPr>
             </a:lvl8pPr>
             <a:lvl9pPr algn="ctr">
+              <a:buNone/>
               <a:defRPr sz="2025" b="1">
                 <a:solidFill>
                   <a:srgbClr val="59E2BD"/>
@@ -8140,6 +8404,7 @@
           </a:lstStyle>
           <a:p xmlns:a="http://schemas.openxmlformats.org/drawingml/2006/main">
             <a:pPr algn="ctr">
+              <a:buNone/>
               <a:defRPr sz="2025" b="1">
                 <a:solidFill>
                   <a:srgbClr val="59E2BD"/>
@@ -8163,6 +8428,7 @@
           </a:p>
           <a:p xmlns:a="http://schemas.openxmlformats.org/drawingml/2006/main">
             <a:pPr algn="ctr">
+              <a:buNone/>
               <a:defRPr sz="2025" b="1">
                 <a:solidFill>
                   <a:srgbClr val="59E2BD"/>
@@ -8186,6 +8452,7 @@
           </a:p>
           <a:p xmlns:a="http://schemas.openxmlformats.org/drawingml/2006/main">
             <a:pPr algn="ctr">
+              <a:buNone/>
               <a:defRPr sz="2025" b="1">
                 <a:solidFill>
                   <a:srgbClr val="59E2BD"/>
@@ -8255,6 +8522,7 @@
               </a:defRPr>
             </a:defPPr>
             <a:lvl1pPr algn="ctr">
+              <a:buNone/>
               <a:defRPr sz="1950" b="1">
                 <a:solidFill>
                   <a:srgbClr val="59E2BD"/>
@@ -8265,6 +8533,7 @@
               </a:defRPr>
             </a:lvl1pPr>
             <a:lvl2pPr algn="ctr">
+              <a:buNone/>
               <a:defRPr sz="1950" b="1">
                 <a:solidFill>
                   <a:srgbClr val="59E2BD"/>
@@ -8275,6 +8544,7 @@
               </a:defRPr>
             </a:lvl2pPr>
             <a:lvl3pPr algn="ctr">
+              <a:buNone/>
               <a:defRPr sz="1950" b="1">
                 <a:solidFill>
                   <a:srgbClr val="59E2BD"/>
@@ -8285,6 +8555,7 @@
               </a:defRPr>
             </a:lvl3pPr>
             <a:lvl4pPr algn="ctr">
+              <a:buNone/>
               <a:defRPr sz="1950" b="1">
                 <a:solidFill>
                   <a:srgbClr val="59E2BD"/>
@@ -8295,6 +8566,7 @@
               </a:defRPr>
             </a:lvl4pPr>
             <a:lvl5pPr algn="ctr">
+              <a:buNone/>
               <a:defRPr sz="1950" b="1">
                 <a:solidFill>
                   <a:srgbClr val="59E2BD"/>
@@ -8305,6 +8577,7 @@
               </a:defRPr>
             </a:lvl5pPr>
             <a:lvl6pPr algn="ctr">
+              <a:buNone/>
               <a:defRPr sz="1950" b="1">
                 <a:solidFill>
                   <a:srgbClr val="59E2BD"/>
@@ -8315,6 +8588,7 @@
               </a:defRPr>
             </a:lvl6pPr>
             <a:lvl7pPr algn="ctr">
+              <a:buNone/>
               <a:defRPr sz="1950" b="1">
                 <a:solidFill>
                   <a:srgbClr val="59E2BD"/>
@@ -8325,6 +8599,7 @@
               </a:defRPr>
             </a:lvl7pPr>
             <a:lvl8pPr algn="ctr">
+              <a:buNone/>
               <a:defRPr sz="1950" b="1">
                 <a:solidFill>
                   <a:srgbClr val="59E2BD"/>
@@ -8335,6 +8610,7 @@
               </a:defRPr>
             </a:lvl8pPr>
             <a:lvl9pPr algn="ctr">
+              <a:buNone/>
               <a:defRPr sz="1950" b="1">
                 <a:solidFill>
                   <a:srgbClr val="59E2BD"/>
@@ -8347,6 +8623,7 @@
           </a:lstStyle>
           <a:p xmlns:a="http://schemas.openxmlformats.org/drawingml/2006/main">
             <a:pPr algn="ctr">
+              <a:buNone/>
               <a:defRPr sz="1950" b="1">
                 <a:solidFill>
                   <a:srgbClr val="59E2BD"/>
@@ -8370,6 +8647,7 @@
           </a:p>
           <a:p xmlns:a="http://schemas.openxmlformats.org/drawingml/2006/main">
             <a:pPr algn="ctr">
+              <a:buNone/>
               <a:defRPr sz="1950" b="1">
                 <a:solidFill>
                   <a:srgbClr val="59E2BD"/>
@@ -8393,6 +8671,7 @@
           </a:p>
           <a:p xmlns:a="http://schemas.openxmlformats.org/drawingml/2006/main">
             <a:pPr algn="ctr">
+              <a:buNone/>
               <a:defRPr sz="1950" b="1">
                 <a:solidFill>
                   <a:srgbClr val="59E2BD"/>
@@ -8462,6 +8741,7 @@
               </a:defRPr>
             </a:defPPr>
             <a:lvl1pPr algn="ctr">
+              <a:buNone/>
               <a:defRPr sz="2025" b="1">
                 <a:solidFill>
                   <a:srgbClr val="59E2BD"/>
@@ -8472,6 +8752,7 @@
               </a:defRPr>
             </a:lvl1pPr>
             <a:lvl2pPr algn="ctr">
+              <a:buNone/>
               <a:defRPr sz="2025" b="1">
                 <a:solidFill>
                   <a:srgbClr val="59E2BD"/>
@@ -8482,6 +8763,7 @@
               </a:defRPr>
             </a:lvl2pPr>
             <a:lvl3pPr algn="ctr">
+              <a:buNone/>
               <a:defRPr sz="2025" b="1">
                 <a:solidFill>
                   <a:srgbClr val="59E2BD"/>
@@ -8492,6 +8774,7 @@
               </a:defRPr>
             </a:lvl3pPr>
             <a:lvl4pPr algn="ctr">
+              <a:buNone/>
               <a:defRPr sz="2025" b="1">
                 <a:solidFill>
                   <a:srgbClr val="59E2BD"/>
@@ -8502,6 +8785,7 @@
               </a:defRPr>
             </a:lvl4pPr>
             <a:lvl5pPr algn="ctr">
+              <a:buNone/>
               <a:defRPr sz="2025" b="1">
                 <a:solidFill>
                   <a:srgbClr val="59E2BD"/>
@@ -8512,6 +8796,7 @@
               </a:defRPr>
             </a:lvl5pPr>
             <a:lvl6pPr algn="ctr">
+              <a:buNone/>
               <a:defRPr sz="2025" b="1">
                 <a:solidFill>
                   <a:srgbClr val="59E2BD"/>
@@ -8522,6 +8807,7 @@
               </a:defRPr>
             </a:lvl6pPr>
             <a:lvl7pPr algn="ctr">
+              <a:buNone/>
               <a:defRPr sz="2025" b="1">
                 <a:solidFill>
                   <a:srgbClr val="59E2BD"/>
@@ -8532,6 +8818,7 @@
               </a:defRPr>
             </a:lvl7pPr>
             <a:lvl8pPr algn="ctr">
+              <a:buNone/>
               <a:defRPr sz="2025" b="1">
                 <a:solidFill>
                   <a:srgbClr val="59E2BD"/>
@@ -8542,6 +8829,7 @@
               </a:defRPr>
             </a:lvl8pPr>
             <a:lvl9pPr algn="ctr">
+              <a:buNone/>
               <a:defRPr sz="2025" b="1">
                 <a:solidFill>
                   <a:srgbClr val="59E2BD"/>
@@ -8554,6 +8842,7 @@
           </a:lstStyle>
           <a:p xmlns:a="http://schemas.openxmlformats.org/drawingml/2006/main">
             <a:pPr algn="ctr">
+              <a:buNone/>
               <a:defRPr sz="2025" b="1">
                 <a:solidFill>
                   <a:srgbClr val="59E2BD"/>
@@ -8577,6 +8866,7 @@
           </a:p>
           <a:p xmlns:a="http://schemas.openxmlformats.org/drawingml/2006/main">
             <a:pPr algn="ctr">
+              <a:buNone/>
               <a:defRPr sz="2025" b="1">
                 <a:solidFill>
                   <a:srgbClr val="59E2BD"/>
@@ -8600,6 +8890,7 @@
           </a:p>
           <a:p xmlns:a="http://schemas.openxmlformats.org/drawingml/2006/main">
             <a:pPr algn="ctr">
+              <a:buNone/>
               <a:defRPr sz="2025" b="1">
                 <a:solidFill>
                   <a:srgbClr val="59E2BD"/>
@@ -8669,6 +8960,7 @@
               </a:defRPr>
             </a:defPPr>
             <a:lvl1pPr algn="ctr">
+              <a:buNone/>
               <a:defRPr sz="2025" b="1">
                 <a:solidFill>
                   <a:srgbClr val="F4F7FC"/>
@@ -8679,6 +8971,7 @@
               </a:defRPr>
             </a:lvl1pPr>
             <a:lvl2pPr algn="ctr">
+              <a:buNone/>
               <a:defRPr sz="2025" b="1">
                 <a:solidFill>
                   <a:srgbClr val="F4F7FC"/>
@@ -8689,6 +8982,7 @@
               </a:defRPr>
             </a:lvl2pPr>
             <a:lvl3pPr algn="ctr">
+              <a:buNone/>
               <a:defRPr sz="2025" b="1">
                 <a:solidFill>
                   <a:srgbClr val="F4F7FC"/>
@@ -8699,6 +8993,7 @@
               </a:defRPr>
             </a:lvl3pPr>
             <a:lvl4pPr algn="ctr">
+              <a:buNone/>
               <a:defRPr sz="2025" b="1">
                 <a:solidFill>
                   <a:srgbClr val="F4F7FC"/>
@@ -8709,6 +9004,7 @@
               </a:defRPr>
             </a:lvl4pPr>
             <a:lvl5pPr algn="ctr">
+              <a:buNone/>
               <a:defRPr sz="2025" b="1">
                 <a:solidFill>
                   <a:srgbClr val="F4F7FC"/>
@@ -8719,6 +9015,7 @@
               </a:defRPr>
             </a:lvl5pPr>
             <a:lvl6pPr algn="ctr">
+              <a:buNone/>
               <a:defRPr sz="2025" b="1">
                 <a:solidFill>
                   <a:srgbClr val="F4F7FC"/>
@@ -8729,6 +9026,7 @@
               </a:defRPr>
             </a:lvl6pPr>
             <a:lvl7pPr algn="ctr">
+              <a:buNone/>
               <a:defRPr sz="2025" b="1">
                 <a:solidFill>
                   <a:srgbClr val="F4F7FC"/>
@@ -8739,6 +9037,7 @@
               </a:defRPr>
             </a:lvl7pPr>
             <a:lvl8pPr algn="ctr">
+              <a:buNone/>
               <a:defRPr sz="2025" b="1">
                 <a:solidFill>
                   <a:srgbClr val="F4F7FC"/>
@@ -8749,6 +9048,7 @@
               </a:defRPr>
             </a:lvl8pPr>
             <a:lvl9pPr algn="ctr">
+              <a:buNone/>
               <a:defRPr sz="2025" b="1">
                 <a:solidFill>
                   <a:srgbClr val="F4F7FC"/>
@@ -8761,6 +9061,7 @@
           </a:lstStyle>
           <a:p xmlns:a="http://schemas.openxmlformats.org/drawingml/2006/main">
             <a:pPr algn="ctr">
+              <a:buNone/>
               <a:defRPr sz="2025" b="1">
                 <a:solidFill>
                   <a:srgbClr val="F4F7FC"/>
@@ -8830,6 +9131,7 @@
               </a:defRPr>
             </a:defPPr>
             <a:lvl1pPr algn="ctr">
+              <a:buNone/>
               <a:defRPr sz="2025" b="1">
                 <a:solidFill>
                   <a:srgbClr val="F4F7FC"/>
@@ -8840,6 +9142,7 @@
               </a:defRPr>
             </a:lvl1pPr>
             <a:lvl2pPr algn="ctr">
+              <a:buNone/>
               <a:defRPr sz="2025" b="1">
                 <a:solidFill>
                   <a:srgbClr val="F4F7FC"/>
@@ -8850,6 +9153,7 @@
               </a:defRPr>
             </a:lvl2pPr>
             <a:lvl3pPr algn="ctr">
+              <a:buNone/>
               <a:defRPr sz="2025" b="1">
                 <a:solidFill>
                   <a:srgbClr val="F4F7FC"/>
@@ -8860,6 +9164,7 @@
               </a:defRPr>
             </a:lvl3pPr>
             <a:lvl4pPr algn="ctr">
+              <a:buNone/>
               <a:defRPr sz="2025" b="1">
                 <a:solidFill>
                   <a:srgbClr val="F4F7FC"/>
@@ -8870,6 +9175,7 @@
               </a:defRPr>
             </a:lvl4pPr>
             <a:lvl5pPr algn="ctr">
+              <a:buNone/>
               <a:defRPr sz="2025" b="1">
                 <a:solidFill>
                   <a:srgbClr val="F4F7FC"/>
@@ -8880,6 +9186,7 @@
               </a:defRPr>
             </a:lvl5pPr>
             <a:lvl6pPr algn="ctr">
+              <a:buNone/>
               <a:defRPr sz="2025" b="1">
                 <a:solidFill>
                   <a:srgbClr val="F4F7FC"/>
@@ -8890,6 +9197,7 @@
               </a:defRPr>
             </a:lvl6pPr>
             <a:lvl7pPr algn="ctr">
+              <a:buNone/>
               <a:defRPr sz="2025" b="1">
                 <a:solidFill>
                   <a:srgbClr val="F4F7FC"/>
@@ -8900,6 +9208,7 @@
               </a:defRPr>
             </a:lvl7pPr>
             <a:lvl8pPr algn="ctr">
+              <a:buNone/>
               <a:defRPr sz="2025" b="1">
                 <a:solidFill>
                   <a:srgbClr val="F4F7FC"/>
@@ -8910,6 +9219,7 @@
               </a:defRPr>
             </a:lvl8pPr>
             <a:lvl9pPr algn="ctr">
+              <a:buNone/>
               <a:defRPr sz="2025" b="1">
                 <a:solidFill>
                   <a:srgbClr val="F4F7FC"/>
@@ -8922,6 +9232,7 @@
           </a:lstStyle>
           <a:p xmlns:a="http://schemas.openxmlformats.org/drawingml/2006/main">
             <a:pPr algn="ctr">
+              <a:buNone/>
               <a:defRPr sz="2025" b="1">
                 <a:solidFill>
                   <a:srgbClr val="F4F7FC"/>
@@ -8991,6 +9302,7 @@
               </a:defRPr>
             </a:defPPr>
             <a:lvl1pPr algn="ctr">
+              <a:buNone/>
               <a:defRPr sz="2025" b="1">
                 <a:solidFill>
                   <a:srgbClr val="F4F7FC"/>
@@ -9001,6 +9313,7 @@
               </a:defRPr>
             </a:lvl1pPr>
             <a:lvl2pPr algn="ctr">
+              <a:buNone/>
               <a:defRPr sz="2025" b="1">
                 <a:solidFill>
                   <a:srgbClr val="F4F7FC"/>
@@ -9011,6 +9324,7 @@
               </a:defRPr>
             </a:lvl2pPr>
             <a:lvl3pPr algn="ctr">
+              <a:buNone/>
               <a:defRPr sz="2025" b="1">
                 <a:solidFill>
                   <a:srgbClr val="F4F7FC"/>
@@ -9021,6 +9335,7 @@
               </a:defRPr>
             </a:lvl3pPr>
             <a:lvl4pPr algn="ctr">
+              <a:buNone/>
               <a:defRPr sz="2025" b="1">
                 <a:solidFill>
                   <a:srgbClr val="F4F7FC"/>
@@ -9031,6 +9346,7 @@
               </a:defRPr>
             </a:lvl4pPr>
             <a:lvl5pPr algn="ctr">
+              <a:buNone/>
               <a:defRPr sz="2025" b="1">
                 <a:solidFill>
                   <a:srgbClr val="F4F7FC"/>
@@ -9041,6 +9357,7 @@
               </a:defRPr>
             </a:lvl5pPr>
             <a:lvl6pPr algn="ctr">
+              <a:buNone/>
               <a:defRPr sz="2025" b="1">
                 <a:solidFill>
                   <a:srgbClr val="F4F7FC"/>
@@ -9051,6 +9368,7 @@
               </a:defRPr>
             </a:lvl6pPr>
             <a:lvl7pPr algn="ctr">
+              <a:buNone/>
               <a:defRPr sz="2025" b="1">
                 <a:solidFill>
                   <a:srgbClr val="F4F7FC"/>
@@ -9061,6 +9379,7 @@
               </a:defRPr>
             </a:lvl7pPr>
             <a:lvl8pPr algn="ctr">
+              <a:buNone/>
               <a:defRPr sz="2025" b="1">
                 <a:solidFill>
                   <a:srgbClr val="F4F7FC"/>
@@ -9071,6 +9390,7 @@
               </a:defRPr>
             </a:lvl8pPr>
             <a:lvl9pPr algn="ctr">
+              <a:buNone/>
               <a:defRPr sz="2025" b="1">
                 <a:solidFill>
                   <a:srgbClr val="F4F7FC"/>
@@ -9083,6 +9403,7 @@
           </a:lstStyle>
           <a:p xmlns:a="http://schemas.openxmlformats.org/drawingml/2006/main">
             <a:pPr algn="ctr">
+              <a:buNone/>
               <a:defRPr sz="2025" b="1">
                 <a:solidFill>
                   <a:srgbClr val="F4F7FC"/>
@@ -9152,6 +9473,7 @@
               </a:defRPr>
             </a:defPPr>
             <a:lvl1pPr algn="ctr">
+              <a:buNone/>
               <a:defRPr sz="2025" b="1">
                 <a:solidFill>
                   <a:srgbClr val="F4F7FC"/>
@@ -9162,6 +9484,7 @@
               </a:defRPr>
             </a:lvl1pPr>
             <a:lvl2pPr algn="ctr">
+              <a:buNone/>
               <a:defRPr sz="2025" b="1">
                 <a:solidFill>
                   <a:srgbClr val="F4F7FC"/>
@@ -9172,6 +9495,7 @@
               </a:defRPr>
             </a:lvl2pPr>
             <a:lvl3pPr algn="ctr">
+              <a:buNone/>
               <a:defRPr sz="2025" b="1">
                 <a:solidFill>
                   <a:srgbClr val="F4F7FC"/>
@@ -9182,6 +9506,7 @@
               </a:defRPr>
             </a:lvl3pPr>
             <a:lvl4pPr algn="ctr">
+              <a:buNone/>
               <a:defRPr sz="2025" b="1">
                 <a:solidFill>
                   <a:srgbClr val="F4F7FC"/>
@@ -9192,6 +9517,7 @@
               </a:defRPr>
             </a:lvl4pPr>
             <a:lvl5pPr algn="ctr">
+              <a:buNone/>
               <a:defRPr sz="2025" b="1">
                 <a:solidFill>
                   <a:srgbClr val="F4F7FC"/>
@@ -9202,6 +9528,7 @@
               </a:defRPr>
             </a:lvl5pPr>
             <a:lvl6pPr algn="ctr">
+              <a:buNone/>
               <a:defRPr sz="2025" b="1">
                 <a:solidFill>
                   <a:srgbClr val="F4F7FC"/>
@@ -9212,6 +9539,7 @@
               </a:defRPr>
             </a:lvl6pPr>
             <a:lvl7pPr algn="ctr">
+              <a:buNone/>
               <a:defRPr sz="2025" b="1">
                 <a:solidFill>
                   <a:srgbClr val="F4F7FC"/>
@@ -9222,6 +9550,7 @@
               </a:defRPr>
             </a:lvl7pPr>
             <a:lvl8pPr algn="ctr">
+              <a:buNone/>
               <a:defRPr sz="2025" b="1">
                 <a:solidFill>
                   <a:srgbClr val="F4F7FC"/>
@@ -9232,6 +9561,7 @@
               </a:defRPr>
             </a:lvl8pPr>
             <a:lvl9pPr algn="ctr">
+              <a:buNone/>
               <a:defRPr sz="2025" b="1">
                 <a:solidFill>
                   <a:srgbClr val="F4F7FC"/>
@@ -9244,6 +9574,7 @@
           </a:lstStyle>
           <a:p xmlns:a="http://schemas.openxmlformats.org/drawingml/2006/main">
             <a:pPr algn="ctr">
+              <a:buNone/>
               <a:defRPr sz="2025" b="1">
                 <a:solidFill>
                   <a:srgbClr val="F4F7FC"/>
@@ -9310,6 +9641,7 @@
               </a:defRPr>
             </a:defPPr>
             <a:lvl1pPr algn="l">
+              <a:buNone/>
               <a:defRPr sz="1950" b="0">
                 <a:solidFill>
                   <a:srgbClr val="B3C5DD"/>
@@ -9320,6 +9652,7 @@
               </a:defRPr>
             </a:lvl1pPr>
             <a:lvl2pPr algn="l">
+              <a:buNone/>
               <a:defRPr sz="1950" b="0">
                 <a:solidFill>
                   <a:srgbClr val="B3C5DD"/>
@@ -9330,6 +9663,7 @@
               </a:defRPr>
             </a:lvl2pPr>
             <a:lvl3pPr algn="l">
+              <a:buNone/>
               <a:defRPr sz="1950" b="0">
                 <a:solidFill>
                   <a:srgbClr val="B3C5DD"/>
@@ -9340,6 +9674,7 @@
               </a:defRPr>
             </a:lvl3pPr>
             <a:lvl4pPr algn="l">
+              <a:buNone/>
               <a:defRPr sz="1950" b="0">
                 <a:solidFill>
                   <a:srgbClr val="B3C5DD"/>
@@ -9350,6 +9685,7 @@
               </a:defRPr>
             </a:lvl4pPr>
             <a:lvl5pPr algn="l">
+              <a:buNone/>
               <a:defRPr sz="1950" b="0">
                 <a:solidFill>
                   <a:srgbClr val="B3C5DD"/>
@@ -9360,6 +9696,7 @@
               </a:defRPr>
             </a:lvl5pPr>
             <a:lvl6pPr algn="l">
+              <a:buNone/>
               <a:defRPr sz="1950" b="0">
                 <a:solidFill>
                   <a:srgbClr val="B3C5DD"/>
@@ -9370,6 +9707,7 @@
               </a:defRPr>
             </a:lvl6pPr>
             <a:lvl7pPr algn="l">
+              <a:buNone/>
               <a:defRPr sz="1950" b="0">
                 <a:solidFill>
                   <a:srgbClr val="B3C5DD"/>
@@ -9380,6 +9718,7 @@
               </a:defRPr>
             </a:lvl7pPr>
             <a:lvl8pPr algn="l">
+              <a:buNone/>
               <a:defRPr sz="1950" b="0">
                 <a:solidFill>
                   <a:srgbClr val="B3C5DD"/>
@@ -9390,6 +9729,7 @@
               </a:defRPr>
             </a:lvl8pPr>
             <a:lvl9pPr algn="l">
+              <a:buNone/>
               <a:defRPr sz="1950" b="0">
                 <a:solidFill>
                   <a:srgbClr val="B3C5DD"/>
@@ -9402,6 +9742,7 @@
           </a:lstStyle>
           <a:p xmlns:a="http://schemas.openxmlformats.org/drawingml/2006/main">
             <a:pPr algn="l">
+              <a:buNone/>
               <a:defRPr sz="1950" b="0">
                 <a:solidFill>
                   <a:srgbClr val="B3C5DD"/>
@@ -9459,7 +9800,7 @@
           <p:cNvPr id="23" name="">
             <a:extLst xmlns:a="http://schemas.openxmlformats.org/drawingml/2006/main">
               <a:ext uri="{FF2B5EF4-FFF2-40B4-BE49-F238E27FC236}">
-                <a16:creationId xmlns:a16="http://schemas.microsoft.com/office/drawing/2014/main" id="{F43716C0-B6B7-4F86-951B-38816E32CCC9}"/>
+                <a16:creationId xmlns:a16="http://schemas.microsoft.com/office/drawing/2014/main" id="{ECAA0689-28BF-4250-82D3-5F3AE435473D}"/>
               </a:ext>
             </a:extLst>
           </p:cNvPr>
@@ -9494,7 +9835,7 @@
           <p:cNvPr id="21" name="">
             <a:extLst xmlns:a="http://schemas.openxmlformats.org/drawingml/2006/main">
               <a:ext uri="{FF2B5EF4-FFF2-40B4-BE49-F238E27FC236}">
-                <a16:creationId xmlns:a16="http://schemas.microsoft.com/office/drawing/2014/main" id="{55A2165E-C5AE-40ED-892C-73F2E3853164}"/>
+                <a16:creationId xmlns:a16="http://schemas.microsoft.com/office/drawing/2014/main" id="{8468DFEF-5E5C-4828-8B60-D52C1D480FAA}"/>
               </a:ext>
             </a:extLst>
           </p:cNvPr>
@@ -9530,7 +9871,7 @@
           <p:cNvPr id="17" name="">
             <a:extLst xmlns:a="http://schemas.openxmlformats.org/drawingml/2006/main">
               <a:ext uri="{FF2B5EF4-FFF2-40B4-BE49-F238E27FC236}">
-                <a16:creationId xmlns:a16="http://schemas.microsoft.com/office/drawing/2014/main" id="{04B6E910-886C-46F2-B260-6716E915FBC7}"/>
+                <a16:creationId xmlns:a16="http://schemas.microsoft.com/office/drawing/2014/main" id="{4DBE5EB3-3F69-4767-B41D-55FF7BEEE0D1}"/>
               </a:ext>
             </a:extLst>
           </p:cNvPr>
@@ -9565,7 +9906,7 @@
           <p:cNvPr id="16" name="">
             <a:extLst xmlns:a="http://schemas.openxmlformats.org/drawingml/2006/main">
               <a:ext uri="{FF2B5EF4-FFF2-40B4-BE49-F238E27FC236}">
-                <a16:creationId xmlns:a16="http://schemas.microsoft.com/office/drawing/2014/main" id="{EA1AB5C4-9C95-4573-9FC2-A3A27D6772C0}"/>
+                <a16:creationId xmlns:a16="http://schemas.microsoft.com/office/drawing/2014/main" id="{C4592C1E-DDE2-4496-8DD5-CA7C4B8277EF}"/>
               </a:ext>
             </a:extLst>
           </p:cNvPr>
@@ -9600,7 +9941,7 @@
           <p:cNvPr id="13" name="">
             <a:extLst xmlns:a="http://schemas.openxmlformats.org/drawingml/2006/main">
               <a:ext uri="{FF2B5EF4-FFF2-40B4-BE49-F238E27FC236}">
-                <a16:creationId xmlns:a16="http://schemas.microsoft.com/office/drawing/2014/main" id="{0855E986-F5DB-46BA-9C12-3BF1792E33ED}"/>
+                <a16:creationId xmlns:a16="http://schemas.microsoft.com/office/drawing/2014/main" id="{E5E9A988-723F-4037-9D36-884AAA15CA76}"/>
               </a:ext>
             </a:extLst>
           </p:cNvPr>
@@ -9632,7 +9973,7 @@
           <p:cNvPr id="11" name="">
             <a:extLst xmlns:a="http://schemas.openxmlformats.org/drawingml/2006/main">
               <a:ext uri="{FF2B5EF4-FFF2-40B4-BE49-F238E27FC236}">
-                <a16:creationId xmlns:a16="http://schemas.microsoft.com/office/drawing/2014/main" id="{546A9D1F-BC5B-4D5A-BBFA-C10F10A69949}"/>
+                <a16:creationId xmlns:a16="http://schemas.microsoft.com/office/drawing/2014/main" id="{3ED763DE-3836-4FCA-BDDE-8C895507C1CD}"/>
               </a:ext>
             </a:extLst>
           </p:cNvPr>
@@ -9664,7 +10005,7 @@
           <p:cNvPr id="10" name="">
             <a:extLst xmlns:a="http://schemas.openxmlformats.org/drawingml/2006/main">
               <a:ext uri="{FF2B5EF4-FFF2-40B4-BE49-F238E27FC236}">
-                <a16:creationId xmlns:a16="http://schemas.microsoft.com/office/drawing/2014/main" id="{9E29013C-8360-481D-A206-E7CF2DE5A764}"/>
+                <a16:creationId xmlns:a16="http://schemas.microsoft.com/office/drawing/2014/main" id="{7868DE92-32F4-4158-AEE7-0F776AF3E95B}"/>
               </a:ext>
             </a:extLst>
           </p:cNvPr>
@@ -9696,7 +10037,7 @@
           <p:cNvPr id="9" name="">
             <a:extLst xmlns:a="http://schemas.openxmlformats.org/drawingml/2006/main">
               <a:ext uri="{FF2B5EF4-FFF2-40B4-BE49-F238E27FC236}">
-                <a16:creationId xmlns:a16="http://schemas.microsoft.com/office/drawing/2014/main" id="{2A9AC17B-465C-4EB7-AB0A-FDD489E45925}"/>
+                <a16:creationId xmlns:a16="http://schemas.microsoft.com/office/drawing/2014/main" id="{5784F495-6D40-4BF0-BADB-603FF88E4819}"/>
               </a:ext>
             </a:extLst>
           </p:cNvPr>
@@ -9728,7 +10069,7 @@
           <p:cNvPr id="8" name="">
             <a:extLst xmlns:a="http://schemas.openxmlformats.org/drawingml/2006/main">
               <a:ext uri="{FF2B5EF4-FFF2-40B4-BE49-F238E27FC236}">
-                <a16:creationId xmlns:a16="http://schemas.microsoft.com/office/drawing/2014/main" id="{B218BA34-F9DC-451E-8861-096A2FEF3813}"/>
+                <a16:creationId xmlns:a16="http://schemas.microsoft.com/office/drawing/2014/main" id="{A3225655-C9C5-4BFF-ACA4-FE416521C513}"/>
               </a:ext>
             </a:extLst>
           </p:cNvPr>
@@ -9798,6 +10139,7 @@
               </a:defRPr>
             </a:defPPr>
             <a:lvl1pPr algn="l">
+              <a:buNone/>
               <a:defRPr sz="3300" b="1">
                 <a:solidFill>
                   <a:srgbClr val="F4F7FC"/>
@@ -9808,6 +10150,7 @@
               </a:defRPr>
             </a:lvl1pPr>
             <a:lvl2pPr algn="l">
+              <a:buNone/>
               <a:defRPr sz="3300" b="1">
                 <a:solidFill>
                   <a:srgbClr val="F4F7FC"/>
@@ -9818,6 +10161,7 @@
               </a:defRPr>
             </a:lvl2pPr>
             <a:lvl3pPr algn="l">
+              <a:buNone/>
               <a:defRPr sz="3300" b="1">
                 <a:solidFill>
                   <a:srgbClr val="F4F7FC"/>
@@ -9828,6 +10172,7 @@
               </a:defRPr>
             </a:lvl3pPr>
             <a:lvl4pPr algn="l">
+              <a:buNone/>
               <a:defRPr sz="3300" b="1">
                 <a:solidFill>
                   <a:srgbClr val="F4F7FC"/>
@@ -9838,6 +10183,7 @@
               </a:defRPr>
             </a:lvl4pPr>
             <a:lvl5pPr algn="l">
+              <a:buNone/>
               <a:defRPr sz="3300" b="1">
                 <a:solidFill>
                   <a:srgbClr val="F4F7FC"/>
@@ -9848,6 +10194,7 @@
               </a:defRPr>
             </a:lvl5pPr>
             <a:lvl6pPr algn="l">
+              <a:buNone/>
               <a:defRPr sz="3300" b="1">
                 <a:solidFill>
                   <a:srgbClr val="F4F7FC"/>
@@ -9858,6 +10205,7 @@
               </a:defRPr>
             </a:lvl6pPr>
             <a:lvl7pPr algn="l">
+              <a:buNone/>
               <a:defRPr sz="3300" b="1">
                 <a:solidFill>
                   <a:srgbClr val="F4F7FC"/>
@@ -9868,6 +10216,7 @@
               </a:defRPr>
             </a:lvl7pPr>
             <a:lvl8pPr algn="l">
+              <a:buNone/>
               <a:defRPr sz="3300" b="1">
                 <a:solidFill>
                   <a:srgbClr val="F4F7FC"/>
@@ -9878,6 +10227,7 @@
               </a:defRPr>
             </a:lvl8pPr>
             <a:lvl9pPr algn="l">
+              <a:buNone/>
               <a:defRPr sz="3300" b="1">
                 <a:solidFill>
                   <a:srgbClr val="F4F7FC"/>
@@ -9890,6 +10240,7 @@
           </a:lstStyle>
           <a:p xmlns:a="http://schemas.openxmlformats.org/drawingml/2006/main">
             <a:pPr algn="l">
+              <a:buNone/>
               <a:defRPr sz="3300" b="1">
                 <a:solidFill>
                   <a:srgbClr val="F4F7FC"/>
@@ -9956,6 +10307,7 @@
               </a:defRPr>
             </a:defPPr>
             <a:lvl1pPr algn="l">
+              <a:buNone/>
               <a:defRPr sz="1800" b="0">
                 <a:solidFill>
                   <a:srgbClr val="B3C5DD"/>
@@ -9966,6 +10318,7 @@
               </a:defRPr>
             </a:lvl1pPr>
             <a:lvl2pPr algn="l">
+              <a:buNone/>
               <a:defRPr sz="1800" b="0">
                 <a:solidFill>
                   <a:srgbClr val="B3C5DD"/>
@@ -9976,6 +10329,7 @@
               </a:defRPr>
             </a:lvl2pPr>
             <a:lvl3pPr algn="l">
+              <a:buNone/>
               <a:defRPr sz="1800" b="0">
                 <a:solidFill>
                   <a:srgbClr val="B3C5DD"/>
@@ -9986,6 +10340,7 @@
               </a:defRPr>
             </a:lvl3pPr>
             <a:lvl4pPr algn="l">
+              <a:buNone/>
               <a:defRPr sz="1800" b="0">
                 <a:solidFill>
                   <a:srgbClr val="B3C5DD"/>
@@ -9996,6 +10351,7 @@
               </a:defRPr>
             </a:lvl4pPr>
             <a:lvl5pPr algn="l">
+              <a:buNone/>
               <a:defRPr sz="1800" b="0">
                 <a:solidFill>
                   <a:srgbClr val="B3C5DD"/>
@@ -10006,6 +10362,7 @@
               </a:defRPr>
             </a:lvl5pPr>
             <a:lvl6pPr algn="l">
+              <a:buNone/>
               <a:defRPr sz="1800" b="0">
                 <a:solidFill>
                   <a:srgbClr val="B3C5DD"/>
@@ -10016,6 +10373,7 @@
               </a:defRPr>
             </a:lvl6pPr>
             <a:lvl7pPr algn="l">
+              <a:buNone/>
               <a:defRPr sz="1800" b="0">
                 <a:solidFill>
                   <a:srgbClr val="B3C5DD"/>
@@ -10026,6 +10384,7 @@
               </a:defRPr>
             </a:lvl7pPr>
             <a:lvl8pPr algn="l">
+              <a:buNone/>
               <a:defRPr sz="1800" b="0">
                 <a:solidFill>
                   <a:srgbClr val="B3C5DD"/>
@@ -10036,6 +10395,7 @@
               </a:defRPr>
             </a:lvl8pPr>
             <a:lvl9pPr algn="l">
+              <a:buNone/>
               <a:defRPr sz="1800" b="0">
                 <a:solidFill>
                   <a:srgbClr val="B3C5DD"/>
@@ -10048,6 +10408,7 @@
           </a:lstStyle>
           <a:p xmlns:a="http://schemas.openxmlformats.org/drawingml/2006/main">
             <a:pPr algn="l">
+              <a:buNone/>
               <a:defRPr sz="1800" b="0">
                 <a:solidFill>
                   <a:srgbClr val="B3C5DD"/>
@@ -10117,6 +10478,7 @@
               </a:defRPr>
             </a:defPPr>
             <a:lvl1pPr algn="ctr">
+              <a:buNone/>
               <a:defRPr sz="1875" b="1">
                 <a:solidFill>
                   <a:srgbClr val="F4F7FC"/>
@@ -10127,6 +10489,7 @@
               </a:defRPr>
             </a:lvl1pPr>
             <a:lvl2pPr algn="ctr">
+              <a:buNone/>
               <a:defRPr sz="1875" b="1">
                 <a:solidFill>
                   <a:srgbClr val="F4F7FC"/>
@@ -10137,6 +10500,7 @@
               </a:defRPr>
             </a:lvl2pPr>
             <a:lvl3pPr algn="ctr">
+              <a:buNone/>
               <a:defRPr sz="1875" b="1">
                 <a:solidFill>
                   <a:srgbClr val="F4F7FC"/>
@@ -10147,6 +10511,7 @@
               </a:defRPr>
             </a:lvl3pPr>
             <a:lvl4pPr algn="ctr">
+              <a:buNone/>
               <a:defRPr sz="1875" b="1">
                 <a:solidFill>
                   <a:srgbClr val="F4F7FC"/>
@@ -10157,6 +10522,7 @@
               </a:defRPr>
             </a:lvl4pPr>
             <a:lvl5pPr algn="ctr">
+              <a:buNone/>
               <a:defRPr sz="1875" b="1">
                 <a:solidFill>
                   <a:srgbClr val="F4F7FC"/>
@@ -10167,6 +10533,7 @@
               </a:defRPr>
             </a:lvl5pPr>
             <a:lvl6pPr algn="ctr">
+              <a:buNone/>
               <a:defRPr sz="1875" b="1">
                 <a:solidFill>
                   <a:srgbClr val="F4F7FC"/>
@@ -10177,6 +10544,7 @@
               </a:defRPr>
             </a:lvl6pPr>
             <a:lvl7pPr algn="ctr">
+              <a:buNone/>
               <a:defRPr sz="1875" b="1">
                 <a:solidFill>
                   <a:srgbClr val="F4F7FC"/>
@@ -10187,6 +10555,7 @@
               </a:defRPr>
             </a:lvl7pPr>
             <a:lvl8pPr algn="ctr">
+              <a:buNone/>
               <a:defRPr sz="1875" b="1">
                 <a:solidFill>
                   <a:srgbClr val="F4F7FC"/>
@@ -10197,6 +10566,7 @@
               </a:defRPr>
             </a:lvl8pPr>
             <a:lvl9pPr algn="ctr">
+              <a:buNone/>
               <a:defRPr sz="1875" b="1">
                 <a:solidFill>
                   <a:srgbClr val="F4F7FC"/>
@@ -10209,6 +10579,7 @@
           </a:lstStyle>
           <a:p xmlns:a="http://schemas.openxmlformats.org/drawingml/2006/main">
             <a:pPr algn="ctr">
+              <a:buNone/>
               <a:defRPr sz="1875" b="1">
                 <a:solidFill>
                   <a:srgbClr val="F4F7FC"/>
@@ -10232,6 +10603,7 @@
           </a:p>
           <a:p xmlns:a="http://schemas.openxmlformats.org/drawingml/2006/main">
             <a:pPr algn="ctr">
+              <a:buNone/>
               <a:defRPr sz="1875" b="1">
                 <a:solidFill>
                   <a:srgbClr val="F4F7FC"/>
@@ -10301,6 +10673,7 @@
               </a:defRPr>
             </a:defPPr>
             <a:lvl1pPr algn="ctr">
+              <a:buNone/>
               <a:defRPr sz="1950" b="1">
                 <a:solidFill>
                   <a:srgbClr val="F4F7FC"/>
@@ -10311,6 +10684,7 @@
               </a:defRPr>
             </a:lvl1pPr>
             <a:lvl2pPr algn="ctr">
+              <a:buNone/>
               <a:defRPr sz="1950" b="1">
                 <a:solidFill>
                   <a:srgbClr val="F4F7FC"/>
@@ -10321,6 +10695,7 @@
               </a:defRPr>
             </a:lvl2pPr>
             <a:lvl3pPr algn="ctr">
+              <a:buNone/>
               <a:defRPr sz="1950" b="1">
                 <a:solidFill>
                   <a:srgbClr val="F4F7FC"/>
@@ -10331,6 +10706,7 @@
               </a:defRPr>
             </a:lvl3pPr>
             <a:lvl4pPr algn="ctr">
+              <a:buNone/>
               <a:defRPr sz="1950" b="1">
                 <a:solidFill>
                   <a:srgbClr val="F4F7FC"/>
@@ -10341,6 +10717,7 @@
               </a:defRPr>
             </a:lvl4pPr>
             <a:lvl5pPr algn="ctr">
+              <a:buNone/>
               <a:defRPr sz="1950" b="1">
                 <a:solidFill>
                   <a:srgbClr val="F4F7FC"/>
@@ -10351,6 +10728,7 @@
               </a:defRPr>
             </a:lvl5pPr>
             <a:lvl6pPr algn="ctr">
+              <a:buNone/>
               <a:defRPr sz="1950" b="1">
                 <a:solidFill>
                   <a:srgbClr val="F4F7FC"/>
@@ -10361,6 +10739,7 @@
               </a:defRPr>
             </a:lvl6pPr>
             <a:lvl7pPr algn="ctr">
+              <a:buNone/>
               <a:defRPr sz="1950" b="1">
                 <a:solidFill>
                   <a:srgbClr val="F4F7FC"/>
@@ -10371,6 +10750,7 @@
               </a:defRPr>
             </a:lvl7pPr>
             <a:lvl8pPr algn="ctr">
+              <a:buNone/>
               <a:defRPr sz="1950" b="1">
                 <a:solidFill>
                   <a:srgbClr val="F4F7FC"/>
@@ -10381,6 +10761,7 @@
               </a:defRPr>
             </a:lvl8pPr>
             <a:lvl9pPr algn="ctr">
+              <a:buNone/>
               <a:defRPr sz="1950" b="1">
                 <a:solidFill>
                   <a:srgbClr val="F4F7FC"/>
@@ -10393,6 +10774,7 @@
           </a:lstStyle>
           <a:p xmlns:a="http://schemas.openxmlformats.org/drawingml/2006/main">
             <a:pPr algn="ctr">
+              <a:buNone/>
               <a:defRPr sz="1950" b="1">
                 <a:solidFill>
                   <a:srgbClr val="F4F7FC"/>
@@ -10462,6 +10844,7 @@
               </a:defRPr>
             </a:defPPr>
             <a:lvl1pPr algn="ctr">
+              <a:buNone/>
               <a:defRPr sz="1950" b="1">
                 <a:solidFill>
                   <a:srgbClr val="F4F7FC"/>
@@ -10472,6 +10855,7 @@
               </a:defRPr>
             </a:lvl1pPr>
             <a:lvl2pPr algn="ctr">
+              <a:buNone/>
               <a:defRPr sz="1950" b="1">
                 <a:solidFill>
                   <a:srgbClr val="F4F7FC"/>
@@ -10482,6 +10866,7 @@
               </a:defRPr>
             </a:lvl2pPr>
             <a:lvl3pPr algn="ctr">
+              <a:buNone/>
               <a:defRPr sz="1950" b="1">
                 <a:solidFill>
                   <a:srgbClr val="F4F7FC"/>
@@ -10492,6 +10877,7 @@
               </a:defRPr>
             </a:lvl3pPr>
             <a:lvl4pPr algn="ctr">
+              <a:buNone/>
               <a:defRPr sz="1950" b="1">
                 <a:solidFill>
                   <a:srgbClr val="F4F7FC"/>
@@ -10502,6 +10888,7 @@
               </a:defRPr>
             </a:lvl4pPr>
             <a:lvl5pPr algn="ctr">
+              <a:buNone/>
               <a:defRPr sz="1950" b="1">
                 <a:solidFill>
                   <a:srgbClr val="F4F7FC"/>
@@ -10512,6 +10899,7 @@
               </a:defRPr>
             </a:lvl5pPr>
             <a:lvl6pPr algn="ctr">
+              <a:buNone/>
               <a:defRPr sz="1950" b="1">
                 <a:solidFill>
                   <a:srgbClr val="F4F7FC"/>
@@ -10522,6 +10910,7 @@
               </a:defRPr>
             </a:lvl6pPr>
             <a:lvl7pPr algn="ctr">
+              <a:buNone/>
               <a:defRPr sz="1950" b="1">
                 <a:solidFill>
                   <a:srgbClr val="F4F7FC"/>
@@ -10532,6 +10921,7 @@
               </a:defRPr>
             </a:lvl7pPr>
             <a:lvl8pPr algn="ctr">
+              <a:buNone/>
               <a:defRPr sz="1950" b="1">
                 <a:solidFill>
                   <a:srgbClr val="F4F7FC"/>
@@ -10542,6 +10932,7 @@
               </a:defRPr>
             </a:lvl8pPr>
             <a:lvl9pPr algn="ctr">
+              <a:buNone/>
               <a:defRPr sz="1950" b="1">
                 <a:solidFill>
                   <a:srgbClr val="F4F7FC"/>
@@ -10554,6 +10945,7 @@
           </a:lstStyle>
           <a:p xmlns:a="http://schemas.openxmlformats.org/drawingml/2006/main">
             <a:pPr algn="ctr">
+              <a:buNone/>
               <a:defRPr sz="1950" b="1">
                 <a:solidFill>
                   <a:srgbClr val="F4F7FC"/>
@@ -10577,6 +10969,7 @@
           </a:p>
           <a:p xmlns:a="http://schemas.openxmlformats.org/drawingml/2006/main">
             <a:pPr algn="ctr">
+              <a:buNone/>
               <a:defRPr sz="1950" b="1">
                 <a:solidFill>
                   <a:srgbClr val="F4F7FC"/>
@@ -10646,6 +11039,7 @@
               </a:defRPr>
             </a:defPPr>
             <a:lvl1pPr algn="ctr">
+              <a:buNone/>
               <a:defRPr sz="1875" b="1">
                 <a:solidFill>
                   <a:srgbClr val="F4F7FC"/>
@@ -10656,6 +11050,7 @@
               </a:defRPr>
             </a:lvl1pPr>
             <a:lvl2pPr algn="ctr">
+              <a:buNone/>
               <a:defRPr sz="1875" b="1">
                 <a:solidFill>
                   <a:srgbClr val="F4F7FC"/>
@@ -10666,6 +11061,7 @@
               </a:defRPr>
             </a:lvl2pPr>
             <a:lvl3pPr algn="ctr">
+              <a:buNone/>
               <a:defRPr sz="1875" b="1">
                 <a:solidFill>
                   <a:srgbClr val="F4F7FC"/>
@@ -10676,6 +11072,7 @@
               </a:defRPr>
             </a:lvl3pPr>
             <a:lvl4pPr algn="ctr">
+              <a:buNone/>
               <a:defRPr sz="1875" b="1">
                 <a:solidFill>
                   <a:srgbClr val="F4F7FC"/>
@@ -10686,6 +11083,7 @@
               </a:defRPr>
             </a:lvl4pPr>
             <a:lvl5pPr algn="ctr">
+              <a:buNone/>
               <a:defRPr sz="1875" b="1">
                 <a:solidFill>
                   <a:srgbClr val="F4F7FC"/>
@@ -10696,6 +11094,7 @@
               </a:defRPr>
             </a:lvl5pPr>
             <a:lvl6pPr algn="ctr">
+              <a:buNone/>
               <a:defRPr sz="1875" b="1">
                 <a:solidFill>
                   <a:srgbClr val="F4F7FC"/>
@@ -10706,6 +11105,7 @@
               </a:defRPr>
             </a:lvl6pPr>
             <a:lvl7pPr algn="ctr">
+              <a:buNone/>
               <a:defRPr sz="1875" b="1">
                 <a:solidFill>
                   <a:srgbClr val="F4F7FC"/>
@@ -10716,6 +11116,7 @@
               </a:defRPr>
             </a:lvl7pPr>
             <a:lvl8pPr algn="ctr">
+              <a:buNone/>
               <a:defRPr sz="1875" b="1">
                 <a:solidFill>
                   <a:srgbClr val="F4F7FC"/>
@@ -10726,6 +11127,7 @@
               </a:defRPr>
             </a:lvl8pPr>
             <a:lvl9pPr algn="ctr">
+              <a:buNone/>
               <a:defRPr sz="1875" b="1">
                 <a:solidFill>
                   <a:srgbClr val="F4F7FC"/>
@@ -10738,6 +11140,7 @@
           </a:lstStyle>
           <a:p xmlns:a="http://schemas.openxmlformats.org/drawingml/2006/main">
             <a:pPr algn="ctr">
+              <a:buNone/>
               <a:defRPr sz="1875" b="1">
                 <a:solidFill>
                   <a:srgbClr val="F4F7FC"/>
@@ -10761,6 +11164,7 @@
           </a:p>
           <a:p xmlns:a="http://schemas.openxmlformats.org/drawingml/2006/main">
             <a:pPr algn="ctr">
+              <a:buNone/>
               <a:defRPr sz="1875" b="1">
                 <a:solidFill>
                   <a:srgbClr val="F4F7FC"/>
@@ -10830,6 +11234,7 @@
               </a:defRPr>
             </a:defPPr>
             <a:lvl1pPr algn="ctr">
+              <a:buNone/>
               <a:defRPr sz="1800" b="1">
                 <a:solidFill>
                   <a:srgbClr val="F4F7FC"/>
@@ -10840,6 +11245,7 @@
               </a:defRPr>
             </a:lvl1pPr>
             <a:lvl2pPr algn="ctr">
+              <a:buNone/>
               <a:defRPr sz="1800" b="1">
                 <a:solidFill>
                   <a:srgbClr val="F4F7FC"/>
@@ -10850,6 +11256,7 @@
               </a:defRPr>
             </a:lvl2pPr>
             <a:lvl3pPr algn="ctr">
+              <a:buNone/>
               <a:defRPr sz="1800" b="1">
                 <a:solidFill>
                   <a:srgbClr val="F4F7FC"/>
@@ -10860,6 +11267,7 @@
               </a:defRPr>
             </a:lvl3pPr>
             <a:lvl4pPr algn="ctr">
+              <a:buNone/>
               <a:defRPr sz="1800" b="1">
                 <a:solidFill>
                   <a:srgbClr val="F4F7FC"/>
@@ -10870,6 +11278,7 @@
               </a:defRPr>
             </a:lvl4pPr>
             <a:lvl5pPr algn="ctr">
+              <a:buNone/>
               <a:defRPr sz="1800" b="1">
                 <a:solidFill>
                   <a:srgbClr val="F4F7FC"/>
@@ -10880,6 +11289,7 @@
               </a:defRPr>
             </a:lvl5pPr>
             <a:lvl6pPr algn="ctr">
+              <a:buNone/>
               <a:defRPr sz="1800" b="1">
                 <a:solidFill>
                   <a:srgbClr val="F4F7FC"/>
@@ -10890,6 +11300,7 @@
               </a:defRPr>
             </a:lvl6pPr>
             <a:lvl7pPr algn="ctr">
+              <a:buNone/>
               <a:defRPr sz="1800" b="1">
                 <a:solidFill>
                   <a:srgbClr val="F4F7FC"/>
@@ -10900,6 +11311,7 @@
               </a:defRPr>
             </a:lvl7pPr>
             <a:lvl8pPr algn="ctr">
+              <a:buNone/>
               <a:defRPr sz="1800" b="1">
                 <a:solidFill>
                   <a:srgbClr val="F4F7FC"/>
@@ -10910,6 +11322,7 @@
               </a:defRPr>
             </a:lvl8pPr>
             <a:lvl9pPr algn="ctr">
+              <a:buNone/>
               <a:defRPr sz="1800" b="1">
                 <a:solidFill>
                   <a:srgbClr val="F4F7FC"/>
@@ -10922,6 +11335,7 @@
           </a:lstStyle>
           <a:p xmlns:a="http://schemas.openxmlformats.org/drawingml/2006/main">
             <a:pPr algn="ctr">
+              <a:buNone/>
               <a:defRPr sz="1800" b="1">
                 <a:solidFill>
                   <a:srgbClr val="F4F7FC"/>
@@ -10945,6 +11359,7 @@
           </a:p>
           <a:p xmlns:a="http://schemas.openxmlformats.org/drawingml/2006/main">
             <a:pPr algn="ctr">
+              <a:buNone/>
               <a:defRPr sz="1800" b="1">
                 <a:solidFill>
                   <a:srgbClr val="F4F7FC"/>
@@ -11014,6 +11429,7 @@
               </a:defRPr>
             </a:defPPr>
             <a:lvl1pPr algn="ctr">
+              <a:buNone/>
               <a:defRPr sz="1950" b="1">
                 <a:solidFill>
                   <a:srgbClr val="59E2BD"/>
@@ -11024,6 +11440,7 @@
               </a:defRPr>
             </a:lvl1pPr>
             <a:lvl2pPr algn="ctr">
+              <a:buNone/>
               <a:defRPr sz="1950" b="1">
                 <a:solidFill>
                   <a:srgbClr val="59E2BD"/>
@@ -11034,6 +11451,7 @@
               </a:defRPr>
             </a:lvl2pPr>
             <a:lvl3pPr algn="ctr">
+              <a:buNone/>
               <a:defRPr sz="1950" b="1">
                 <a:solidFill>
                   <a:srgbClr val="59E2BD"/>
@@ -11044,6 +11462,7 @@
               </a:defRPr>
             </a:lvl3pPr>
             <a:lvl4pPr algn="ctr">
+              <a:buNone/>
               <a:defRPr sz="1950" b="1">
                 <a:solidFill>
                   <a:srgbClr val="59E2BD"/>
@@ -11054,6 +11473,7 @@
               </a:defRPr>
             </a:lvl4pPr>
             <a:lvl5pPr algn="ctr">
+              <a:buNone/>
               <a:defRPr sz="1950" b="1">
                 <a:solidFill>
                   <a:srgbClr val="59E2BD"/>
@@ -11064,6 +11484,7 @@
               </a:defRPr>
             </a:lvl5pPr>
             <a:lvl6pPr algn="ctr">
+              <a:buNone/>
               <a:defRPr sz="1950" b="1">
                 <a:solidFill>
                   <a:srgbClr val="59E2BD"/>
@@ -11074,6 +11495,7 @@
               </a:defRPr>
             </a:lvl6pPr>
             <a:lvl7pPr algn="ctr">
+              <a:buNone/>
               <a:defRPr sz="1950" b="1">
                 <a:solidFill>
                   <a:srgbClr val="59E2BD"/>
@@ -11084,6 +11506,7 @@
               </a:defRPr>
             </a:lvl7pPr>
             <a:lvl8pPr algn="ctr">
+              <a:buNone/>
               <a:defRPr sz="1950" b="1">
                 <a:solidFill>
                   <a:srgbClr val="59E2BD"/>
@@ -11094,6 +11517,7 @@
               </a:defRPr>
             </a:lvl8pPr>
             <a:lvl9pPr algn="ctr">
+              <a:buNone/>
               <a:defRPr sz="1950" b="1">
                 <a:solidFill>
                   <a:srgbClr val="59E2BD"/>
@@ -11106,6 +11530,7 @@
           </a:lstStyle>
           <a:p xmlns:a="http://schemas.openxmlformats.org/drawingml/2006/main">
             <a:pPr algn="ctr">
+              <a:buNone/>
               <a:defRPr sz="1950" b="1">
                 <a:solidFill>
                   <a:srgbClr val="59E2BD"/>
@@ -11129,6 +11554,7 @@
           </a:p>
           <a:p xmlns:a="http://schemas.openxmlformats.org/drawingml/2006/main">
             <a:pPr algn="ctr">
+              <a:buNone/>
               <a:defRPr sz="1950" b="1">
                 <a:solidFill>
                   <a:srgbClr val="59E2BD"/>
@@ -11198,6 +11624,7 @@
               </a:defRPr>
             </a:defPPr>
             <a:lvl1pPr algn="ctr">
+              <a:buNone/>
               <a:defRPr sz="1875" b="1">
                 <a:solidFill>
                   <a:srgbClr val="59E2BD"/>
@@ -11208,6 +11635,7 @@
               </a:defRPr>
             </a:lvl1pPr>
             <a:lvl2pPr algn="ctr">
+              <a:buNone/>
               <a:defRPr sz="1875" b="1">
                 <a:solidFill>
                   <a:srgbClr val="59E2BD"/>
@@ -11218,6 +11646,7 @@
               </a:defRPr>
             </a:lvl2pPr>
             <a:lvl3pPr algn="ctr">
+              <a:buNone/>
               <a:defRPr sz="1875" b="1">
                 <a:solidFill>
                   <a:srgbClr val="59E2BD"/>
@@ -11228,6 +11657,7 @@
               </a:defRPr>
             </a:lvl3pPr>
             <a:lvl4pPr algn="ctr">
+              <a:buNone/>
               <a:defRPr sz="1875" b="1">
                 <a:solidFill>
                   <a:srgbClr val="59E2BD"/>
@@ -11238,6 +11668,7 @@
               </a:defRPr>
             </a:lvl4pPr>
             <a:lvl5pPr algn="ctr">
+              <a:buNone/>
               <a:defRPr sz="1875" b="1">
                 <a:solidFill>
                   <a:srgbClr val="59E2BD"/>
@@ -11248,6 +11679,7 @@
               </a:defRPr>
             </a:lvl5pPr>
             <a:lvl6pPr algn="ctr">
+              <a:buNone/>
               <a:defRPr sz="1875" b="1">
                 <a:solidFill>
                   <a:srgbClr val="59E2BD"/>
@@ -11258,6 +11690,7 @@
               </a:defRPr>
             </a:lvl6pPr>
             <a:lvl7pPr algn="ctr">
+              <a:buNone/>
               <a:defRPr sz="1875" b="1">
                 <a:solidFill>
                   <a:srgbClr val="59E2BD"/>
@@ -11268,6 +11701,7 @@
               </a:defRPr>
             </a:lvl7pPr>
             <a:lvl8pPr algn="ctr">
+              <a:buNone/>
               <a:defRPr sz="1875" b="1">
                 <a:solidFill>
                   <a:srgbClr val="59E2BD"/>
@@ -11278,6 +11712,7 @@
               </a:defRPr>
             </a:lvl8pPr>
             <a:lvl9pPr algn="ctr">
+              <a:buNone/>
               <a:defRPr sz="1875" b="1">
                 <a:solidFill>
                   <a:srgbClr val="59E2BD"/>
@@ -11290,6 +11725,7 @@
           </a:lstStyle>
           <a:p xmlns:a="http://schemas.openxmlformats.org/drawingml/2006/main">
             <a:pPr algn="ctr">
+              <a:buNone/>
               <a:defRPr sz="1875" b="1">
                 <a:solidFill>
                   <a:srgbClr val="59E2BD"/>
@@ -11313,6 +11749,7 @@
           </a:p>
           <a:p xmlns:a="http://schemas.openxmlformats.org/drawingml/2006/main">
             <a:pPr algn="ctr">
+              <a:buNone/>
               <a:defRPr sz="1875" b="1">
                 <a:solidFill>
                   <a:srgbClr val="59E2BD"/>
@@ -11382,6 +11819,7 @@
               </a:defRPr>
             </a:defPPr>
             <a:lvl1pPr algn="ctr">
+              <a:buNone/>
               <a:defRPr sz="1800" b="1">
                 <a:solidFill>
                   <a:srgbClr val="F4F7FC"/>
@@ -11392,6 +11830,7 @@
               </a:defRPr>
             </a:lvl1pPr>
             <a:lvl2pPr algn="ctr">
+              <a:buNone/>
               <a:defRPr sz="1800" b="1">
                 <a:solidFill>
                   <a:srgbClr val="F4F7FC"/>
@@ -11402,6 +11841,7 @@
               </a:defRPr>
             </a:lvl2pPr>
             <a:lvl3pPr algn="ctr">
+              <a:buNone/>
               <a:defRPr sz="1800" b="1">
                 <a:solidFill>
                   <a:srgbClr val="F4F7FC"/>
@@ -11412,6 +11852,7 @@
               </a:defRPr>
             </a:lvl3pPr>
             <a:lvl4pPr algn="ctr">
+              <a:buNone/>
               <a:defRPr sz="1800" b="1">
                 <a:solidFill>
                   <a:srgbClr val="F4F7FC"/>
@@ -11422,6 +11863,7 @@
               </a:defRPr>
             </a:lvl4pPr>
             <a:lvl5pPr algn="ctr">
+              <a:buNone/>
               <a:defRPr sz="1800" b="1">
                 <a:solidFill>
                   <a:srgbClr val="F4F7FC"/>
@@ -11432,6 +11874,7 @@
               </a:defRPr>
             </a:lvl5pPr>
             <a:lvl6pPr algn="ctr">
+              <a:buNone/>
               <a:defRPr sz="1800" b="1">
                 <a:solidFill>
                   <a:srgbClr val="F4F7FC"/>
@@ -11442,6 +11885,7 @@
               </a:defRPr>
             </a:lvl6pPr>
             <a:lvl7pPr algn="ctr">
+              <a:buNone/>
               <a:defRPr sz="1800" b="1">
                 <a:solidFill>
                   <a:srgbClr val="F4F7FC"/>
@@ -11452,6 +11896,7 @@
               </a:defRPr>
             </a:lvl7pPr>
             <a:lvl8pPr algn="ctr">
+              <a:buNone/>
               <a:defRPr sz="1800" b="1">
                 <a:solidFill>
                   <a:srgbClr val="F4F7FC"/>
@@ -11462,6 +11907,7 @@
               </a:defRPr>
             </a:lvl8pPr>
             <a:lvl9pPr algn="ctr">
+              <a:buNone/>
               <a:defRPr sz="1800" b="1">
                 <a:solidFill>
                   <a:srgbClr val="F4F7FC"/>
@@ -11474,6 +11920,7 @@
           </a:lstStyle>
           <a:p xmlns:a="http://schemas.openxmlformats.org/drawingml/2006/main">
             <a:pPr algn="ctr">
+              <a:buNone/>
               <a:defRPr sz="1800" b="1">
                 <a:solidFill>
                   <a:srgbClr val="F4F7FC"/>
@@ -11497,6 +11944,7 @@
           </a:p>
           <a:p xmlns:a="http://schemas.openxmlformats.org/drawingml/2006/main">
             <a:pPr algn="ctr">
+              <a:buNone/>
               <a:defRPr sz="1800" b="1">
                 <a:solidFill>
                   <a:srgbClr val="F4F7FC"/>
@@ -11563,6 +12011,7 @@
               </a:defRPr>
             </a:defPPr>
             <a:lvl1pPr algn="ctr">
+              <a:buNone/>
               <a:defRPr sz="1650" b="0">
                 <a:solidFill>
                   <a:srgbClr val="59E2BD"/>
@@ -11573,6 +12022,7 @@
               </a:defRPr>
             </a:lvl1pPr>
             <a:lvl2pPr algn="ctr">
+              <a:buNone/>
               <a:defRPr sz="1650" b="0">
                 <a:solidFill>
                   <a:srgbClr val="59E2BD"/>
@@ -11583,6 +12033,7 @@
               </a:defRPr>
             </a:lvl2pPr>
             <a:lvl3pPr algn="ctr">
+              <a:buNone/>
               <a:defRPr sz="1650" b="0">
                 <a:solidFill>
                   <a:srgbClr val="59E2BD"/>
@@ -11593,6 +12044,7 @@
               </a:defRPr>
             </a:lvl3pPr>
             <a:lvl4pPr algn="ctr">
+              <a:buNone/>
               <a:defRPr sz="1650" b="0">
                 <a:solidFill>
                   <a:srgbClr val="59E2BD"/>
@@ -11603,6 +12055,7 @@
               </a:defRPr>
             </a:lvl4pPr>
             <a:lvl5pPr algn="ctr">
+              <a:buNone/>
               <a:defRPr sz="1650" b="0">
                 <a:solidFill>
                   <a:srgbClr val="59E2BD"/>
@@ -11613,6 +12066,7 @@
               </a:defRPr>
             </a:lvl5pPr>
             <a:lvl6pPr algn="ctr">
+              <a:buNone/>
               <a:defRPr sz="1650" b="0">
                 <a:solidFill>
                   <a:srgbClr val="59E2BD"/>
@@ -11623,6 +12077,7 @@
               </a:defRPr>
             </a:lvl6pPr>
             <a:lvl7pPr algn="ctr">
+              <a:buNone/>
               <a:defRPr sz="1650" b="0">
                 <a:solidFill>
                   <a:srgbClr val="59E2BD"/>
@@ -11633,6 +12088,7 @@
               </a:defRPr>
             </a:lvl7pPr>
             <a:lvl8pPr algn="ctr">
+              <a:buNone/>
               <a:defRPr sz="1650" b="0">
                 <a:solidFill>
                   <a:srgbClr val="59E2BD"/>
@@ -11643,6 +12099,7 @@
               </a:defRPr>
             </a:lvl8pPr>
             <a:lvl9pPr algn="ctr">
+              <a:buNone/>
               <a:defRPr sz="1650" b="0">
                 <a:solidFill>
                   <a:srgbClr val="59E2BD"/>
@@ -11655,6 +12112,7 @@
           </a:lstStyle>
           <a:p xmlns:a="http://schemas.openxmlformats.org/drawingml/2006/main">
             <a:pPr algn="ctr">
+              <a:buNone/>
               <a:defRPr sz="1650" b="0">
                 <a:solidFill>
                   <a:srgbClr val="59E2BD"/>
@@ -11721,6 +12179,7 @@
               </a:defRPr>
             </a:defPPr>
             <a:lvl1pPr algn="l">
+              <a:buNone/>
               <a:defRPr sz="1650" b="0">
                 <a:solidFill>
                   <a:srgbClr val="59E2BD"/>
@@ -11731,6 +12190,7 @@
               </a:defRPr>
             </a:lvl1pPr>
             <a:lvl2pPr algn="l">
+              <a:buNone/>
               <a:defRPr sz="1650" b="0">
                 <a:solidFill>
                   <a:srgbClr val="59E2BD"/>
@@ -11741,6 +12201,7 @@
               </a:defRPr>
             </a:lvl2pPr>
             <a:lvl3pPr algn="l">
+              <a:buNone/>
               <a:defRPr sz="1650" b="0">
                 <a:solidFill>
                   <a:srgbClr val="59E2BD"/>
@@ -11751,6 +12212,7 @@
               </a:defRPr>
             </a:lvl3pPr>
             <a:lvl4pPr algn="l">
+              <a:buNone/>
               <a:defRPr sz="1650" b="0">
                 <a:solidFill>
                   <a:srgbClr val="59E2BD"/>
@@ -11761,6 +12223,7 @@
               </a:defRPr>
             </a:lvl4pPr>
             <a:lvl5pPr algn="l">
+              <a:buNone/>
               <a:defRPr sz="1650" b="0">
                 <a:solidFill>
                   <a:srgbClr val="59E2BD"/>
@@ -11771,6 +12234,7 @@
               </a:defRPr>
             </a:lvl5pPr>
             <a:lvl6pPr algn="l">
+              <a:buNone/>
               <a:defRPr sz="1650" b="0">
                 <a:solidFill>
                   <a:srgbClr val="59E2BD"/>
@@ -11781,6 +12245,7 @@
               </a:defRPr>
             </a:lvl6pPr>
             <a:lvl7pPr algn="l">
+              <a:buNone/>
               <a:defRPr sz="1650" b="0">
                 <a:solidFill>
                   <a:srgbClr val="59E2BD"/>
@@ -11791,6 +12256,7 @@
               </a:defRPr>
             </a:lvl7pPr>
             <a:lvl8pPr algn="l">
+              <a:buNone/>
               <a:defRPr sz="1650" b="0">
                 <a:solidFill>
                   <a:srgbClr val="59E2BD"/>
@@ -11801,6 +12267,7 @@
               </a:defRPr>
             </a:lvl8pPr>
             <a:lvl9pPr algn="l">
+              <a:buNone/>
               <a:defRPr sz="1650" b="0">
                 <a:solidFill>
                   <a:srgbClr val="59E2BD"/>
@@ -11813,6 +12280,7 @@
           </a:lstStyle>
           <a:p xmlns:a="http://schemas.openxmlformats.org/drawingml/2006/main">
             <a:pPr algn="l">
+              <a:buNone/>
               <a:defRPr sz="1650" b="0">
                 <a:solidFill>
                   <a:srgbClr val="59E2BD"/>
@@ -11836,6 +12304,7 @@
           </a:p>
           <a:p xmlns:a="http://schemas.openxmlformats.org/drawingml/2006/main">
             <a:pPr algn="l">
+              <a:buNone/>
               <a:defRPr sz="1650" b="0">
                 <a:solidFill>
                   <a:srgbClr val="59E2BD"/>
@@ -11905,6 +12374,7 @@
               </a:defRPr>
             </a:defPPr>
             <a:lvl1pPr algn="ctr">
+              <a:buNone/>
               <a:defRPr sz="1800" b="1">
                 <a:solidFill>
                   <a:srgbClr val="F4F7FC"/>
@@ -11915,6 +12385,7 @@
               </a:defRPr>
             </a:lvl1pPr>
             <a:lvl2pPr algn="ctr">
+              <a:buNone/>
               <a:defRPr sz="1800" b="1">
                 <a:solidFill>
                   <a:srgbClr val="F4F7FC"/>
@@ -11925,6 +12396,7 @@
               </a:defRPr>
             </a:lvl2pPr>
             <a:lvl3pPr algn="ctr">
+              <a:buNone/>
               <a:defRPr sz="1800" b="1">
                 <a:solidFill>
                   <a:srgbClr val="F4F7FC"/>
@@ -11935,6 +12407,7 @@
               </a:defRPr>
             </a:lvl3pPr>
             <a:lvl4pPr algn="ctr">
+              <a:buNone/>
               <a:defRPr sz="1800" b="1">
                 <a:solidFill>
                   <a:srgbClr val="F4F7FC"/>
@@ -11945,6 +12418,7 @@
               </a:defRPr>
             </a:lvl4pPr>
             <a:lvl5pPr algn="ctr">
+              <a:buNone/>
               <a:defRPr sz="1800" b="1">
                 <a:solidFill>
                   <a:srgbClr val="F4F7FC"/>
@@ -11955,6 +12429,7 @@
               </a:defRPr>
             </a:lvl5pPr>
             <a:lvl6pPr algn="ctr">
+              <a:buNone/>
               <a:defRPr sz="1800" b="1">
                 <a:solidFill>
                   <a:srgbClr val="F4F7FC"/>
@@ -11965,6 +12440,7 @@
               </a:defRPr>
             </a:lvl6pPr>
             <a:lvl7pPr algn="ctr">
+              <a:buNone/>
               <a:defRPr sz="1800" b="1">
                 <a:solidFill>
                   <a:srgbClr val="F4F7FC"/>
@@ -11975,6 +12451,7 @@
               </a:defRPr>
             </a:lvl7pPr>
             <a:lvl8pPr algn="ctr">
+              <a:buNone/>
               <a:defRPr sz="1800" b="1">
                 <a:solidFill>
                   <a:srgbClr val="F4F7FC"/>
@@ -11985,6 +12462,7 @@
               </a:defRPr>
             </a:lvl8pPr>
             <a:lvl9pPr algn="ctr">
+              <a:buNone/>
               <a:defRPr sz="1800" b="1">
                 <a:solidFill>
                   <a:srgbClr val="F4F7FC"/>
@@ -11997,6 +12475,7 @@
           </a:lstStyle>
           <a:p xmlns:a="http://schemas.openxmlformats.org/drawingml/2006/main">
             <a:pPr algn="ctr">
+              <a:buNone/>
               <a:defRPr sz="1800" b="1">
                 <a:solidFill>
                   <a:srgbClr val="F4F7FC"/>
@@ -12020,6 +12499,7 @@
           </a:p>
           <a:p xmlns:a="http://schemas.openxmlformats.org/drawingml/2006/main">
             <a:pPr algn="ctr">
+              <a:buNone/>
               <a:defRPr sz="1800" b="1">
                 <a:solidFill>
                   <a:srgbClr val="F4F7FC"/>
@@ -12089,6 +12569,7 @@
               </a:defRPr>
             </a:defPPr>
             <a:lvl1pPr algn="ctr">
+              <a:buNone/>
               <a:defRPr sz="1875" b="1">
                 <a:solidFill>
                   <a:srgbClr val="59E2BD"/>
@@ -12099,6 +12580,7 @@
               </a:defRPr>
             </a:lvl1pPr>
             <a:lvl2pPr algn="ctr">
+              <a:buNone/>
               <a:defRPr sz="1875" b="1">
                 <a:solidFill>
                   <a:srgbClr val="59E2BD"/>
@@ -12109,6 +12591,7 @@
               </a:defRPr>
             </a:lvl2pPr>
             <a:lvl3pPr algn="ctr">
+              <a:buNone/>
               <a:defRPr sz="1875" b="1">
                 <a:solidFill>
                   <a:srgbClr val="59E2BD"/>
@@ -12119,6 +12602,7 @@
               </a:defRPr>
             </a:lvl3pPr>
             <a:lvl4pPr algn="ctr">
+              <a:buNone/>
               <a:defRPr sz="1875" b="1">
                 <a:solidFill>
                   <a:srgbClr val="59E2BD"/>
@@ -12129,6 +12613,7 @@
               </a:defRPr>
             </a:lvl4pPr>
             <a:lvl5pPr algn="ctr">
+              <a:buNone/>
               <a:defRPr sz="1875" b="1">
                 <a:solidFill>
                   <a:srgbClr val="59E2BD"/>
@@ -12139,6 +12624,7 @@
               </a:defRPr>
             </a:lvl5pPr>
             <a:lvl6pPr algn="ctr">
+              <a:buNone/>
               <a:defRPr sz="1875" b="1">
                 <a:solidFill>
                   <a:srgbClr val="59E2BD"/>
@@ -12149,6 +12635,7 @@
               </a:defRPr>
             </a:lvl6pPr>
             <a:lvl7pPr algn="ctr">
+              <a:buNone/>
               <a:defRPr sz="1875" b="1">
                 <a:solidFill>
                   <a:srgbClr val="59E2BD"/>
@@ -12159,6 +12646,7 @@
               </a:defRPr>
             </a:lvl7pPr>
             <a:lvl8pPr algn="ctr">
+              <a:buNone/>
               <a:defRPr sz="1875" b="1">
                 <a:solidFill>
                   <a:srgbClr val="59E2BD"/>
@@ -12169,6 +12657,7 @@
               </a:defRPr>
             </a:lvl8pPr>
             <a:lvl9pPr algn="ctr">
+              <a:buNone/>
               <a:defRPr sz="1875" b="1">
                 <a:solidFill>
                   <a:srgbClr val="59E2BD"/>
@@ -12181,6 +12670,7 @@
           </a:lstStyle>
           <a:p xmlns:a="http://schemas.openxmlformats.org/drawingml/2006/main">
             <a:pPr algn="ctr">
+              <a:buNone/>
               <a:defRPr sz="1875" b="1">
                 <a:solidFill>
                   <a:srgbClr val="59E2BD"/>
@@ -12204,6 +12694,7 @@
           </a:p>
           <a:p xmlns:a="http://schemas.openxmlformats.org/drawingml/2006/main">
             <a:pPr algn="ctr">
+              <a:buNone/>
               <a:defRPr sz="1875" b="1">
                 <a:solidFill>
                   <a:srgbClr val="59E2BD"/>
@@ -12270,6 +12761,7 @@
               </a:defRPr>
             </a:defPPr>
             <a:lvl1pPr algn="ctr">
+              <a:buNone/>
               <a:defRPr sz="1650" b="0">
                 <a:solidFill>
                   <a:srgbClr val="59E2BD"/>
@@ -12280,6 +12772,7 @@
               </a:defRPr>
             </a:lvl1pPr>
             <a:lvl2pPr algn="ctr">
+              <a:buNone/>
               <a:defRPr sz="1650" b="0">
                 <a:solidFill>
                   <a:srgbClr val="59E2BD"/>
@@ -12290,6 +12783,7 @@
               </a:defRPr>
             </a:lvl2pPr>
             <a:lvl3pPr algn="ctr">
+              <a:buNone/>
               <a:defRPr sz="1650" b="0">
                 <a:solidFill>
                   <a:srgbClr val="59E2BD"/>
@@ -12300,6 +12794,7 @@
               </a:defRPr>
             </a:lvl3pPr>
             <a:lvl4pPr algn="ctr">
+              <a:buNone/>
               <a:defRPr sz="1650" b="0">
                 <a:solidFill>
                   <a:srgbClr val="59E2BD"/>
@@ -12310,6 +12805,7 @@
               </a:defRPr>
             </a:lvl4pPr>
             <a:lvl5pPr algn="ctr">
+              <a:buNone/>
               <a:defRPr sz="1650" b="0">
                 <a:solidFill>
                   <a:srgbClr val="59E2BD"/>
@@ -12320,6 +12816,7 @@
               </a:defRPr>
             </a:lvl5pPr>
             <a:lvl6pPr algn="ctr">
+              <a:buNone/>
               <a:defRPr sz="1650" b="0">
                 <a:solidFill>
                   <a:srgbClr val="59E2BD"/>
@@ -12330,6 +12827,7 @@
               </a:defRPr>
             </a:lvl6pPr>
             <a:lvl7pPr algn="ctr">
+              <a:buNone/>
               <a:defRPr sz="1650" b="0">
                 <a:solidFill>
                   <a:srgbClr val="59E2BD"/>
@@ -12340,6 +12838,7 @@
               </a:defRPr>
             </a:lvl7pPr>
             <a:lvl8pPr algn="ctr">
+              <a:buNone/>
               <a:defRPr sz="1650" b="0">
                 <a:solidFill>
                   <a:srgbClr val="59E2BD"/>
@@ -12350,6 +12849,7 @@
               </a:defRPr>
             </a:lvl8pPr>
             <a:lvl9pPr algn="ctr">
+              <a:buNone/>
               <a:defRPr sz="1650" b="0">
                 <a:solidFill>
                   <a:srgbClr val="59E2BD"/>
@@ -12362,6 +12862,7 @@
           </a:lstStyle>
           <a:p xmlns:a="http://schemas.openxmlformats.org/drawingml/2006/main">
             <a:pPr algn="ctr">
+              <a:buNone/>
               <a:defRPr sz="1650" b="0">
                 <a:solidFill>
                   <a:srgbClr val="59E2BD"/>
@@ -12428,6 +12929,7 @@
               </a:defRPr>
             </a:defPPr>
             <a:lvl1pPr algn="l">
+              <a:buNone/>
               <a:defRPr sz="1950" b="0">
                 <a:solidFill>
                   <a:srgbClr val="B3C5DD"/>
@@ -12438,6 +12940,7 @@
               </a:defRPr>
             </a:lvl1pPr>
             <a:lvl2pPr algn="l">
+              <a:buNone/>
               <a:defRPr sz="1950" b="0">
                 <a:solidFill>
                   <a:srgbClr val="B3C5DD"/>
@@ -12448,6 +12951,7 @@
               </a:defRPr>
             </a:lvl2pPr>
             <a:lvl3pPr algn="l">
+              <a:buNone/>
               <a:defRPr sz="1950" b="0">
                 <a:solidFill>
                   <a:srgbClr val="B3C5DD"/>
@@ -12458,6 +12962,7 @@
               </a:defRPr>
             </a:lvl3pPr>
             <a:lvl4pPr algn="l">
+              <a:buNone/>
               <a:defRPr sz="1950" b="0">
                 <a:solidFill>
                   <a:srgbClr val="B3C5DD"/>
@@ -12468,6 +12973,7 @@
               </a:defRPr>
             </a:lvl4pPr>
             <a:lvl5pPr algn="l">
+              <a:buNone/>
               <a:defRPr sz="1950" b="0">
                 <a:solidFill>
                   <a:srgbClr val="B3C5DD"/>
@@ -12478,6 +12984,7 @@
               </a:defRPr>
             </a:lvl5pPr>
             <a:lvl6pPr algn="l">
+              <a:buNone/>
               <a:defRPr sz="1950" b="0">
                 <a:solidFill>
                   <a:srgbClr val="B3C5DD"/>
@@ -12488,6 +12995,7 @@
               </a:defRPr>
             </a:lvl6pPr>
             <a:lvl7pPr algn="l">
+              <a:buNone/>
               <a:defRPr sz="1950" b="0">
                 <a:solidFill>
                   <a:srgbClr val="B3C5DD"/>
@@ -12498,6 +13006,7 @@
               </a:defRPr>
             </a:lvl7pPr>
             <a:lvl8pPr algn="l">
+              <a:buNone/>
               <a:defRPr sz="1950" b="0">
                 <a:solidFill>
                   <a:srgbClr val="B3C5DD"/>
@@ -12508,6 +13017,7 @@
               </a:defRPr>
             </a:lvl8pPr>
             <a:lvl9pPr algn="l">
+              <a:buNone/>
               <a:defRPr sz="1950" b="0">
                 <a:solidFill>
                   <a:srgbClr val="B3C5DD"/>
@@ -12520,6 +13030,7 @@
           </a:lstStyle>
           <a:p xmlns:a="http://schemas.openxmlformats.org/drawingml/2006/main">
             <a:pPr algn="l">
+              <a:buNone/>
               <a:defRPr sz="1950" b="0">
                 <a:solidFill>
                   <a:srgbClr val="B3C5DD"/>
@@ -12543,6 +13054,7 @@
           </a:p>
           <a:p xmlns:a="http://schemas.openxmlformats.org/drawingml/2006/main">
             <a:pPr algn="l">
+              <a:buNone/>
               <a:defRPr sz="1950" b="0">
                 <a:solidFill>
                   <a:srgbClr val="B3C5DD"/>
@@ -12638,6 +13150,7 @@
               </a:defRPr>
             </a:defPPr>
             <a:lvl1pPr algn="l">
+              <a:buNone/>
               <a:defRPr sz="3300" b="1">
                 <a:solidFill>
                   <a:srgbClr val="F4F7FC"/>
@@ -12648,6 +13161,7 @@
               </a:defRPr>
             </a:lvl1pPr>
             <a:lvl2pPr algn="l">
+              <a:buNone/>
               <a:defRPr sz="3300" b="1">
                 <a:solidFill>
                   <a:srgbClr val="F4F7FC"/>
@@ -12658,6 +13172,7 @@
               </a:defRPr>
             </a:lvl2pPr>
             <a:lvl3pPr algn="l">
+              <a:buNone/>
               <a:defRPr sz="3300" b="1">
                 <a:solidFill>
                   <a:srgbClr val="F4F7FC"/>
@@ -12668,6 +13183,7 @@
               </a:defRPr>
             </a:lvl3pPr>
             <a:lvl4pPr algn="l">
+              <a:buNone/>
               <a:defRPr sz="3300" b="1">
                 <a:solidFill>
                   <a:srgbClr val="F4F7FC"/>
@@ -12678,6 +13194,7 @@
               </a:defRPr>
             </a:lvl4pPr>
             <a:lvl5pPr algn="l">
+              <a:buNone/>
               <a:defRPr sz="3300" b="1">
                 <a:solidFill>
                   <a:srgbClr val="F4F7FC"/>
@@ -12688,6 +13205,7 @@
               </a:defRPr>
             </a:lvl5pPr>
             <a:lvl6pPr algn="l">
+              <a:buNone/>
               <a:defRPr sz="3300" b="1">
                 <a:solidFill>
                   <a:srgbClr val="F4F7FC"/>
@@ -12698,6 +13216,7 @@
               </a:defRPr>
             </a:lvl6pPr>
             <a:lvl7pPr algn="l">
+              <a:buNone/>
               <a:defRPr sz="3300" b="1">
                 <a:solidFill>
                   <a:srgbClr val="F4F7FC"/>
@@ -12708,6 +13227,7 @@
               </a:defRPr>
             </a:lvl7pPr>
             <a:lvl8pPr algn="l">
+              <a:buNone/>
               <a:defRPr sz="3300" b="1">
                 <a:solidFill>
                   <a:srgbClr val="F4F7FC"/>
@@ -12718,6 +13238,7 @@
               </a:defRPr>
             </a:lvl8pPr>
             <a:lvl9pPr algn="l">
+              <a:buNone/>
               <a:defRPr sz="3300" b="1">
                 <a:solidFill>
                   <a:srgbClr val="F4F7FC"/>
@@ -12730,6 +13251,7 @@
           </a:lstStyle>
           <a:p xmlns:a="http://schemas.openxmlformats.org/drawingml/2006/main">
             <a:pPr algn="l">
+              <a:buNone/>
               <a:defRPr sz="3300" b="1">
                 <a:solidFill>
                   <a:srgbClr val="F4F7FC"/>
@@ -12796,6 +13318,7 @@
               </a:defRPr>
             </a:defPPr>
             <a:lvl1pPr algn="l">
+              <a:buNone/>
               <a:defRPr sz="1800" b="1">
                 <a:solidFill>
                   <a:srgbClr val="59E2BD"/>
@@ -12806,6 +13329,7 @@
               </a:defRPr>
             </a:lvl1pPr>
             <a:lvl2pPr algn="l">
+              <a:buNone/>
               <a:defRPr sz="1800" b="1">
                 <a:solidFill>
                   <a:srgbClr val="59E2BD"/>
@@ -12816,6 +13340,7 @@
               </a:defRPr>
             </a:lvl2pPr>
             <a:lvl3pPr algn="l">
+              <a:buNone/>
               <a:defRPr sz="1800" b="1">
                 <a:solidFill>
                   <a:srgbClr val="59E2BD"/>
@@ -12826,6 +13351,7 @@
               </a:defRPr>
             </a:lvl3pPr>
             <a:lvl4pPr algn="l">
+              <a:buNone/>
               <a:defRPr sz="1800" b="1">
                 <a:solidFill>
                   <a:srgbClr val="59E2BD"/>
@@ -12836,6 +13362,7 @@
               </a:defRPr>
             </a:lvl4pPr>
             <a:lvl5pPr algn="l">
+              <a:buNone/>
               <a:defRPr sz="1800" b="1">
                 <a:solidFill>
                   <a:srgbClr val="59E2BD"/>
@@ -12846,6 +13373,7 @@
               </a:defRPr>
             </a:lvl5pPr>
             <a:lvl6pPr algn="l">
+              <a:buNone/>
               <a:defRPr sz="1800" b="1">
                 <a:solidFill>
                   <a:srgbClr val="59E2BD"/>
@@ -12856,6 +13384,7 @@
               </a:defRPr>
             </a:lvl6pPr>
             <a:lvl7pPr algn="l">
+              <a:buNone/>
               <a:defRPr sz="1800" b="1">
                 <a:solidFill>
                   <a:srgbClr val="59E2BD"/>
@@ -12866,6 +13395,7 @@
               </a:defRPr>
             </a:lvl7pPr>
             <a:lvl8pPr algn="l">
+              <a:buNone/>
               <a:defRPr sz="1800" b="1">
                 <a:solidFill>
                   <a:srgbClr val="59E2BD"/>
@@ -12876,6 +13406,7 @@
               </a:defRPr>
             </a:lvl8pPr>
             <a:lvl9pPr algn="l">
+              <a:buNone/>
               <a:defRPr sz="1800" b="1">
                 <a:solidFill>
                   <a:srgbClr val="59E2BD"/>
@@ -12888,6 +13419,7 @@
           </a:lstStyle>
           <a:p xmlns:a="http://schemas.openxmlformats.org/drawingml/2006/main">
             <a:pPr algn="l">
+              <a:buNone/>
               <a:defRPr sz="1800" b="1">
                 <a:solidFill>
                   <a:srgbClr val="59E2BD"/>
@@ -12954,6 +13486,7 @@
               </a:defRPr>
             </a:defPPr>
             <a:lvl1pPr algn="l">
+              <a:buNone/>
               <a:defRPr sz="1800" b="1">
                 <a:solidFill>
                   <a:srgbClr val="59E2BD"/>
@@ -12964,6 +13497,7 @@
               </a:defRPr>
             </a:lvl1pPr>
             <a:lvl2pPr algn="l">
+              <a:buNone/>
               <a:defRPr sz="1800" b="1">
                 <a:solidFill>
                   <a:srgbClr val="59E2BD"/>
@@ -12974,6 +13508,7 @@
               </a:defRPr>
             </a:lvl2pPr>
             <a:lvl3pPr algn="l">
+              <a:buNone/>
               <a:defRPr sz="1800" b="1">
                 <a:solidFill>
                   <a:srgbClr val="59E2BD"/>
@@ -12984,6 +13519,7 @@
               </a:defRPr>
             </a:lvl3pPr>
             <a:lvl4pPr algn="l">
+              <a:buNone/>
               <a:defRPr sz="1800" b="1">
                 <a:solidFill>
                   <a:srgbClr val="59E2BD"/>
@@ -12994,6 +13530,7 @@
               </a:defRPr>
             </a:lvl4pPr>
             <a:lvl5pPr algn="l">
+              <a:buNone/>
               <a:defRPr sz="1800" b="1">
                 <a:solidFill>
                   <a:srgbClr val="59E2BD"/>
@@ -13004,6 +13541,7 @@
               </a:defRPr>
             </a:lvl5pPr>
             <a:lvl6pPr algn="l">
+              <a:buNone/>
               <a:defRPr sz="1800" b="1">
                 <a:solidFill>
                   <a:srgbClr val="59E2BD"/>
@@ -13014,6 +13552,7 @@
               </a:defRPr>
             </a:lvl6pPr>
             <a:lvl7pPr algn="l">
+              <a:buNone/>
               <a:defRPr sz="1800" b="1">
                 <a:solidFill>
                   <a:srgbClr val="59E2BD"/>
@@ -13024,6 +13563,7 @@
               </a:defRPr>
             </a:lvl7pPr>
             <a:lvl8pPr algn="l">
+              <a:buNone/>
               <a:defRPr sz="1800" b="1">
                 <a:solidFill>
                   <a:srgbClr val="59E2BD"/>
@@ -13034,6 +13574,7 @@
               </a:defRPr>
             </a:lvl8pPr>
             <a:lvl9pPr algn="l">
+              <a:buNone/>
               <a:defRPr sz="1800" b="1">
                 <a:solidFill>
                   <a:srgbClr val="59E2BD"/>
@@ -13046,6 +13587,7 @@
           </a:lstStyle>
           <a:p xmlns:a="http://schemas.openxmlformats.org/drawingml/2006/main">
             <a:pPr algn="l">
+              <a:buNone/>
               <a:defRPr sz="1800" b="1">
                 <a:solidFill>
                   <a:srgbClr val="59E2BD"/>
@@ -13112,6 +13654,7 @@
               </a:defRPr>
             </a:defPPr>
             <a:lvl1pPr algn="l">
+              <a:buNone/>
               <a:defRPr sz="1875" b="0">
                 <a:solidFill>
                   <a:srgbClr val="F4F7FC"/>
@@ -13122,6 +13665,7 @@
               </a:defRPr>
             </a:lvl1pPr>
             <a:lvl2pPr algn="l">
+              <a:buNone/>
               <a:defRPr sz="1875" b="0">
                 <a:solidFill>
                   <a:srgbClr val="F4F7FC"/>
@@ -13132,6 +13676,7 @@
               </a:defRPr>
             </a:lvl2pPr>
             <a:lvl3pPr algn="l">
+              <a:buNone/>
               <a:defRPr sz="1875" b="0">
                 <a:solidFill>
                   <a:srgbClr val="F4F7FC"/>
@@ -13142,6 +13687,7 @@
               </a:defRPr>
             </a:lvl3pPr>
             <a:lvl4pPr algn="l">
+              <a:buNone/>
               <a:defRPr sz="1875" b="0">
                 <a:solidFill>
                   <a:srgbClr val="F4F7FC"/>
@@ -13152,6 +13698,7 @@
               </a:defRPr>
             </a:lvl4pPr>
             <a:lvl5pPr algn="l">
+              <a:buNone/>
               <a:defRPr sz="1875" b="0">
                 <a:solidFill>
                   <a:srgbClr val="F4F7FC"/>
@@ -13162,6 +13709,7 @@
               </a:defRPr>
             </a:lvl5pPr>
             <a:lvl6pPr algn="l">
+              <a:buNone/>
               <a:defRPr sz="1875" b="0">
                 <a:solidFill>
                   <a:srgbClr val="F4F7FC"/>
@@ -13172,6 +13720,7 @@
               </a:defRPr>
             </a:lvl6pPr>
             <a:lvl7pPr algn="l">
+              <a:buNone/>
               <a:defRPr sz="1875" b="0">
                 <a:solidFill>
                   <a:srgbClr val="F4F7FC"/>
@@ -13182,6 +13731,7 @@
               </a:defRPr>
             </a:lvl7pPr>
             <a:lvl8pPr algn="l">
+              <a:buNone/>
               <a:defRPr sz="1875" b="0">
                 <a:solidFill>
                   <a:srgbClr val="F4F7FC"/>
@@ -13192,6 +13742,7 @@
               </a:defRPr>
             </a:lvl8pPr>
             <a:lvl9pPr algn="l">
+              <a:buNone/>
               <a:defRPr sz="1875" b="0">
                 <a:solidFill>
                   <a:srgbClr val="F4F7FC"/>
@@ -13204,6 +13755,7 @@
           </a:lstStyle>
           <a:p xmlns:a="http://schemas.openxmlformats.org/drawingml/2006/main">
             <a:pPr algn="l">
+              <a:buNone/>
               <a:defRPr sz="1875" b="0">
                 <a:solidFill>
                   <a:srgbClr val="F4F7FC"/>
@@ -13227,6 +13779,7 @@
           </a:p>
           <a:p xmlns:a="http://schemas.openxmlformats.org/drawingml/2006/main">
             <a:pPr algn="l">
+              <a:buNone/>
               <a:defRPr sz="1875" b="0">
                 <a:solidFill>
                   <a:srgbClr val="F4F7FC"/>
@@ -13293,6 +13846,7 @@
               </a:defRPr>
             </a:defPPr>
             <a:lvl1pPr algn="l">
+              <a:buNone/>
               <a:defRPr sz="1800" b="1">
                 <a:solidFill>
                   <a:srgbClr val="59E2BD"/>
@@ -13303,6 +13857,7 @@
               </a:defRPr>
             </a:lvl1pPr>
             <a:lvl2pPr algn="l">
+              <a:buNone/>
               <a:defRPr sz="1800" b="1">
                 <a:solidFill>
                   <a:srgbClr val="59E2BD"/>
@@ -13313,6 +13868,7 @@
               </a:defRPr>
             </a:lvl2pPr>
             <a:lvl3pPr algn="l">
+              <a:buNone/>
               <a:defRPr sz="1800" b="1">
                 <a:solidFill>
                   <a:srgbClr val="59E2BD"/>
@@ -13323,6 +13879,7 @@
               </a:defRPr>
             </a:lvl3pPr>
             <a:lvl4pPr algn="l">
+              <a:buNone/>
               <a:defRPr sz="1800" b="1">
                 <a:solidFill>
                   <a:srgbClr val="59E2BD"/>
@@ -13333,6 +13890,7 @@
               </a:defRPr>
             </a:lvl4pPr>
             <a:lvl5pPr algn="l">
+              <a:buNone/>
               <a:defRPr sz="1800" b="1">
                 <a:solidFill>
                   <a:srgbClr val="59E2BD"/>
@@ -13343,6 +13901,7 @@
               </a:defRPr>
             </a:lvl5pPr>
             <a:lvl6pPr algn="l">
+              <a:buNone/>
               <a:defRPr sz="1800" b="1">
                 <a:solidFill>
                   <a:srgbClr val="59E2BD"/>
@@ -13353,6 +13912,7 @@
               </a:defRPr>
             </a:lvl6pPr>
             <a:lvl7pPr algn="l">
+              <a:buNone/>
               <a:defRPr sz="1800" b="1">
                 <a:solidFill>
                   <a:srgbClr val="59E2BD"/>
@@ -13363,6 +13923,7 @@
               </a:defRPr>
             </a:lvl7pPr>
             <a:lvl8pPr algn="l">
+              <a:buNone/>
               <a:defRPr sz="1800" b="1">
                 <a:solidFill>
                   <a:srgbClr val="59E2BD"/>
@@ -13373,6 +13934,7 @@
               </a:defRPr>
             </a:lvl8pPr>
             <a:lvl9pPr algn="l">
+              <a:buNone/>
               <a:defRPr sz="1800" b="1">
                 <a:solidFill>
                   <a:srgbClr val="59E2BD"/>
@@ -13385,6 +13947,7 @@
           </a:lstStyle>
           <a:p xmlns:a="http://schemas.openxmlformats.org/drawingml/2006/main">
             <a:pPr algn="l">
+              <a:buNone/>
               <a:defRPr sz="1800" b="1">
                 <a:solidFill>
                   <a:srgbClr val="59E2BD"/>
@@ -13451,6 +14014,7 @@
               </a:defRPr>
             </a:defPPr>
             <a:lvl1pPr algn="l">
+              <a:buNone/>
               <a:defRPr sz="1875" b="0">
                 <a:solidFill>
                   <a:srgbClr val="F4F7FC"/>
@@ -13461,6 +14025,7 @@
               </a:defRPr>
             </a:lvl1pPr>
             <a:lvl2pPr algn="l">
+              <a:buNone/>
               <a:defRPr sz="1875" b="0">
                 <a:solidFill>
                   <a:srgbClr val="F4F7FC"/>
@@ -13471,6 +14036,7 @@
               </a:defRPr>
             </a:lvl2pPr>
             <a:lvl3pPr algn="l">
+              <a:buNone/>
               <a:defRPr sz="1875" b="0">
                 <a:solidFill>
                   <a:srgbClr val="F4F7FC"/>
@@ -13481,6 +14047,7 @@
               </a:defRPr>
             </a:lvl3pPr>
             <a:lvl4pPr algn="l">
+              <a:buNone/>
               <a:defRPr sz="1875" b="0">
                 <a:solidFill>
                   <a:srgbClr val="F4F7FC"/>
@@ -13491,6 +14058,7 @@
               </a:defRPr>
             </a:lvl4pPr>
             <a:lvl5pPr algn="l">
+              <a:buNone/>
               <a:defRPr sz="1875" b="0">
                 <a:solidFill>
                   <a:srgbClr val="F4F7FC"/>
@@ -13501,6 +14069,7 @@
               </a:defRPr>
             </a:lvl5pPr>
             <a:lvl6pPr algn="l">
+              <a:buNone/>
               <a:defRPr sz="1875" b="0">
                 <a:solidFill>
                   <a:srgbClr val="F4F7FC"/>
@@ -13511,6 +14080,7 @@
               </a:defRPr>
             </a:lvl6pPr>
             <a:lvl7pPr algn="l">
+              <a:buNone/>
               <a:defRPr sz="1875" b="0">
                 <a:solidFill>
                   <a:srgbClr val="F4F7FC"/>
@@ -13521,6 +14091,7 @@
               </a:defRPr>
             </a:lvl7pPr>
             <a:lvl8pPr algn="l">
+              <a:buNone/>
               <a:defRPr sz="1875" b="0">
                 <a:solidFill>
                   <a:srgbClr val="F4F7FC"/>
@@ -13531,6 +14102,7 @@
               </a:defRPr>
             </a:lvl8pPr>
             <a:lvl9pPr algn="l">
+              <a:buNone/>
               <a:defRPr sz="1875" b="0">
                 <a:solidFill>
                   <a:srgbClr val="F4F7FC"/>
@@ -13543,6 +14115,7 @@
           </a:lstStyle>
           <a:p xmlns:a="http://schemas.openxmlformats.org/drawingml/2006/main">
             <a:pPr algn="l">
+              <a:buNone/>
               <a:defRPr sz="1875" b="0">
                 <a:solidFill>
                   <a:srgbClr val="F4F7FC"/>
@@ -13566,6 +14139,7 @@
           </a:p>
           <a:p xmlns:a="http://schemas.openxmlformats.org/drawingml/2006/main">
             <a:pPr algn="l">
+              <a:buNone/>
               <a:defRPr sz="1875" b="0">
                 <a:solidFill>
                   <a:srgbClr val="F4F7FC"/>
@@ -13632,6 +14206,7 @@
               </a:defRPr>
             </a:defPPr>
             <a:lvl1pPr algn="l">
+              <a:buNone/>
               <a:defRPr sz="1800" b="1">
                 <a:solidFill>
                   <a:srgbClr val="59E2BD"/>
@@ -13642,6 +14217,7 @@
               </a:defRPr>
             </a:lvl1pPr>
             <a:lvl2pPr algn="l">
+              <a:buNone/>
               <a:defRPr sz="1800" b="1">
                 <a:solidFill>
                   <a:srgbClr val="59E2BD"/>
@@ -13652,6 +14228,7 @@
               </a:defRPr>
             </a:lvl2pPr>
             <a:lvl3pPr algn="l">
+              <a:buNone/>
               <a:defRPr sz="1800" b="1">
                 <a:solidFill>
                   <a:srgbClr val="59E2BD"/>
@@ -13662,6 +14239,7 @@
               </a:defRPr>
             </a:lvl3pPr>
             <a:lvl4pPr algn="l">
+              <a:buNone/>
               <a:defRPr sz="1800" b="1">
                 <a:solidFill>
                   <a:srgbClr val="59E2BD"/>
@@ -13672,6 +14250,7 @@
               </a:defRPr>
             </a:lvl4pPr>
             <a:lvl5pPr algn="l">
+              <a:buNone/>
               <a:defRPr sz="1800" b="1">
                 <a:solidFill>
                   <a:srgbClr val="59E2BD"/>
@@ -13682,6 +14261,7 @@
               </a:defRPr>
             </a:lvl5pPr>
             <a:lvl6pPr algn="l">
+              <a:buNone/>
               <a:defRPr sz="1800" b="1">
                 <a:solidFill>
                   <a:srgbClr val="59E2BD"/>
@@ -13692,6 +14272,7 @@
               </a:defRPr>
             </a:lvl6pPr>
             <a:lvl7pPr algn="l">
+              <a:buNone/>
               <a:defRPr sz="1800" b="1">
                 <a:solidFill>
                   <a:srgbClr val="59E2BD"/>
@@ -13702,6 +14283,7 @@
               </a:defRPr>
             </a:lvl7pPr>
             <a:lvl8pPr algn="l">
+              <a:buNone/>
               <a:defRPr sz="1800" b="1">
                 <a:solidFill>
                   <a:srgbClr val="59E2BD"/>
@@ -13712,6 +14294,7 @@
               </a:defRPr>
             </a:lvl8pPr>
             <a:lvl9pPr algn="l">
+              <a:buNone/>
               <a:defRPr sz="1800" b="1">
                 <a:solidFill>
                   <a:srgbClr val="59E2BD"/>
@@ -13724,6 +14307,7 @@
           </a:lstStyle>
           <a:p xmlns:a="http://schemas.openxmlformats.org/drawingml/2006/main">
             <a:pPr algn="l">
+              <a:buNone/>
               <a:defRPr sz="1800" b="1">
                 <a:solidFill>
                   <a:srgbClr val="59E2BD"/>
@@ -13790,6 +14374,7 @@
               </a:defRPr>
             </a:defPPr>
             <a:lvl1pPr algn="l">
+              <a:buNone/>
               <a:defRPr sz="1875" b="0">
                 <a:solidFill>
                   <a:srgbClr val="F4F7FC"/>
@@ -13800,6 +14385,7 @@
               </a:defRPr>
             </a:lvl1pPr>
             <a:lvl2pPr algn="l">
+              <a:buNone/>
               <a:defRPr sz="1875" b="0">
                 <a:solidFill>
                   <a:srgbClr val="F4F7FC"/>
@@ -13810,6 +14396,7 @@
               </a:defRPr>
             </a:lvl2pPr>
             <a:lvl3pPr algn="l">
+              <a:buNone/>
               <a:defRPr sz="1875" b="0">
                 <a:solidFill>
                   <a:srgbClr val="F4F7FC"/>
@@ -13820,6 +14407,7 @@
               </a:defRPr>
             </a:lvl3pPr>
             <a:lvl4pPr algn="l">
+              <a:buNone/>
               <a:defRPr sz="1875" b="0">
                 <a:solidFill>
                   <a:srgbClr val="F4F7FC"/>
@@ -13830,6 +14418,7 @@
               </a:defRPr>
             </a:lvl4pPr>
             <a:lvl5pPr algn="l">
+              <a:buNone/>
               <a:defRPr sz="1875" b="0">
                 <a:solidFill>
                   <a:srgbClr val="F4F7FC"/>
@@ -13840,6 +14429,7 @@
               </a:defRPr>
             </a:lvl5pPr>
             <a:lvl6pPr algn="l">
+              <a:buNone/>
               <a:defRPr sz="1875" b="0">
                 <a:solidFill>
                   <a:srgbClr val="F4F7FC"/>
@@ -13850,6 +14440,7 @@
               </a:defRPr>
             </a:lvl6pPr>
             <a:lvl7pPr algn="l">
+              <a:buNone/>
               <a:defRPr sz="1875" b="0">
                 <a:solidFill>
                   <a:srgbClr val="F4F7FC"/>
@@ -13860,6 +14451,7 @@
               </a:defRPr>
             </a:lvl7pPr>
             <a:lvl8pPr algn="l">
+              <a:buNone/>
               <a:defRPr sz="1875" b="0">
                 <a:solidFill>
                   <a:srgbClr val="F4F7FC"/>
@@ -13870,6 +14462,7 @@
               </a:defRPr>
             </a:lvl8pPr>
             <a:lvl9pPr algn="l">
+              <a:buNone/>
               <a:defRPr sz="1875" b="0">
                 <a:solidFill>
                   <a:srgbClr val="F4F7FC"/>
@@ -13882,6 +14475,7 @@
           </a:lstStyle>
           <a:p xmlns:a="http://schemas.openxmlformats.org/drawingml/2006/main">
             <a:pPr algn="l">
+              <a:buNone/>
               <a:defRPr sz="1875" b="0">
                 <a:solidFill>
                   <a:srgbClr val="F4F7FC"/>
@@ -13948,6 +14542,7 @@
               </a:defRPr>
             </a:defPPr>
             <a:lvl1pPr algn="l">
+              <a:buNone/>
               <a:defRPr sz="1800" b="1">
                 <a:solidFill>
                   <a:srgbClr val="59E2BD"/>
@@ -13958,6 +14553,7 @@
               </a:defRPr>
             </a:lvl1pPr>
             <a:lvl2pPr algn="l">
+              <a:buNone/>
               <a:defRPr sz="1800" b="1">
                 <a:solidFill>
                   <a:srgbClr val="59E2BD"/>
@@ -13968,6 +14564,7 @@
               </a:defRPr>
             </a:lvl2pPr>
             <a:lvl3pPr algn="l">
+              <a:buNone/>
               <a:defRPr sz="1800" b="1">
                 <a:solidFill>
                   <a:srgbClr val="59E2BD"/>
@@ -13978,6 +14575,7 @@
               </a:defRPr>
             </a:lvl3pPr>
             <a:lvl4pPr algn="l">
+              <a:buNone/>
               <a:defRPr sz="1800" b="1">
                 <a:solidFill>
                   <a:srgbClr val="59E2BD"/>
@@ -13988,6 +14586,7 @@
               </a:defRPr>
             </a:lvl4pPr>
             <a:lvl5pPr algn="l">
+              <a:buNone/>
               <a:defRPr sz="1800" b="1">
                 <a:solidFill>
                   <a:srgbClr val="59E2BD"/>
@@ -13998,6 +14597,7 @@
               </a:defRPr>
             </a:lvl5pPr>
             <a:lvl6pPr algn="l">
+              <a:buNone/>
               <a:defRPr sz="1800" b="1">
                 <a:solidFill>
                   <a:srgbClr val="59E2BD"/>
@@ -14008,6 +14608,7 @@
               </a:defRPr>
             </a:lvl6pPr>
             <a:lvl7pPr algn="l">
+              <a:buNone/>
               <a:defRPr sz="1800" b="1">
                 <a:solidFill>
                   <a:srgbClr val="59E2BD"/>
@@ -14018,6 +14619,7 @@
               </a:defRPr>
             </a:lvl7pPr>
             <a:lvl8pPr algn="l">
+              <a:buNone/>
               <a:defRPr sz="1800" b="1">
                 <a:solidFill>
                   <a:srgbClr val="59E2BD"/>
@@ -14028,6 +14630,7 @@
               </a:defRPr>
             </a:lvl8pPr>
             <a:lvl9pPr algn="l">
+              <a:buNone/>
               <a:defRPr sz="1800" b="1">
                 <a:solidFill>
                   <a:srgbClr val="59E2BD"/>
@@ -14040,6 +14643,7 @@
           </a:lstStyle>
           <a:p xmlns:a="http://schemas.openxmlformats.org/drawingml/2006/main">
             <a:pPr algn="l">
+              <a:buNone/>
               <a:defRPr sz="1800" b="1">
                 <a:solidFill>
                   <a:srgbClr val="59E2BD"/>
@@ -14106,6 +14710,7 @@
               </a:defRPr>
             </a:defPPr>
             <a:lvl1pPr algn="l">
+              <a:buNone/>
               <a:defRPr sz="1875" b="0">
                 <a:solidFill>
                   <a:srgbClr val="F4F7FC"/>
@@ -14116,6 +14721,7 @@
               </a:defRPr>
             </a:lvl1pPr>
             <a:lvl2pPr algn="l">
+              <a:buNone/>
               <a:defRPr sz="1875" b="0">
                 <a:solidFill>
                   <a:srgbClr val="F4F7FC"/>
@@ -14126,6 +14732,7 @@
               </a:defRPr>
             </a:lvl2pPr>
             <a:lvl3pPr algn="l">
+              <a:buNone/>
               <a:defRPr sz="1875" b="0">
                 <a:solidFill>
                   <a:srgbClr val="F4F7FC"/>
@@ -14136,6 +14743,7 @@
               </a:defRPr>
             </a:lvl3pPr>
             <a:lvl4pPr algn="l">
+              <a:buNone/>
               <a:defRPr sz="1875" b="0">
                 <a:solidFill>
                   <a:srgbClr val="F4F7FC"/>
@@ -14146,6 +14754,7 @@
               </a:defRPr>
             </a:lvl4pPr>
             <a:lvl5pPr algn="l">
+              <a:buNone/>
               <a:defRPr sz="1875" b="0">
                 <a:solidFill>
                   <a:srgbClr val="F4F7FC"/>
@@ -14156,6 +14765,7 @@
               </a:defRPr>
             </a:lvl5pPr>
             <a:lvl6pPr algn="l">
+              <a:buNone/>
               <a:defRPr sz="1875" b="0">
                 <a:solidFill>
                   <a:srgbClr val="F4F7FC"/>
@@ -14166,6 +14776,7 @@
               </a:defRPr>
             </a:lvl6pPr>
             <a:lvl7pPr algn="l">
+              <a:buNone/>
               <a:defRPr sz="1875" b="0">
                 <a:solidFill>
                   <a:srgbClr val="F4F7FC"/>
@@ -14176,6 +14787,7 @@
               </a:defRPr>
             </a:lvl7pPr>
             <a:lvl8pPr algn="l">
+              <a:buNone/>
               <a:defRPr sz="1875" b="0">
                 <a:solidFill>
                   <a:srgbClr val="F4F7FC"/>
@@ -14186,6 +14798,7 @@
               </a:defRPr>
             </a:lvl8pPr>
             <a:lvl9pPr algn="l">
+              <a:buNone/>
               <a:defRPr sz="1875" b="0">
                 <a:solidFill>
                   <a:srgbClr val="F4F7FC"/>
@@ -14198,6 +14811,7 @@
           </a:lstStyle>
           <a:p xmlns:a="http://schemas.openxmlformats.org/drawingml/2006/main">
             <a:pPr algn="l">
+              <a:buNone/>
               <a:defRPr sz="1875" b="0">
                 <a:solidFill>
                   <a:srgbClr val="F4F7FC"/>
@@ -14221,6 +14835,7 @@
           </a:p>
           <a:p xmlns:a="http://schemas.openxmlformats.org/drawingml/2006/main">
             <a:pPr algn="l">
+              <a:buNone/>
               <a:defRPr sz="1875" b="0">
                 <a:solidFill>
                   <a:srgbClr val="F4F7FC"/>
@@ -14287,6 +14902,7 @@
               </a:defRPr>
             </a:defPPr>
             <a:lvl1pPr algn="l">
+              <a:buNone/>
               <a:defRPr sz="1800" b="1">
                 <a:solidFill>
                   <a:srgbClr val="59E2BD"/>
@@ -14297,6 +14913,7 @@
               </a:defRPr>
             </a:lvl1pPr>
             <a:lvl2pPr algn="l">
+              <a:buNone/>
               <a:defRPr sz="1800" b="1">
                 <a:solidFill>
                   <a:srgbClr val="59E2BD"/>
@@ -14307,6 +14924,7 @@
               </a:defRPr>
             </a:lvl2pPr>
             <a:lvl3pPr algn="l">
+              <a:buNone/>
               <a:defRPr sz="1800" b="1">
                 <a:solidFill>
                   <a:srgbClr val="59E2BD"/>
@@ -14317,6 +14935,7 @@
               </a:defRPr>
             </a:lvl3pPr>
             <a:lvl4pPr algn="l">
+              <a:buNone/>
               <a:defRPr sz="1800" b="1">
                 <a:solidFill>
                   <a:srgbClr val="59E2BD"/>
@@ -14327,6 +14946,7 @@
               </a:defRPr>
             </a:lvl4pPr>
             <a:lvl5pPr algn="l">
+              <a:buNone/>
               <a:defRPr sz="1800" b="1">
                 <a:solidFill>
                   <a:srgbClr val="59E2BD"/>
@@ -14337,6 +14957,7 @@
               </a:defRPr>
             </a:lvl5pPr>
             <a:lvl6pPr algn="l">
+              <a:buNone/>
               <a:defRPr sz="1800" b="1">
                 <a:solidFill>
                   <a:srgbClr val="59E2BD"/>
@@ -14347,6 +14968,7 @@
               </a:defRPr>
             </a:lvl6pPr>
             <a:lvl7pPr algn="l">
+              <a:buNone/>
               <a:defRPr sz="1800" b="1">
                 <a:solidFill>
                   <a:srgbClr val="59E2BD"/>
@@ -14357,6 +14979,7 @@
               </a:defRPr>
             </a:lvl7pPr>
             <a:lvl8pPr algn="l">
+              <a:buNone/>
               <a:defRPr sz="1800" b="1">
                 <a:solidFill>
                   <a:srgbClr val="59E2BD"/>
@@ -14367,6 +14990,7 @@
               </a:defRPr>
             </a:lvl8pPr>
             <a:lvl9pPr algn="l">
+              <a:buNone/>
               <a:defRPr sz="1800" b="1">
                 <a:solidFill>
                   <a:srgbClr val="59E2BD"/>
@@ -14379,6 +15003,7 @@
           </a:lstStyle>
           <a:p xmlns:a="http://schemas.openxmlformats.org/drawingml/2006/main">
             <a:pPr algn="l">
+              <a:buNone/>
               <a:defRPr sz="1800" b="1">
                 <a:solidFill>
                   <a:srgbClr val="59E2BD"/>
@@ -14445,6 +15070,7 @@
               </a:defRPr>
             </a:defPPr>
             <a:lvl1pPr algn="l">
+              <a:buNone/>
               <a:defRPr sz="1875" b="0">
                 <a:solidFill>
                   <a:srgbClr val="F4F7FC"/>
@@ -14455,6 +15081,7 @@
               </a:defRPr>
             </a:lvl1pPr>
             <a:lvl2pPr algn="l">
+              <a:buNone/>
               <a:defRPr sz="1875" b="0">
                 <a:solidFill>
                   <a:srgbClr val="F4F7FC"/>
@@ -14465,6 +15092,7 @@
               </a:defRPr>
             </a:lvl2pPr>
             <a:lvl3pPr algn="l">
+              <a:buNone/>
               <a:defRPr sz="1875" b="0">
                 <a:solidFill>
                   <a:srgbClr val="F4F7FC"/>
@@ -14475,6 +15103,7 @@
               </a:defRPr>
             </a:lvl3pPr>
             <a:lvl4pPr algn="l">
+              <a:buNone/>
               <a:defRPr sz="1875" b="0">
                 <a:solidFill>
                   <a:srgbClr val="F4F7FC"/>
@@ -14485,6 +15114,7 @@
               </a:defRPr>
             </a:lvl4pPr>
             <a:lvl5pPr algn="l">
+              <a:buNone/>
               <a:defRPr sz="1875" b="0">
                 <a:solidFill>
                   <a:srgbClr val="F4F7FC"/>
@@ -14495,6 +15125,7 @@
               </a:defRPr>
             </a:lvl5pPr>
             <a:lvl6pPr algn="l">
+              <a:buNone/>
               <a:defRPr sz="1875" b="0">
                 <a:solidFill>
                   <a:srgbClr val="F4F7FC"/>
@@ -14505,6 +15136,7 @@
               </a:defRPr>
             </a:lvl6pPr>
             <a:lvl7pPr algn="l">
+              <a:buNone/>
               <a:defRPr sz="1875" b="0">
                 <a:solidFill>
                   <a:srgbClr val="F4F7FC"/>
@@ -14515,6 +15147,7 @@
               </a:defRPr>
             </a:lvl7pPr>
             <a:lvl8pPr algn="l">
+              <a:buNone/>
               <a:defRPr sz="1875" b="0">
                 <a:solidFill>
                   <a:srgbClr val="F4F7FC"/>
@@ -14525,6 +15158,7 @@
               </a:defRPr>
             </a:lvl8pPr>
             <a:lvl9pPr algn="l">
+              <a:buNone/>
               <a:defRPr sz="1875" b="0">
                 <a:solidFill>
                   <a:srgbClr val="F4F7FC"/>
@@ -14537,6 +15171,7 @@
           </a:lstStyle>
           <a:p xmlns:a="http://schemas.openxmlformats.org/drawingml/2006/main">
             <a:pPr algn="l">
+              <a:buNone/>
               <a:defRPr sz="1875" b="0">
                 <a:solidFill>
                   <a:srgbClr val="F4F7FC"/>
@@ -14560,6 +15195,7 @@
           </a:p>
           <a:p xmlns:a="http://schemas.openxmlformats.org/drawingml/2006/main">
             <a:pPr algn="l">
+              <a:buNone/>
               <a:defRPr sz="1875" b="0">
                 <a:solidFill>
                   <a:srgbClr val="F4F7FC"/>
@@ -14626,6 +15262,7 @@
               </a:defRPr>
             </a:defPPr>
             <a:lvl1pPr algn="l">
+              <a:buNone/>
               <a:defRPr sz="1575" b="0">
                 <a:solidFill>
                   <a:srgbClr val="B3C5DD"/>
@@ -14636,6 +15273,7 @@
               </a:defRPr>
             </a:lvl1pPr>
             <a:lvl2pPr algn="l">
+              <a:buNone/>
               <a:defRPr sz="1575" b="0">
                 <a:solidFill>
                   <a:srgbClr val="B3C5DD"/>
@@ -14646,6 +15284,7 @@
               </a:defRPr>
             </a:lvl2pPr>
             <a:lvl3pPr algn="l">
+              <a:buNone/>
               <a:defRPr sz="1575" b="0">
                 <a:solidFill>
                   <a:srgbClr val="B3C5DD"/>
@@ -14656,6 +15295,7 @@
               </a:defRPr>
             </a:lvl3pPr>
             <a:lvl4pPr algn="l">
+              <a:buNone/>
               <a:defRPr sz="1575" b="0">
                 <a:solidFill>
                   <a:srgbClr val="B3C5DD"/>
@@ -14666,6 +15306,7 @@
               </a:defRPr>
             </a:lvl4pPr>
             <a:lvl5pPr algn="l">
+              <a:buNone/>
               <a:defRPr sz="1575" b="0">
                 <a:solidFill>
                   <a:srgbClr val="B3C5DD"/>
@@ -14676,6 +15317,7 @@
               </a:defRPr>
             </a:lvl5pPr>
             <a:lvl6pPr algn="l">
+              <a:buNone/>
               <a:defRPr sz="1575" b="0">
                 <a:solidFill>
                   <a:srgbClr val="B3C5DD"/>
@@ -14686,6 +15328,7 @@
               </a:defRPr>
             </a:lvl6pPr>
             <a:lvl7pPr algn="l">
+              <a:buNone/>
               <a:defRPr sz="1575" b="0">
                 <a:solidFill>
                   <a:srgbClr val="B3C5DD"/>
@@ -14696,6 +15339,7 @@
               </a:defRPr>
             </a:lvl7pPr>
             <a:lvl8pPr algn="l">
+              <a:buNone/>
               <a:defRPr sz="1575" b="0">
                 <a:solidFill>
                   <a:srgbClr val="B3C5DD"/>
@@ -14706,6 +15350,7 @@
               </a:defRPr>
             </a:lvl8pPr>
             <a:lvl9pPr algn="l">
+              <a:buNone/>
               <a:defRPr sz="1575" b="0">
                 <a:solidFill>
                   <a:srgbClr val="B3C5DD"/>
@@ -14718,6 +15363,7 @@
           </a:lstStyle>
           <a:p xmlns:a="http://schemas.openxmlformats.org/drawingml/2006/main">
             <a:pPr algn="l">
+              <a:buNone/>
               <a:defRPr sz="1575" b="0">
                 <a:solidFill>
                   <a:srgbClr val="B3C5DD"/>
@@ -14752,6 +15398,63 @@
 </file>
 
 <file path=ppt/slides/slide7.xml><?xml version="1.0" encoding="utf-8"?>
+<p:sld xmlns:p="http://schemas.openxmlformats.org/presentationml/2006/main">
+  <p:cSld>
+    <p:bg>
+      <p:bgPr>
+        <a:solidFill xmlns:a="http://schemas.openxmlformats.org/drawingml/2006/main">
+          <a:srgbClr val="181818"/>
+        </a:solidFill>
+      </p:bgPr>
+    </p:bg>
+    <p:spTree>
+      <p:nvGrpSpPr>
+        <p:cNvPr id="1" name=""/>
+        <p:cNvGrpSpPr/>
+        <p:nvPr/>
+      </p:nvGrpSpPr>
+      <p:grpSpPr>
+        <a:xfrm xmlns:a="http://schemas.openxmlformats.org/drawingml/2006/main"/>
+      </p:grpSpPr>
+      <p:pic>
+        <p:nvPicPr>
+          <p:cNvPr id="2" name="">
+            <a:extLst xmlns:a="http://schemas.openxmlformats.org/drawingml/2006/main">
+              <a:ext uri="{FF2B5EF4-FFF2-40B4-BE49-F238E27FC236}">
+                <a16:creationId xmlns:a16="http://schemas.microsoft.com/office/drawing/2014/main" id="{0D03F43A-0282-4851-A934-24FC515E1B95}"/>
+              </a:ext>
+            </a:extLst>
+          </p:cNvPr>
+          <p:cNvPicPr>
+            <a:picLocks xmlns:a="http://schemas.openxmlformats.org/drawingml/2006/main" noChangeAspect="1"/>
+          </p:cNvPicPr>
+          <p:nvPr/>
+        </p:nvPicPr>
+        <p:blipFill>
+          <a:blip xmlns:r="http://schemas.openxmlformats.org/officeDocument/2006/relationships" xmlns:a="http://schemas.openxmlformats.org/drawingml/2006/main" r:embed="R6bad1cf368d54947"/>
+          <a:stretch xmlns:a="http://schemas.openxmlformats.org/drawingml/2006/main"/>
+        </p:blipFill>
+        <p:spPr>
+          <a:xfrm xmlns:a="http://schemas.openxmlformats.org/drawingml/2006/main">
+            <a:off x="897010" y="0"/>
+            <a:ext cx="10397980" cy="6858000"/>
+          </a:xfrm>
+          <a:prstGeom xmlns:a="http://schemas.openxmlformats.org/drawingml/2006/main" prst="rect">
+            <a:avLst/>
+          </a:prstGeom>
+        </p:spPr>
+      </p:pic>
+    </p:spTree>
+    <p:extLst>
+      <p:ext uri="{BB962C8B-B14F-4D97-AF65-F5344CB8AC3E}">
+        <p14:creationId xmlns:p14="http://schemas.microsoft.com/office/powerpoint/2010/main" val="949172246"/>
+      </p:ext>
+    </p:extLst>
+  </p:cSld>
+</p:sld>
+</file>
+
+<file path=ppt/slides/slide8.xml><?xml version="1.0" encoding="utf-8"?>
 <p:sld xmlns:p="http://schemas.openxmlformats.org/presentationml/2006/main">
   <p:cSld>
     <p:bg>
@@ -14813,6 +15516,7 @@
               </a:defRPr>
             </a:defPPr>
             <a:lvl1pPr algn="l">
+              <a:buNone/>
               <a:defRPr sz="3300" b="1">
                 <a:solidFill>
                   <a:srgbClr val="F4F7FC"/>
@@ -14823,6 +15527,7 @@
               </a:defRPr>
             </a:lvl1pPr>
             <a:lvl2pPr algn="l">
+              <a:buNone/>
               <a:defRPr sz="3300" b="1">
                 <a:solidFill>
                   <a:srgbClr val="F4F7FC"/>
@@ -14833,6 +15538,7 @@
               </a:defRPr>
             </a:lvl2pPr>
             <a:lvl3pPr algn="l">
+              <a:buNone/>
               <a:defRPr sz="3300" b="1">
                 <a:solidFill>
                   <a:srgbClr val="F4F7FC"/>
@@ -14843,6 +15549,7 @@
               </a:defRPr>
             </a:lvl3pPr>
             <a:lvl4pPr algn="l">
+              <a:buNone/>
               <a:defRPr sz="3300" b="1">
                 <a:solidFill>
                   <a:srgbClr val="F4F7FC"/>
@@ -14853,6 +15560,7 @@
               </a:defRPr>
             </a:lvl4pPr>
             <a:lvl5pPr algn="l">
+              <a:buNone/>
               <a:defRPr sz="3300" b="1">
                 <a:solidFill>
                   <a:srgbClr val="F4F7FC"/>
@@ -14863,6 +15571,7 @@
               </a:defRPr>
             </a:lvl5pPr>
             <a:lvl6pPr algn="l">
+              <a:buNone/>
               <a:defRPr sz="3300" b="1">
                 <a:solidFill>
                   <a:srgbClr val="F4F7FC"/>
@@ -14873,6 +15582,7 @@
               </a:defRPr>
             </a:lvl6pPr>
             <a:lvl7pPr algn="l">
+              <a:buNone/>
               <a:defRPr sz="3300" b="1">
                 <a:solidFill>
                   <a:srgbClr val="F4F7FC"/>
@@ -14883,6 +15593,7 @@
               </a:defRPr>
             </a:lvl7pPr>
             <a:lvl8pPr algn="l">
+              <a:buNone/>
               <a:defRPr sz="3300" b="1">
                 <a:solidFill>
                   <a:srgbClr val="F4F7FC"/>
@@ -14893,6 +15604,7 @@
               </a:defRPr>
             </a:lvl8pPr>
             <a:lvl9pPr algn="l">
+              <a:buNone/>
               <a:defRPr sz="3300" b="1">
                 <a:solidFill>
                   <a:srgbClr val="F4F7FC"/>
@@ -14905,6 +15617,7 @@
           </a:lstStyle>
           <a:p xmlns:a="http://schemas.openxmlformats.org/drawingml/2006/main">
             <a:pPr algn="l">
+              <a:buNone/>
               <a:defRPr sz="3300" b="1">
                 <a:solidFill>
                   <a:srgbClr val="F4F7FC"/>
@@ -14971,6 +15684,7 @@
               </a:defRPr>
             </a:defPPr>
             <a:lvl1pPr algn="l">
+              <a:buNone/>
               <a:defRPr sz="1950" b="1">
                 <a:solidFill>
                   <a:srgbClr val="59E2BD"/>
@@ -14981,6 +15695,7 @@
               </a:defRPr>
             </a:lvl1pPr>
             <a:lvl2pPr algn="l">
+              <a:buNone/>
               <a:defRPr sz="1950" b="1">
                 <a:solidFill>
                   <a:srgbClr val="59E2BD"/>
@@ -14991,6 +15706,7 @@
               </a:defRPr>
             </a:lvl2pPr>
             <a:lvl3pPr algn="l">
+              <a:buNone/>
               <a:defRPr sz="1950" b="1">
                 <a:solidFill>
                   <a:srgbClr val="59E2BD"/>
@@ -15001,6 +15717,7 @@
               </a:defRPr>
             </a:lvl3pPr>
             <a:lvl4pPr algn="l">
+              <a:buNone/>
               <a:defRPr sz="1950" b="1">
                 <a:solidFill>
                   <a:srgbClr val="59E2BD"/>
@@ -15011,6 +15728,7 @@
               </a:defRPr>
             </a:lvl4pPr>
             <a:lvl5pPr algn="l">
+              <a:buNone/>
               <a:defRPr sz="1950" b="1">
                 <a:solidFill>
                   <a:srgbClr val="59E2BD"/>
@@ -15021,6 +15739,7 @@
               </a:defRPr>
             </a:lvl5pPr>
             <a:lvl6pPr algn="l">
+              <a:buNone/>
               <a:defRPr sz="1950" b="1">
                 <a:solidFill>
                   <a:srgbClr val="59E2BD"/>
@@ -15031,6 +15750,7 @@
               </a:defRPr>
             </a:lvl6pPr>
             <a:lvl7pPr algn="l">
+              <a:buNone/>
               <a:defRPr sz="1950" b="1">
                 <a:solidFill>
                   <a:srgbClr val="59E2BD"/>
@@ -15041,6 +15761,7 @@
               </a:defRPr>
             </a:lvl7pPr>
             <a:lvl8pPr algn="l">
+              <a:buNone/>
               <a:defRPr sz="1950" b="1">
                 <a:solidFill>
                   <a:srgbClr val="59E2BD"/>
@@ -15051,6 +15772,7 @@
               </a:defRPr>
             </a:lvl8pPr>
             <a:lvl9pPr algn="l">
+              <a:buNone/>
               <a:defRPr sz="1950" b="1">
                 <a:solidFill>
                   <a:srgbClr val="59E2BD"/>
@@ -15063,6 +15785,7 @@
           </a:lstStyle>
           <a:p xmlns:a="http://schemas.openxmlformats.org/drawingml/2006/main">
             <a:pPr algn="l">
+              <a:buNone/>
               <a:defRPr sz="1950" b="1">
                 <a:solidFill>
                   <a:srgbClr val="59E2BD"/>
@@ -15129,6 +15852,7 @@
               </a:defRPr>
             </a:defPPr>
             <a:lvl1pPr algn="l">
+              <a:buNone/>
               <a:defRPr sz="2250" b="0">
                 <a:solidFill>
                   <a:srgbClr val="F4F7FC"/>
@@ -15139,6 +15863,7 @@
               </a:defRPr>
             </a:lvl1pPr>
             <a:lvl2pPr algn="l">
+              <a:buNone/>
               <a:defRPr sz="2250" b="0">
                 <a:solidFill>
                   <a:srgbClr val="F4F7FC"/>
@@ -15149,6 +15874,7 @@
               </a:defRPr>
             </a:lvl2pPr>
             <a:lvl3pPr algn="l">
+              <a:buNone/>
               <a:defRPr sz="2250" b="0">
                 <a:solidFill>
                   <a:srgbClr val="F4F7FC"/>
@@ -15159,6 +15885,7 @@
               </a:defRPr>
             </a:lvl3pPr>
             <a:lvl4pPr algn="l">
+              <a:buNone/>
               <a:defRPr sz="2250" b="0">
                 <a:solidFill>
                   <a:srgbClr val="F4F7FC"/>
@@ -15169,6 +15896,7 @@
               </a:defRPr>
             </a:lvl4pPr>
             <a:lvl5pPr algn="l">
+              <a:buNone/>
               <a:defRPr sz="2250" b="0">
                 <a:solidFill>
                   <a:srgbClr val="F4F7FC"/>
@@ -15179,6 +15907,7 @@
               </a:defRPr>
             </a:lvl5pPr>
             <a:lvl6pPr algn="l">
+              <a:buNone/>
               <a:defRPr sz="2250" b="0">
                 <a:solidFill>
                   <a:srgbClr val="F4F7FC"/>
@@ -15189,6 +15918,7 @@
               </a:defRPr>
             </a:lvl6pPr>
             <a:lvl7pPr algn="l">
+              <a:buNone/>
               <a:defRPr sz="2250" b="0">
                 <a:solidFill>
                   <a:srgbClr val="F4F7FC"/>
@@ -15199,6 +15929,7 @@
               </a:defRPr>
             </a:lvl7pPr>
             <a:lvl8pPr algn="l">
+              <a:buNone/>
               <a:defRPr sz="2250" b="0">
                 <a:solidFill>
                   <a:srgbClr val="F4F7FC"/>
@@ -15209,6 +15940,7 @@
               </a:defRPr>
             </a:lvl8pPr>
             <a:lvl9pPr algn="l">
+              <a:buNone/>
               <a:defRPr sz="2250" b="0">
                 <a:solidFill>
                   <a:srgbClr val="F4F7FC"/>
@@ -15221,6 +15953,7 @@
           </a:lstStyle>
           <a:p xmlns:a="http://schemas.openxmlformats.org/drawingml/2006/main">
             <a:pPr algn="l">
+              <a:buNone/>
               <a:defRPr sz="2250" b="0">
                 <a:solidFill>
                   <a:srgbClr val="F4F7FC"/>
@@ -15244,6 +15977,7 @@
           </a:p>
           <a:p xmlns:a="http://schemas.openxmlformats.org/drawingml/2006/main">
             <a:pPr algn="l">
+              <a:buNone/>
               <a:defRPr sz="2250" b="0">
                 <a:solidFill>
                   <a:srgbClr val="F4F7FC"/>
@@ -15310,6 +16044,7 @@
               </a:defRPr>
             </a:defPPr>
             <a:lvl1pPr algn="l">
+              <a:buNone/>
               <a:defRPr sz="2250" b="0">
                 <a:solidFill>
                   <a:srgbClr val="F4F7FC"/>
@@ -15320,6 +16055,7 @@
               </a:defRPr>
             </a:lvl1pPr>
             <a:lvl2pPr algn="l">
+              <a:buNone/>
               <a:defRPr sz="2250" b="0">
                 <a:solidFill>
                   <a:srgbClr val="F4F7FC"/>
@@ -15330,6 +16066,7 @@
               </a:defRPr>
             </a:lvl2pPr>
             <a:lvl3pPr algn="l">
+              <a:buNone/>
               <a:defRPr sz="2250" b="0">
                 <a:solidFill>
                   <a:srgbClr val="F4F7FC"/>
@@ -15340,6 +16077,7 @@
               </a:defRPr>
             </a:lvl3pPr>
             <a:lvl4pPr algn="l">
+              <a:buNone/>
               <a:defRPr sz="2250" b="0">
                 <a:solidFill>
                   <a:srgbClr val="F4F7FC"/>
@@ -15350,6 +16088,7 @@
               </a:defRPr>
             </a:lvl4pPr>
             <a:lvl5pPr algn="l">
+              <a:buNone/>
               <a:defRPr sz="2250" b="0">
                 <a:solidFill>
                   <a:srgbClr val="F4F7FC"/>
@@ -15360,6 +16099,7 @@
               </a:defRPr>
             </a:lvl5pPr>
             <a:lvl6pPr algn="l">
+              <a:buNone/>
               <a:defRPr sz="2250" b="0">
                 <a:solidFill>
                   <a:srgbClr val="F4F7FC"/>
@@ -15370,6 +16110,7 @@
               </a:defRPr>
             </a:lvl6pPr>
             <a:lvl7pPr algn="l">
+              <a:buNone/>
               <a:defRPr sz="2250" b="0">
                 <a:solidFill>
                   <a:srgbClr val="F4F7FC"/>
@@ -15380,6 +16121,7 @@
               </a:defRPr>
             </a:lvl7pPr>
             <a:lvl8pPr algn="l">
+              <a:buNone/>
               <a:defRPr sz="2250" b="0">
                 <a:solidFill>
                   <a:srgbClr val="F4F7FC"/>
@@ -15390,6 +16132,7 @@
               </a:defRPr>
             </a:lvl8pPr>
             <a:lvl9pPr algn="l">
+              <a:buNone/>
               <a:defRPr sz="2250" b="0">
                 <a:solidFill>
                   <a:srgbClr val="F4F7FC"/>
@@ -15402,6 +16145,7 @@
           </a:lstStyle>
           <a:p xmlns:a="http://schemas.openxmlformats.org/drawingml/2006/main">
             <a:pPr algn="l">
+              <a:buNone/>
               <a:defRPr sz="2250" b="0">
                 <a:solidFill>
                   <a:srgbClr val="F4F7FC"/>
@@ -15425,6 +16169,7 @@
           </a:p>
           <a:p xmlns:a="http://schemas.openxmlformats.org/drawingml/2006/main">
             <a:pPr algn="l">
+              <a:buNone/>
               <a:defRPr sz="2250" b="0">
                 <a:solidFill>
                   <a:srgbClr val="F4F7FC"/>
@@ -15491,6 +16236,7 @@
               </a:defRPr>
             </a:defPPr>
             <a:lvl1pPr algn="l">
+              <a:buNone/>
               <a:defRPr sz="2175" b="0">
                 <a:solidFill>
                   <a:srgbClr val="F4F7FC"/>
@@ -15501,6 +16247,7 @@
               </a:defRPr>
             </a:lvl1pPr>
             <a:lvl2pPr algn="l">
+              <a:buNone/>
               <a:defRPr sz="2175" b="0">
                 <a:solidFill>
                   <a:srgbClr val="F4F7FC"/>
@@ -15511,6 +16258,7 @@
               </a:defRPr>
             </a:lvl2pPr>
             <a:lvl3pPr algn="l">
+              <a:buNone/>
               <a:defRPr sz="2175" b="0">
                 <a:solidFill>
                   <a:srgbClr val="F4F7FC"/>
@@ -15521,6 +16269,7 @@
               </a:defRPr>
             </a:lvl3pPr>
             <a:lvl4pPr algn="l">
+              <a:buNone/>
               <a:defRPr sz="2175" b="0">
                 <a:solidFill>
                   <a:srgbClr val="F4F7FC"/>
@@ -15531,6 +16280,7 @@
               </a:defRPr>
             </a:lvl4pPr>
             <a:lvl5pPr algn="l">
+              <a:buNone/>
               <a:defRPr sz="2175" b="0">
                 <a:solidFill>
                   <a:srgbClr val="F4F7FC"/>
@@ -15541,6 +16291,7 @@
               </a:defRPr>
             </a:lvl5pPr>
             <a:lvl6pPr algn="l">
+              <a:buNone/>
               <a:defRPr sz="2175" b="0">
                 <a:solidFill>
                   <a:srgbClr val="F4F7FC"/>
@@ -15551,6 +16302,7 @@
               </a:defRPr>
             </a:lvl6pPr>
             <a:lvl7pPr algn="l">
+              <a:buNone/>
               <a:defRPr sz="2175" b="0">
                 <a:solidFill>
                   <a:srgbClr val="F4F7FC"/>
@@ -15561,6 +16313,7 @@
               </a:defRPr>
             </a:lvl7pPr>
             <a:lvl8pPr algn="l">
+              <a:buNone/>
               <a:defRPr sz="2175" b="0">
                 <a:solidFill>
                   <a:srgbClr val="F4F7FC"/>
@@ -15571,6 +16324,7 @@
               </a:defRPr>
             </a:lvl8pPr>
             <a:lvl9pPr algn="l">
+              <a:buNone/>
               <a:defRPr sz="2175" b="0">
                 <a:solidFill>
                   <a:srgbClr val="F4F7FC"/>
@@ -15583,6 +16337,7 @@
           </a:lstStyle>
           <a:p xmlns:a="http://schemas.openxmlformats.org/drawingml/2006/main">
             <a:pPr algn="l">
+              <a:buNone/>
               <a:defRPr sz="2175" b="0">
                 <a:solidFill>
                   <a:srgbClr val="F4F7FC"/>
@@ -15606,6 +16361,7 @@
           </a:p>
           <a:p xmlns:a="http://schemas.openxmlformats.org/drawingml/2006/main">
             <a:pPr algn="l">
+              <a:buNone/>
               <a:defRPr sz="2175" b="0">
                 <a:solidFill>
                   <a:srgbClr val="F4F7FC"/>
@@ -15672,6 +16428,7 @@
               </a:defRPr>
             </a:defPPr>
             <a:lvl1pPr algn="l">
+              <a:buNone/>
               <a:defRPr sz="1950" b="1">
                 <a:solidFill>
                   <a:srgbClr val="59E2BD"/>
@@ -15682,6 +16439,7 @@
               </a:defRPr>
             </a:lvl1pPr>
             <a:lvl2pPr algn="l">
+              <a:buNone/>
               <a:defRPr sz="1950" b="1">
                 <a:solidFill>
                   <a:srgbClr val="59E2BD"/>
@@ -15692,6 +16450,7 @@
               </a:defRPr>
             </a:lvl2pPr>
             <a:lvl3pPr algn="l">
+              <a:buNone/>
               <a:defRPr sz="1950" b="1">
                 <a:solidFill>
                   <a:srgbClr val="59E2BD"/>
@@ -15702,6 +16461,7 @@
               </a:defRPr>
             </a:lvl3pPr>
             <a:lvl4pPr algn="l">
+              <a:buNone/>
               <a:defRPr sz="1950" b="1">
                 <a:solidFill>
                   <a:srgbClr val="59E2BD"/>
@@ -15712,6 +16472,7 @@
               </a:defRPr>
             </a:lvl4pPr>
             <a:lvl5pPr algn="l">
+              <a:buNone/>
               <a:defRPr sz="1950" b="1">
                 <a:solidFill>
                   <a:srgbClr val="59E2BD"/>
@@ -15722,6 +16483,7 @@
               </a:defRPr>
             </a:lvl5pPr>
             <a:lvl6pPr algn="l">
+              <a:buNone/>
               <a:defRPr sz="1950" b="1">
                 <a:solidFill>
                   <a:srgbClr val="59E2BD"/>
@@ -15732,6 +16494,7 @@
               </a:defRPr>
             </a:lvl6pPr>
             <a:lvl7pPr algn="l">
+              <a:buNone/>
               <a:defRPr sz="1950" b="1">
                 <a:solidFill>
                   <a:srgbClr val="59E2BD"/>
@@ -15742,6 +16505,7 @@
               </a:defRPr>
             </a:lvl7pPr>
             <a:lvl8pPr algn="l">
+              <a:buNone/>
               <a:defRPr sz="1950" b="1">
                 <a:solidFill>
                   <a:srgbClr val="59E2BD"/>
@@ -15752,6 +16516,7 @@
               </a:defRPr>
             </a:lvl8pPr>
             <a:lvl9pPr algn="l">
+              <a:buNone/>
               <a:defRPr sz="1950" b="1">
                 <a:solidFill>
                   <a:srgbClr val="59E2BD"/>
@@ -15764,6 +16529,7 @@
           </a:lstStyle>
           <a:p xmlns:a="http://schemas.openxmlformats.org/drawingml/2006/main">
             <a:pPr algn="l">
+              <a:buNone/>
               <a:defRPr sz="1950" b="1">
                 <a:solidFill>
                   <a:srgbClr val="59E2BD"/>
@@ -15830,6 +16596,7 @@
               </a:defRPr>
             </a:defPPr>
             <a:lvl1pPr algn="l">
+              <a:buNone/>
               <a:defRPr sz="2025" b="0">
                 <a:solidFill>
                   <a:srgbClr val="F4F7FC"/>
@@ -15840,6 +16607,7 @@
               </a:defRPr>
             </a:lvl1pPr>
             <a:lvl2pPr algn="l">
+              <a:buNone/>
               <a:defRPr sz="2025" b="0">
                 <a:solidFill>
                   <a:srgbClr val="F4F7FC"/>
@@ -15850,6 +16618,7 @@
               </a:defRPr>
             </a:lvl2pPr>
             <a:lvl3pPr algn="l">
+              <a:buNone/>
               <a:defRPr sz="2025" b="0">
                 <a:solidFill>
                   <a:srgbClr val="F4F7FC"/>
@@ -15860,6 +16629,7 @@
               </a:defRPr>
             </a:lvl3pPr>
             <a:lvl4pPr algn="l">
+              <a:buNone/>
               <a:defRPr sz="2025" b="0">
                 <a:solidFill>
                   <a:srgbClr val="F4F7FC"/>
@@ -15870,6 +16640,7 @@
               </a:defRPr>
             </a:lvl4pPr>
             <a:lvl5pPr algn="l">
+              <a:buNone/>
               <a:defRPr sz="2025" b="0">
                 <a:solidFill>
                   <a:srgbClr val="F4F7FC"/>
@@ -15880,6 +16651,7 @@
               </a:defRPr>
             </a:lvl5pPr>
             <a:lvl6pPr algn="l">
+              <a:buNone/>
               <a:defRPr sz="2025" b="0">
                 <a:solidFill>
                   <a:srgbClr val="F4F7FC"/>
@@ -15890,6 +16662,7 @@
               </a:defRPr>
             </a:lvl6pPr>
             <a:lvl7pPr algn="l">
+              <a:buNone/>
               <a:defRPr sz="2025" b="0">
                 <a:solidFill>
                   <a:srgbClr val="F4F7FC"/>
@@ -15900,6 +16673,7 @@
               </a:defRPr>
             </a:lvl7pPr>
             <a:lvl8pPr algn="l">
+              <a:buNone/>
               <a:defRPr sz="2025" b="0">
                 <a:solidFill>
                   <a:srgbClr val="F4F7FC"/>
@@ -15910,6 +16684,7 @@
               </a:defRPr>
             </a:lvl8pPr>
             <a:lvl9pPr algn="l">
+              <a:buNone/>
               <a:defRPr sz="2025" b="0">
                 <a:solidFill>
                   <a:srgbClr val="F4F7FC"/>
@@ -15922,6 +16697,7 @@
           </a:lstStyle>
           <a:p xmlns:a="http://schemas.openxmlformats.org/drawingml/2006/main">
             <a:pPr algn="l">
+              <a:buNone/>
               <a:defRPr sz="2025" b="0">
                 <a:solidFill>
                   <a:srgbClr val="F4F7FC"/>
@@ -15988,6 +16764,7 @@
               </a:defRPr>
             </a:defPPr>
             <a:lvl1pPr algn="l">
+              <a:buNone/>
               <a:defRPr sz="2025" b="0">
                 <a:solidFill>
                   <a:srgbClr val="F4F7FC"/>
@@ -15998,6 +16775,7 @@
               </a:defRPr>
             </a:lvl1pPr>
             <a:lvl2pPr algn="l">
+              <a:buNone/>
               <a:defRPr sz="2025" b="0">
                 <a:solidFill>
                   <a:srgbClr val="F4F7FC"/>
@@ -16008,6 +16786,7 @@
               </a:defRPr>
             </a:lvl2pPr>
             <a:lvl3pPr algn="l">
+              <a:buNone/>
               <a:defRPr sz="2025" b="0">
                 <a:solidFill>
                   <a:srgbClr val="F4F7FC"/>
@@ -16018,6 +16797,7 @@
               </a:defRPr>
             </a:lvl3pPr>
             <a:lvl4pPr algn="l">
+              <a:buNone/>
               <a:defRPr sz="2025" b="0">
                 <a:solidFill>
                   <a:srgbClr val="F4F7FC"/>
@@ -16028,6 +16808,7 @@
               </a:defRPr>
             </a:lvl4pPr>
             <a:lvl5pPr algn="l">
+              <a:buNone/>
               <a:defRPr sz="2025" b="0">
                 <a:solidFill>
                   <a:srgbClr val="F4F7FC"/>
@@ -16038,6 +16819,7 @@
               </a:defRPr>
             </a:lvl5pPr>
             <a:lvl6pPr algn="l">
+              <a:buNone/>
               <a:defRPr sz="2025" b="0">
                 <a:solidFill>
                   <a:srgbClr val="F4F7FC"/>
@@ -16048,6 +16830,7 @@
               </a:defRPr>
             </a:lvl6pPr>
             <a:lvl7pPr algn="l">
+              <a:buNone/>
               <a:defRPr sz="2025" b="0">
                 <a:solidFill>
                   <a:srgbClr val="F4F7FC"/>
@@ -16058,6 +16841,7 @@
               </a:defRPr>
             </a:lvl7pPr>
             <a:lvl8pPr algn="l">
+              <a:buNone/>
               <a:defRPr sz="2025" b="0">
                 <a:solidFill>
                   <a:srgbClr val="F4F7FC"/>
@@ -16068,6 +16852,7 @@
               </a:defRPr>
             </a:lvl8pPr>
             <a:lvl9pPr algn="l">
+              <a:buNone/>
               <a:defRPr sz="2025" b="0">
                 <a:solidFill>
                   <a:srgbClr val="F4F7FC"/>
@@ -16080,6 +16865,7 @@
           </a:lstStyle>
           <a:p xmlns:a="http://schemas.openxmlformats.org/drawingml/2006/main">
             <a:pPr algn="l">
+              <a:buNone/>
               <a:defRPr sz="2025" b="0">
                 <a:solidFill>
                   <a:srgbClr val="F4F7FC"/>
@@ -16146,6 +16932,7 @@
               </a:defRPr>
             </a:defPPr>
             <a:lvl1pPr algn="l">
+              <a:buNone/>
               <a:defRPr sz="2025" b="0">
                 <a:solidFill>
                   <a:srgbClr val="F4F7FC"/>
@@ -16156,6 +16943,7 @@
               </a:defRPr>
             </a:lvl1pPr>
             <a:lvl2pPr algn="l">
+              <a:buNone/>
               <a:defRPr sz="2025" b="0">
                 <a:solidFill>
                   <a:srgbClr val="F4F7FC"/>
@@ -16166,6 +16954,7 @@
               </a:defRPr>
             </a:lvl2pPr>
             <a:lvl3pPr algn="l">
+              <a:buNone/>
               <a:defRPr sz="2025" b="0">
                 <a:solidFill>
                   <a:srgbClr val="F4F7FC"/>
@@ -16176,6 +16965,7 @@
               </a:defRPr>
             </a:lvl3pPr>
             <a:lvl4pPr algn="l">
+              <a:buNone/>
               <a:defRPr sz="2025" b="0">
                 <a:solidFill>
                   <a:srgbClr val="F4F7FC"/>
@@ -16186,6 +16976,7 @@
               </a:defRPr>
             </a:lvl4pPr>
             <a:lvl5pPr algn="l">
+              <a:buNone/>
               <a:defRPr sz="2025" b="0">
                 <a:solidFill>
                   <a:srgbClr val="F4F7FC"/>
@@ -16196,6 +16987,7 @@
               </a:defRPr>
             </a:lvl5pPr>
             <a:lvl6pPr algn="l">
+              <a:buNone/>
               <a:defRPr sz="2025" b="0">
                 <a:solidFill>
                   <a:srgbClr val="F4F7FC"/>
@@ -16206,6 +16998,7 @@
               </a:defRPr>
             </a:lvl6pPr>
             <a:lvl7pPr algn="l">
+              <a:buNone/>
               <a:defRPr sz="2025" b="0">
                 <a:solidFill>
                   <a:srgbClr val="F4F7FC"/>
@@ -16216,6 +17009,7 @@
               </a:defRPr>
             </a:lvl7pPr>
             <a:lvl8pPr algn="l">
+              <a:buNone/>
               <a:defRPr sz="2025" b="0">
                 <a:solidFill>
                   <a:srgbClr val="F4F7FC"/>
@@ -16226,6 +17020,7 @@
               </a:defRPr>
             </a:lvl8pPr>
             <a:lvl9pPr algn="l">
+              <a:buNone/>
               <a:defRPr sz="2025" b="0">
                 <a:solidFill>
                   <a:srgbClr val="F4F7FC"/>
@@ -16238,6 +17033,7 @@
           </a:lstStyle>
           <a:p xmlns:a="http://schemas.openxmlformats.org/drawingml/2006/main">
             <a:pPr algn="l">
+              <a:buNone/>
               <a:defRPr sz="2025" b="0">
                 <a:solidFill>
                   <a:srgbClr val="F4F7FC"/>
@@ -16304,6 +17100,7 @@
               </a:defRPr>
             </a:defPPr>
             <a:lvl1pPr algn="l">
+              <a:buNone/>
               <a:defRPr sz="2025" b="0">
                 <a:solidFill>
                   <a:srgbClr val="F4F7FC"/>
@@ -16314,6 +17111,7 @@
               </a:defRPr>
             </a:lvl1pPr>
             <a:lvl2pPr algn="l">
+              <a:buNone/>
               <a:defRPr sz="2025" b="0">
                 <a:solidFill>
                   <a:srgbClr val="F4F7FC"/>
@@ -16324,6 +17122,7 @@
               </a:defRPr>
             </a:lvl2pPr>
             <a:lvl3pPr algn="l">
+              <a:buNone/>
               <a:defRPr sz="2025" b="0">
                 <a:solidFill>
                   <a:srgbClr val="F4F7FC"/>
@@ -16334,6 +17133,7 @@
               </a:defRPr>
             </a:lvl3pPr>
             <a:lvl4pPr algn="l">
+              <a:buNone/>
               <a:defRPr sz="2025" b="0">
                 <a:solidFill>
                   <a:srgbClr val="F4F7FC"/>
@@ -16344,6 +17144,7 @@
               </a:defRPr>
             </a:lvl4pPr>
             <a:lvl5pPr algn="l">
+              <a:buNone/>
               <a:defRPr sz="2025" b="0">
                 <a:solidFill>
                   <a:srgbClr val="F4F7FC"/>
@@ -16354,6 +17155,7 @@
               </a:defRPr>
             </a:lvl5pPr>
             <a:lvl6pPr algn="l">
+              <a:buNone/>
               <a:defRPr sz="2025" b="0">
                 <a:solidFill>
                   <a:srgbClr val="F4F7FC"/>
@@ -16364,6 +17166,7 @@
               </a:defRPr>
             </a:lvl6pPr>
             <a:lvl7pPr algn="l">
+              <a:buNone/>
               <a:defRPr sz="2025" b="0">
                 <a:solidFill>
                   <a:srgbClr val="F4F7FC"/>
@@ -16374,6 +17177,7 @@
               </a:defRPr>
             </a:lvl7pPr>
             <a:lvl8pPr algn="l">
+              <a:buNone/>
               <a:defRPr sz="2025" b="0">
                 <a:solidFill>
                   <a:srgbClr val="F4F7FC"/>
@@ -16384,6 +17188,7 @@
               </a:defRPr>
             </a:lvl8pPr>
             <a:lvl9pPr algn="l">
+              <a:buNone/>
               <a:defRPr sz="2025" b="0">
                 <a:solidFill>
                   <a:srgbClr val="F4F7FC"/>
@@ -16396,6 +17201,7 @@
           </a:lstStyle>
           <a:p xmlns:a="http://schemas.openxmlformats.org/drawingml/2006/main">
             <a:pPr algn="l">
+              <a:buNone/>
               <a:defRPr sz="2025" b="0">
                 <a:solidFill>
                   <a:srgbClr val="F4F7FC"/>
@@ -16462,6 +17268,7 @@
               </a:defRPr>
             </a:defPPr>
             <a:lvl1pPr algn="l">
+              <a:buNone/>
               <a:defRPr sz="1875" b="0">
                 <a:solidFill>
                   <a:srgbClr val="B3C5DD"/>
@@ -16472,6 +17279,7 @@
               </a:defRPr>
             </a:lvl1pPr>
             <a:lvl2pPr algn="l">
+              <a:buNone/>
               <a:defRPr sz="1875" b="0">
                 <a:solidFill>
                   <a:srgbClr val="B3C5DD"/>
@@ -16482,6 +17290,7 @@
               </a:defRPr>
             </a:lvl2pPr>
             <a:lvl3pPr algn="l">
+              <a:buNone/>
               <a:defRPr sz="1875" b="0">
                 <a:solidFill>
                   <a:srgbClr val="B3C5DD"/>
@@ -16492,6 +17301,7 @@
               </a:defRPr>
             </a:lvl3pPr>
             <a:lvl4pPr algn="l">
+              <a:buNone/>
               <a:defRPr sz="1875" b="0">
                 <a:solidFill>
                   <a:srgbClr val="B3C5DD"/>
@@ -16502,6 +17312,7 @@
               </a:defRPr>
             </a:lvl4pPr>
             <a:lvl5pPr algn="l">
+              <a:buNone/>
               <a:defRPr sz="1875" b="0">
                 <a:solidFill>
                   <a:srgbClr val="B3C5DD"/>
@@ -16512,6 +17323,7 @@
               </a:defRPr>
             </a:lvl5pPr>
             <a:lvl6pPr algn="l">
+              <a:buNone/>
               <a:defRPr sz="1875" b="0">
                 <a:solidFill>
                   <a:srgbClr val="B3C5DD"/>
@@ -16522,6 +17334,7 @@
               </a:defRPr>
             </a:lvl6pPr>
             <a:lvl7pPr algn="l">
+              <a:buNone/>
               <a:defRPr sz="1875" b="0">
                 <a:solidFill>
                   <a:srgbClr val="B3C5DD"/>
@@ -16532,6 +17345,7 @@
               </a:defRPr>
             </a:lvl7pPr>
             <a:lvl8pPr algn="l">
+              <a:buNone/>
               <a:defRPr sz="1875" b="0">
                 <a:solidFill>
                   <a:srgbClr val="B3C5DD"/>
@@ -16542,6 +17356,7 @@
               </a:defRPr>
             </a:lvl8pPr>
             <a:lvl9pPr algn="l">
+              <a:buNone/>
               <a:defRPr sz="1875" b="0">
                 <a:solidFill>
                   <a:srgbClr val="B3C5DD"/>
@@ -16554,6 +17369,7 @@
           </a:lstStyle>
           <a:p xmlns:a="http://schemas.openxmlformats.org/drawingml/2006/main">
             <a:pPr algn="l">
+              <a:buNone/>
               <a:defRPr sz="1875" b="0">
                 <a:solidFill>
                   <a:srgbClr val="B3C5DD"/>
@@ -16587,7 +17403,7 @@
 </p:sld>
 </file>
 
-<file path=ppt/slides/slide8.xml><?xml version="1.0" encoding="utf-8"?>
+<file path=ppt/slides/slide9.xml><?xml version="1.0" encoding="utf-8"?>
 <p:sld xmlns:p="http://schemas.openxmlformats.org/presentationml/2006/main">
   <p:cSld>
     <p:bg>
@@ -16649,6 +17465,7 @@
               </a:defRPr>
             </a:defPPr>
             <a:lvl1pPr algn="l">
+              <a:buNone/>
               <a:defRPr sz="3300" b="1">
                 <a:solidFill>
                   <a:srgbClr val="F4F7FC"/>
@@ -16659,6 +17476,7 @@
               </a:defRPr>
             </a:lvl1pPr>
             <a:lvl2pPr algn="l">
+              <a:buNone/>
               <a:defRPr sz="3300" b="1">
                 <a:solidFill>
                   <a:srgbClr val="F4F7FC"/>
@@ -16669,6 +17487,7 @@
               </a:defRPr>
             </a:lvl2pPr>
             <a:lvl3pPr algn="l">
+              <a:buNone/>
               <a:defRPr sz="3300" b="1">
                 <a:solidFill>
                   <a:srgbClr val="F4F7FC"/>
@@ -16679,6 +17498,7 @@
               </a:defRPr>
             </a:lvl3pPr>
             <a:lvl4pPr algn="l">
+              <a:buNone/>
               <a:defRPr sz="3300" b="1">
                 <a:solidFill>
                   <a:srgbClr val="F4F7FC"/>
@@ -16689,6 +17509,7 @@
               </a:defRPr>
             </a:lvl4pPr>
             <a:lvl5pPr algn="l">
+              <a:buNone/>
               <a:defRPr sz="3300" b="1">
                 <a:solidFill>
                   <a:srgbClr val="F4F7FC"/>
@@ -16699,6 +17520,7 @@
               </a:defRPr>
             </a:lvl5pPr>
             <a:lvl6pPr algn="l">
+              <a:buNone/>
               <a:defRPr sz="3300" b="1">
                 <a:solidFill>
                   <a:srgbClr val="F4F7FC"/>
@@ -16709,6 +17531,7 @@
               </a:defRPr>
             </a:lvl6pPr>
             <a:lvl7pPr algn="l">
+              <a:buNone/>
               <a:defRPr sz="3300" b="1">
                 <a:solidFill>
                   <a:srgbClr val="F4F7FC"/>
@@ -16719,6 +17542,7 @@
               </a:defRPr>
             </a:lvl7pPr>
             <a:lvl8pPr algn="l">
+              <a:buNone/>
               <a:defRPr sz="3300" b="1">
                 <a:solidFill>
                   <a:srgbClr val="F4F7FC"/>
@@ -16729,6 +17553,7 @@
               </a:defRPr>
             </a:lvl8pPr>
             <a:lvl9pPr algn="l">
+              <a:buNone/>
               <a:defRPr sz="3300" b="1">
                 <a:solidFill>
                   <a:srgbClr val="F4F7FC"/>
@@ -16741,6 +17566,7 @@
           </a:lstStyle>
           <a:p xmlns:a="http://schemas.openxmlformats.org/drawingml/2006/main">
             <a:pPr algn="l">
+              <a:buNone/>
               <a:defRPr sz="3300" b="1">
                 <a:solidFill>
                   <a:srgbClr val="F4F7FC"/>
@@ -16807,6 +17633,7 @@
               </a:defRPr>
             </a:defPPr>
             <a:lvl1pPr algn="l">
+              <a:buNone/>
               <a:defRPr sz="2175" b="1">
                 <a:solidFill>
                   <a:srgbClr val="59E2BD"/>
@@ -16817,6 +17644,7 @@
               </a:defRPr>
             </a:lvl1pPr>
             <a:lvl2pPr algn="l">
+              <a:buNone/>
               <a:defRPr sz="2175" b="1">
                 <a:solidFill>
                   <a:srgbClr val="59E2BD"/>
@@ -16827,6 +17655,7 @@
               </a:defRPr>
             </a:lvl2pPr>
             <a:lvl3pPr algn="l">
+              <a:buNone/>
               <a:defRPr sz="2175" b="1">
                 <a:solidFill>
                   <a:srgbClr val="59E2BD"/>
@@ -16837,6 +17666,7 @@
               </a:defRPr>
             </a:lvl3pPr>
             <a:lvl4pPr algn="l">
+              <a:buNone/>
               <a:defRPr sz="2175" b="1">
                 <a:solidFill>
                   <a:srgbClr val="59E2BD"/>
@@ -16847,6 +17677,7 @@
               </a:defRPr>
             </a:lvl4pPr>
             <a:lvl5pPr algn="l">
+              <a:buNone/>
               <a:defRPr sz="2175" b="1">
                 <a:solidFill>
                   <a:srgbClr val="59E2BD"/>
@@ -16857,6 +17688,7 @@
               </a:defRPr>
             </a:lvl5pPr>
             <a:lvl6pPr algn="l">
+              <a:buNone/>
               <a:defRPr sz="2175" b="1">
                 <a:solidFill>
                   <a:srgbClr val="59E2BD"/>
@@ -16867,6 +17699,7 @@
               </a:defRPr>
             </a:lvl6pPr>
             <a:lvl7pPr algn="l">
+              <a:buNone/>
               <a:defRPr sz="2175" b="1">
                 <a:solidFill>
                   <a:srgbClr val="59E2BD"/>
@@ -16877,6 +17710,7 @@
               </a:defRPr>
             </a:lvl7pPr>
             <a:lvl8pPr algn="l">
+              <a:buNone/>
               <a:defRPr sz="2175" b="1">
                 <a:solidFill>
                   <a:srgbClr val="59E2BD"/>
@@ -16887,6 +17721,7 @@
               </a:defRPr>
             </a:lvl8pPr>
             <a:lvl9pPr algn="l">
+              <a:buNone/>
               <a:defRPr sz="2175" b="1">
                 <a:solidFill>
                   <a:srgbClr val="59E2BD"/>
@@ -16899,6 +17734,7 @@
           </a:lstStyle>
           <a:p xmlns:a="http://schemas.openxmlformats.org/drawingml/2006/main">
             <a:pPr algn="l">
+              <a:buNone/>
               <a:defRPr sz="2175" b="1">
                 <a:solidFill>
                   <a:srgbClr val="59E2BD"/>
@@ -16916,7 +17752,7 @@
                 <a:latin typeface="Segoe UI"/>
                 <a:ea typeface="Segoe UI"/>
                 <a:cs typeface="Segoe UI"/>
-                <a:hlinkClick xmlns:r="http://schemas.openxmlformats.org/officeDocument/2006/relationships" r:id="R056aed1ee8cd43ef"/>
+                <a:hlinkClick xmlns:r="http://schemas.openxmlformats.org/officeDocument/2006/relationships" r:id="R1e1060d9e85e4f8d"/>
               </a:rPr>
               <a:t>Use EventRelay in ASI:One</a:t>
             </a:r>
@@ -16966,6 +17802,7 @@
               </a:defRPr>
             </a:defPPr>
             <a:lvl1pPr algn="l">
+              <a:buNone/>
               <a:defRPr sz="1575" b="0">
                 <a:solidFill>
                   <a:srgbClr val="B3C5DD"/>
@@ -16976,6 +17813,7 @@
               </a:defRPr>
             </a:lvl1pPr>
             <a:lvl2pPr algn="l">
+              <a:buNone/>
               <a:defRPr sz="1575" b="0">
                 <a:solidFill>
                   <a:srgbClr val="B3C5DD"/>
@@ -16986,6 +17824,7 @@
               </a:defRPr>
             </a:lvl2pPr>
             <a:lvl3pPr algn="l">
+              <a:buNone/>
               <a:defRPr sz="1575" b="0">
                 <a:solidFill>
                   <a:srgbClr val="B3C5DD"/>
@@ -16996,6 +17835,7 @@
               </a:defRPr>
             </a:lvl3pPr>
             <a:lvl4pPr algn="l">
+              <a:buNone/>
               <a:defRPr sz="1575" b="0">
                 <a:solidFill>
                   <a:srgbClr val="B3C5DD"/>
@@ -17006,6 +17846,7 @@
               </a:defRPr>
             </a:lvl4pPr>
             <a:lvl5pPr algn="l">
+              <a:buNone/>
               <a:defRPr sz="1575" b="0">
                 <a:solidFill>
                   <a:srgbClr val="B3C5DD"/>
@@ -17016,6 +17857,7 @@
               </a:defRPr>
             </a:lvl5pPr>
             <a:lvl6pPr algn="l">
+              <a:buNone/>
               <a:defRPr sz="1575" b="0">
                 <a:solidFill>
                   <a:srgbClr val="B3C5DD"/>
@@ -17026,6 +17868,7 @@
               </a:defRPr>
             </a:lvl6pPr>
             <a:lvl7pPr algn="l">
+              <a:buNone/>
               <a:defRPr sz="1575" b="0">
                 <a:solidFill>
                   <a:srgbClr val="B3C5DD"/>
@@ -17036,6 +17879,7 @@
               </a:defRPr>
             </a:lvl7pPr>
             <a:lvl8pPr algn="l">
+              <a:buNone/>
               <a:defRPr sz="1575" b="0">
                 <a:solidFill>
                   <a:srgbClr val="B3C5DD"/>
@@ -17046,6 +17890,7 @@
               </a:defRPr>
             </a:lvl8pPr>
             <a:lvl9pPr algn="l">
+              <a:buNone/>
               <a:defRPr sz="1575" b="0">
                 <a:solidFill>
                   <a:srgbClr val="B3C5DD"/>
@@ -17058,6 +17903,7 @@
           </a:lstStyle>
           <a:p xmlns:a="http://schemas.openxmlformats.org/drawingml/2006/main">
             <a:pPr algn="l">
+              <a:buNone/>
               <a:defRPr sz="1575" b="0">
                 <a:solidFill>
                   <a:srgbClr val="B3C5DD"/>
@@ -17124,6 +17970,7 @@
               </a:defRPr>
             </a:defPPr>
             <a:lvl1pPr algn="l">
+              <a:buNone/>
               <a:defRPr sz="2175" b="1">
                 <a:solidFill>
                   <a:srgbClr val="59E2BD"/>
@@ -17134,6 +17981,7 @@
               </a:defRPr>
             </a:lvl1pPr>
             <a:lvl2pPr algn="l">
+              <a:buNone/>
               <a:defRPr sz="2175" b="1">
                 <a:solidFill>
                   <a:srgbClr val="59E2BD"/>
@@ -17144,6 +17992,7 @@
               </a:defRPr>
             </a:lvl2pPr>
             <a:lvl3pPr algn="l">
+              <a:buNone/>
               <a:defRPr sz="2175" b="1">
                 <a:solidFill>
                   <a:srgbClr val="59E2BD"/>
@@ -17154,6 +18003,7 @@
               </a:defRPr>
             </a:lvl3pPr>
             <a:lvl4pPr algn="l">
+              <a:buNone/>
               <a:defRPr sz="2175" b="1">
                 <a:solidFill>
                   <a:srgbClr val="59E2BD"/>
@@ -17164,6 +18014,7 @@
               </a:defRPr>
             </a:lvl4pPr>
             <a:lvl5pPr algn="l">
+              <a:buNone/>
               <a:defRPr sz="2175" b="1">
                 <a:solidFill>
                   <a:srgbClr val="59E2BD"/>
@@ -17174,6 +18025,7 @@
               </a:defRPr>
             </a:lvl5pPr>
             <a:lvl6pPr algn="l">
+              <a:buNone/>
               <a:defRPr sz="2175" b="1">
                 <a:solidFill>
                   <a:srgbClr val="59E2BD"/>
@@ -17184,6 +18036,7 @@
               </a:defRPr>
             </a:lvl6pPr>
             <a:lvl7pPr algn="l">
+              <a:buNone/>
               <a:defRPr sz="2175" b="1">
                 <a:solidFill>
                   <a:srgbClr val="59E2BD"/>
@@ -17194,6 +18047,7 @@
               </a:defRPr>
             </a:lvl7pPr>
             <a:lvl8pPr algn="l">
+              <a:buNone/>
               <a:defRPr sz="2175" b="1">
                 <a:solidFill>
                   <a:srgbClr val="59E2BD"/>
@@ -17204,6 +18058,7 @@
               </a:defRPr>
             </a:lvl8pPr>
             <a:lvl9pPr algn="l">
+              <a:buNone/>
               <a:defRPr sz="2175" b="1">
                 <a:solidFill>
                   <a:srgbClr val="59E2BD"/>
@@ -17216,6 +18071,7 @@
           </a:lstStyle>
           <a:p xmlns:a="http://schemas.openxmlformats.org/drawingml/2006/main">
             <a:pPr algn="l">
+              <a:buNone/>
               <a:defRPr sz="2175" b="1">
                 <a:solidFill>
                   <a:srgbClr val="59E2BD"/>
@@ -17233,7 +18089,7 @@
                 <a:latin typeface="Segoe UI"/>
                 <a:ea typeface="Segoe UI"/>
                 <a:cs typeface="Segoe UI"/>
-                <a:hlinkClick xmlns:r="http://schemas.openxmlformats.org/officeDocument/2006/relationships" r:id="R324ddbf72318491c"/>
+                <a:hlinkClick xmlns:r="http://schemas.openxmlformats.org/officeDocument/2006/relationships" r:id="R625a69e58b544c55"/>
               </a:rPr>
               <a:t>GitHub source and setup</a:t>
             </a:r>
@@ -17283,6 +18139,7 @@
               </a:defRPr>
             </a:defPPr>
             <a:lvl1pPr algn="l">
+              <a:buNone/>
               <a:defRPr sz="1725" b="0">
                 <a:solidFill>
                   <a:srgbClr val="B3C5DD"/>
@@ -17293,6 +18150,7 @@
               </a:defRPr>
             </a:lvl1pPr>
             <a:lvl2pPr algn="l">
+              <a:buNone/>
               <a:defRPr sz="1725" b="0">
                 <a:solidFill>
                   <a:srgbClr val="B3C5DD"/>
@@ -17303,6 +18161,7 @@
               </a:defRPr>
             </a:lvl2pPr>
             <a:lvl3pPr algn="l">
+              <a:buNone/>
               <a:defRPr sz="1725" b="0">
                 <a:solidFill>
                   <a:srgbClr val="B3C5DD"/>
@@ -17313,6 +18172,7 @@
               </a:defRPr>
             </a:lvl3pPr>
             <a:lvl4pPr algn="l">
+              <a:buNone/>
               <a:defRPr sz="1725" b="0">
                 <a:solidFill>
                   <a:srgbClr val="B3C5DD"/>
@@ -17323,6 +18183,7 @@
               </a:defRPr>
             </a:lvl4pPr>
             <a:lvl5pPr algn="l">
+              <a:buNone/>
               <a:defRPr sz="1725" b="0">
                 <a:solidFill>
                   <a:srgbClr val="B3C5DD"/>
@@ -17333,6 +18194,7 @@
               </a:defRPr>
             </a:lvl5pPr>
             <a:lvl6pPr algn="l">
+              <a:buNone/>
               <a:defRPr sz="1725" b="0">
                 <a:solidFill>
                   <a:srgbClr val="B3C5DD"/>
@@ -17343,6 +18205,7 @@
               </a:defRPr>
             </a:lvl6pPr>
             <a:lvl7pPr algn="l">
+              <a:buNone/>
               <a:defRPr sz="1725" b="0">
                 <a:solidFill>
                   <a:srgbClr val="B3C5DD"/>
@@ -17353,6 +18216,7 @@
               </a:defRPr>
             </a:lvl7pPr>
             <a:lvl8pPr algn="l">
+              <a:buNone/>
               <a:defRPr sz="1725" b="0">
                 <a:solidFill>
                   <a:srgbClr val="B3C5DD"/>
@@ -17363,6 +18227,7 @@
               </a:defRPr>
             </a:lvl8pPr>
             <a:lvl9pPr algn="l">
+              <a:buNone/>
               <a:defRPr sz="1725" b="0">
                 <a:solidFill>
                   <a:srgbClr val="B3C5DD"/>
@@ -17375,6 +18240,7 @@
           </a:lstStyle>
           <a:p xmlns:a="http://schemas.openxmlformats.org/drawingml/2006/main">
             <a:pPr algn="l">
+              <a:buNone/>
               <a:defRPr sz="1725" b="0">
                 <a:solidFill>
                   <a:srgbClr val="B3C5DD"/>
@@ -17441,6 +18307,7 @@
               </a:defRPr>
             </a:defPPr>
             <a:lvl1pPr algn="l">
+              <a:buNone/>
               <a:defRPr sz="2175" b="1">
                 <a:solidFill>
                   <a:srgbClr val="59E2BD"/>
@@ -17451,6 +18318,7 @@
               </a:defRPr>
             </a:lvl1pPr>
             <a:lvl2pPr algn="l">
+              <a:buNone/>
               <a:defRPr sz="2175" b="1">
                 <a:solidFill>
                   <a:srgbClr val="59E2BD"/>
@@ -17461,6 +18329,7 @@
               </a:defRPr>
             </a:lvl2pPr>
             <a:lvl3pPr algn="l">
+              <a:buNone/>
               <a:defRPr sz="2175" b="1">
                 <a:solidFill>
                   <a:srgbClr val="59E2BD"/>
@@ -17471,6 +18340,7 @@
               </a:defRPr>
             </a:lvl3pPr>
             <a:lvl4pPr algn="l">
+              <a:buNone/>
               <a:defRPr sz="2175" b="1">
                 <a:solidFill>
                   <a:srgbClr val="59E2BD"/>
@@ -17481,6 +18351,7 @@
               </a:defRPr>
             </a:lvl4pPr>
             <a:lvl5pPr algn="l">
+              <a:buNone/>
               <a:defRPr sz="2175" b="1">
                 <a:solidFill>
                   <a:srgbClr val="59E2BD"/>
@@ -17491,6 +18362,7 @@
               </a:defRPr>
             </a:lvl5pPr>
             <a:lvl6pPr algn="l">
+              <a:buNone/>
               <a:defRPr sz="2175" b="1">
                 <a:solidFill>
                   <a:srgbClr val="59E2BD"/>
@@ -17501,6 +18373,7 @@
               </a:defRPr>
             </a:lvl6pPr>
             <a:lvl7pPr algn="l">
+              <a:buNone/>
               <a:defRPr sz="2175" b="1">
                 <a:solidFill>
                   <a:srgbClr val="59E2BD"/>
@@ -17511,6 +18384,7 @@
               </a:defRPr>
             </a:lvl7pPr>
             <a:lvl8pPr algn="l">
+              <a:buNone/>
               <a:defRPr sz="2175" b="1">
                 <a:solidFill>
                   <a:srgbClr val="59E2BD"/>
@@ -17521,6 +18395,7 @@
               </a:defRPr>
             </a:lvl8pPr>
             <a:lvl9pPr algn="l">
+              <a:buNone/>
               <a:defRPr sz="2175" b="1">
                 <a:solidFill>
                   <a:srgbClr val="59E2BD"/>
@@ -17533,6 +18408,7 @@
           </a:lstStyle>
           <a:p xmlns:a="http://schemas.openxmlformats.org/drawingml/2006/main">
             <a:pPr algn="l">
+              <a:buNone/>
               <a:defRPr sz="2175" b="1">
                 <a:solidFill>
                   <a:srgbClr val="59E2BD"/>
@@ -17550,7 +18426,7 @@
                 <a:latin typeface="Segoe UI"/>
                 <a:ea typeface="Segoe UI"/>
                 <a:cs typeface="Segoe UI"/>
-                <a:hlinkClick xmlns:r="http://schemas.openxmlformats.org/officeDocument/2006/relationships" r:id="R99155716bc7c4700"/>
+                <a:hlinkClick xmlns:r="http://schemas.openxmlformats.org/officeDocument/2006/relationships" r:id="Red10990336c743e3"/>
               </a:rPr>
               <a:t>Read the verified public ASI:One demo</a:t>
             </a:r>
@@ -17600,6 +18476,7 @@
               </a:defRPr>
             </a:defPPr>
             <a:lvl1pPr algn="l">
+              <a:buNone/>
               <a:defRPr sz="1650" b="0">
                 <a:solidFill>
                   <a:srgbClr val="B3C5DD"/>
@@ -17610,6 +18487,7 @@
               </a:defRPr>
             </a:lvl1pPr>
             <a:lvl2pPr algn="l">
+              <a:buNone/>
               <a:defRPr sz="1650" b="0">
                 <a:solidFill>
                   <a:srgbClr val="B3C5DD"/>
@@ -17620,6 +18498,7 @@
               </a:defRPr>
             </a:lvl2pPr>
             <a:lvl3pPr algn="l">
+              <a:buNone/>
               <a:defRPr sz="1650" b="0">
                 <a:solidFill>
                   <a:srgbClr val="B3C5DD"/>
@@ -17630,6 +18509,7 @@
               </a:defRPr>
             </a:lvl3pPr>
             <a:lvl4pPr algn="l">
+              <a:buNone/>
               <a:defRPr sz="1650" b="0">
                 <a:solidFill>
                   <a:srgbClr val="B3C5DD"/>
@@ -17640,6 +18520,7 @@
               </a:defRPr>
             </a:lvl4pPr>
             <a:lvl5pPr algn="l">
+              <a:buNone/>
               <a:defRPr sz="1650" b="0">
                 <a:solidFill>
                   <a:srgbClr val="B3C5DD"/>
@@ -17650,6 +18531,7 @@
               </a:defRPr>
             </a:lvl5pPr>
             <a:lvl6pPr algn="l">
+              <a:buNone/>
               <a:defRPr sz="1650" b="0">
                 <a:solidFill>
                   <a:srgbClr val="B3C5DD"/>
@@ -17660,6 +18542,7 @@
               </a:defRPr>
             </a:lvl6pPr>
             <a:lvl7pPr algn="l">
+              <a:buNone/>
               <a:defRPr sz="1650" b="0">
                 <a:solidFill>
                   <a:srgbClr val="B3C5DD"/>
@@ -17670,6 +18553,7 @@
               </a:defRPr>
             </a:lvl7pPr>
             <a:lvl8pPr algn="l">
+              <a:buNone/>
               <a:defRPr sz="1650" b="0">
                 <a:solidFill>
                   <a:srgbClr val="B3C5DD"/>
@@ -17680,6 +18564,7 @@
               </a:defRPr>
             </a:lvl8pPr>
             <a:lvl9pPr algn="l">
+              <a:buNone/>
               <a:defRPr sz="1650" b="0">
                 <a:solidFill>
                   <a:srgbClr val="B3C5DD"/>
@@ -17692,6 +18577,7 @@
           </a:lstStyle>
           <a:p xmlns:a="http://schemas.openxmlformats.org/drawingml/2006/main">
             <a:pPr algn="l">
+              <a:buNone/>
               <a:defRPr sz="1650" b="0">
                 <a:solidFill>
                   <a:srgbClr val="B3C5DD"/>
@@ -17758,6 +18644,7 @@
               </a:defRPr>
             </a:defPPr>
             <a:lvl1pPr algn="l">
+              <a:buNone/>
               <a:defRPr sz="1950" b="1">
                 <a:solidFill>
                   <a:srgbClr val="59E2BD"/>
@@ -17768,6 +18655,7 @@
               </a:defRPr>
             </a:lvl1pPr>
             <a:lvl2pPr algn="l">
+              <a:buNone/>
               <a:defRPr sz="1950" b="1">
                 <a:solidFill>
                   <a:srgbClr val="59E2BD"/>
@@ -17778,6 +18666,7 @@
               </a:defRPr>
             </a:lvl2pPr>
             <a:lvl3pPr algn="l">
+              <a:buNone/>
               <a:defRPr sz="1950" b="1">
                 <a:solidFill>
                   <a:srgbClr val="59E2BD"/>
@@ -17788,6 +18677,7 @@
               </a:defRPr>
             </a:lvl3pPr>
             <a:lvl4pPr algn="l">
+              <a:buNone/>
               <a:defRPr sz="1950" b="1">
                 <a:solidFill>
                   <a:srgbClr val="59E2BD"/>
@@ -17798,6 +18688,7 @@
               </a:defRPr>
             </a:lvl4pPr>
             <a:lvl5pPr algn="l">
+              <a:buNone/>
               <a:defRPr sz="1950" b="1">
                 <a:solidFill>
                   <a:srgbClr val="59E2BD"/>
@@ -17808,6 +18699,7 @@
               </a:defRPr>
             </a:lvl5pPr>
             <a:lvl6pPr algn="l">
+              <a:buNone/>
               <a:defRPr sz="1950" b="1">
                 <a:solidFill>
                   <a:srgbClr val="59E2BD"/>
@@ -17818,6 +18710,7 @@
               </a:defRPr>
             </a:lvl6pPr>
             <a:lvl7pPr algn="l">
+              <a:buNone/>
               <a:defRPr sz="1950" b="1">
                 <a:solidFill>
                   <a:srgbClr val="59E2BD"/>
@@ -17828,6 +18721,7 @@
               </a:defRPr>
             </a:lvl7pPr>
             <a:lvl8pPr algn="l">
+              <a:buNone/>
               <a:defRPr sz="1950" b="1">
                 <a:solidFill>
                   <a:srgbClr val="59E2BD"/>
@@ -17838,6 +18732,7 @@
               </a:defRPr>
             </a:lvl8pPr>
             <a:lvl9pPr algn="l">
+              <a:buNone/>
               <a:defRPr sz="1950" b="1">
                 <a:solidFill>
                   <a:srgbClr val="59E2BD"/>
@@ -17850,6 +18745,7 @@
           </a:lstStyle>
           <a:p xmlns:a="http://schemas.openxmlformats.org/drawingml/2006/main">
             <a:pPr algn="l">
+              <a:buNone/>
               <a:defRPr sz="1950" b="1">
                 <a:solidFill>
                   <a:srgbClr val="59E2BD"/>
@@ -17916,6 +18812,7 @@
               </a:defRPr>
             </a:defPPr>
             <a:lvl1pPr algn="l">
+              <a:buNone/>
               <a:defRPr sz="1875" b="0">
                 <a:solidFill>
                   <a:srgbClr val="F4F7FC"/>
@@ -17926,6 +18823,7 @@
               </a:defRPr>
             </a:lvl1pPr>
             <a:lvl2pPr algn="l">
+              <a:buNone/>
               <a:defRPr sz="1875" b="0">
                 <a:solidFill>
                   <a:srgbClr val="F4F7FC"/>
@@ -17936,6 +18834,7 @@
               </a:defRPr>
             </a:lvl2pPr>
             <a:lvl3pPr algn="l">
+              <a:buNone/>
               <a:defRPr sz="1875" b="0">
                 <a:solidFill>
                   <a:srgbClr val="F4F7FC"/>
@@ -17946,6 +18845,7 @@
               </a:defRPr>
             </a:lvl3pPr>
             <a:lvl4pPr algn="l">
+              <a:buNone/>
               <a:defRPr sz="1875" b="0">
                 <a:solidFill>
                   <a:srgbClr val="F4F7FC"/>
@@ -17956,6 +18856,7 @@
               </a:defRPr>
             </a:lvl4pPr>
             <a:lvl5pPr algn="l">
+              <a:buNone/>
               <a:defRPr sz="1875" b="0">
                 <a:solidFill>
                   <a:srgbClr val="F4F7FC"/>
@@ -17966,6 +18867,7 @@
               </a:defRPr>
             </a:lvl5pPr>
             <a:lvl6pPr algn="l">
+              <a:buNone/>
               <a:defRPr sz="1875" b="0">
                 <a:solidFill>
                   <a:srgbClr val="F4F7FC"/>
@@ -17976,6 +18878,7 @@
               </a:defRPr>
             </a:lvl6pPr>
             <a:lvl7pPr algn="l">
+              <a:buNone/>
               <a:defRPr sz="1875" b="0">
                 <a:solidFill>
                   <a:srgbClr val="F4F7FC"/>
@@ -17986,6 +18889,7 @@
               </a:defRPr>
             </a:lvl7pPr>
             <a:lvl8pPr algn="l">
+              <a:buNone/>
               <a:defRPr sz="1875" b="0">
                 <a:solidFill>
                   <a:srgbClr val="F4F7FC"/>
@@ -17996,6 +18900,7 @@
               </a:defRPr>
             </a:lvl8pPr>
             <a:lvl9pPr algn="l">
+              <a:buNone/>
               <a:defRPr sz="1875" b="0">
                 <a:solidFill>
                   <a:srgbClr val="F4F7FC"/>
@@ -18008,6 +18913,7 @@
           </a:lstStyle>
           <a:p xmlns:a="http://schemas.openxmlformats.org/drawingml/2006/main">
             <a:pPr algn="l">
+              <a:buNone/>
               <a:defRPr sz="1875" b="0">
                 <a:solidFill>
                   <a:srgbClr val="F4F7FC"/>
@@ -18031,6 +18937,7 @@
           </a:p>
           <a:p xmlns:a="http://schemas.openxmlformats.org/drawingml/2006/main">
             <a:pPr algn="l">
+              <a:buNone/>
               <a:defRPr sz="1875" b="0">
                 <a:solidFill>
                   <a:srgbClr val="F4F7FC"/>
@@ -18054,6 +18961,7 @@
           </a:p>
           <a:p xmlns:a="http://schemas.openxmlformats.org/drawingml/2006/main">
             <a:pPr algn="l">
+              <a:buNone/>
               <a:defRPr sz="1875" b="0">
                 <a:solidFill>
                   <a:srgbClr val="F4F7FC"/>
